--- a/Documentation/FitPulse Analytics - Enterprise Health Data Intelligence Platform.pptx
+++ b/Documentation/FitPulse Analytics - Enterprise Health Data Intelligence Platform.pptx
@@ -5,7 +5,7 @@
     <p:sldMasterId id="2147483659" r:id="rId1"/>
   </p:sldMasterIdLst>
   <p:notesMasterIdLst>
-    <p:notesMasterId r:id="rId24"/>
+    <p:notesMasterId r:id="rId22"/>
   </p:notesMasterIdLst>
   <p:sldIdLst>
     <p:sldId id="256" r:id="rId2"/>
@@ -18,38 +18,36 @@
     <p:sldId id="263" r:id="rId9"/>
     <p:sldId id="264" r:id="rId10"/>
     <p:sldId id="265" r:id="rId11"/>
-    <p:sldId id="266" r:id="rId12"/>
-    <p:sldId id="267" r:id="rId13"/>
-    <p:sldId id="268" r:id="rId14"/>
-    <p:sldId id="269" r:id="rId15"/>
-    <p:sldId id="270" r:id="rId16"/>
-    <p:sldId id="271" r:id="rId17"/>
-    <p:sldId id="272" r:id="rId18"/>
-    <p:sldId id="274" r:id="rId19"/>
-    <p:sldId id="275" r:id="rId20"/>
-    <p:sldId id="276" r:id="rId21"/>
-    <p:sldId id="277" r:id="rId22"/>
-    <p:sldId id="273" r:id="rId23"/>
+    <p:sldId id="268" r:id="rId12"/>
+    <p:sldId id="269" r:id="rId13"/>
+    <p:sldId id="282" r:id="rId14"/>
+    <p:sldId id="274" r:id="rId15"/>
+    <p:sldId id="276" r:id="rId16"/>
+    <p:sldId id="277" r:id="rId17"/>
+    <p:sldId id="278" r:id="rId18"/>
+    <p:sldId id="279" r:id="rId19"/>
+    <p:sldId id="281" r:id="rId20"/>
+    <p:sldId id="273" r:id="rId21"/>
   </p:sldIdLst>
   <p:sldSz cx="12192000" cy="6858000"/>
   <p:notesSz cx="6858000" cy="9144000"/>
   <p:embeddedFontLst>
     <p:embeddedFont>
       <p:font typeface="DM Mono" panose="020B0509040201040103" pitchFamily="49" charset="0"/>
-      <p:regular r:id="rId25"/>
-      <p:italic r:id="rId26"/>
+      <p:regular r:id="rId23"/>
+      <p:italic r:id="rId24"/>
     </p:embeddedFont>
     <p:embeddedFont>
       <p:font typeface="DM Sans" pitchFamily="2" charset="0"/>
-      <p:regular r:id="rId27"/>
-      <p:bold r:id="rId28"/>
-      <p:italic r:id="rId29"/>
-      <p:boldItalic r:id="rId30"/>
+      <p:regular r:id="rId25"/>
+      <p:bold r:id="rId26"/>
+      <p:italic r:id="rId27"/>
+      <p:boldItalic r:id="rId28"/>
     </p:embeddedFont>
     <p:embeddedFont>
       <p:font typeface="Syne" panose="020B0604020202020204" charset="0"/>
-      <p:regular r:id="rId31"/>
-      <p:bold r:id="rId32"/>
+      <p:regular r:id="rId29"/>
+      <p:bold r:id="rId30"/>
     </p:embeddedFont>
   </p:embeddedFontLst>
   <p:defaultTextStyle>
@@ -954,7 +952,7 @@
   <p:cSld>
     <p:spTree>
       <p:nvGrpSpPr>
-        <p:cNvPr id="1" name="Shape 269"/>
+        <p:cNvPr id="1" name="Shape 279"/>
         <p:cNvGrpSpPr/>
         <p:nvPr/>
       </p:nvGrpSpPr>
@@ -968,7 +966,7 @@
       </p:grpSpPr>
       <p:sp>
         <p:nvSpPr>
-          <p:cNvPr id="270" name="Google Shape;270;g3d2718e7292_0_19:notes"/>
+          <p:cNvPr id="280" name="Google Shape;280;g3d2718e7292_0_26:notes"/>
           <p:cNvSpPr>
             <a:spLocks noGrp="1" noRot="1" noChangeAspect="1"/>
           </p:cNvSpPr>
@@ -1009,7 +1007,7 @@
       </p:sp>
       <p:sp>
         <p:nvSpPr>
-          <p:cNvPr id="271" name="Google Shape;271;g3d2718e7292_0_19:notes"/>
+          <p:cNvPr id="281" name="Google Shape;281;g3d2718e7292_0_26:notes"/>
           <p:cNvSpPr txBox="1">
             <a:spLocks noGrp="1"/>
           </p:cNvSpPr>
@@ -1054,214 +1052,6 @@
 </file>
 
 <file path=ppt/notesSlides/notesSlide12.xml><?xml version="1.0" encoding="utf-8"?>
-<p:notes xmlns:a="http://schemas.openxmlformats.org/drawingml/2006/main" xmlns:r="http://schemas.openxmlformats.org/officeDocument/2006/relationships" xmlns:p="http://schemas.openxmlformats.org/presentationml/2006/main" showMasterSp="0" showMasterPhAnim="0">
-  <p:cSld>
-    <p:spTree>
-      <p:nvGrpSpPr>
-        <p:cNvPr id="1" name="Shape 274"/>
-        <p:cNvGrpSpPr/>
-        <p:nvPr/>
-      </p:nvGrpSpPr>
-      <p:grpSpPr>
-        <a:xfrm>
-          <a:off x="0" y="0"/>
-          <a:ext cx="0" cy="0"/>
-          <a:chOff x="0" y="0"/>
-          <a:chExt cx="0" cy="0"/>
-        </a:xfrm>
-      </p:grpSpPr>
-      <p:sp>
-        <p:nvSpPr>
-          <p:cNvPr id="275" name="Google Shape;275;g3d2718e7292_0_23:notes"/>
-          <p:cNvSpPr>
-            <a:spLocks noGrp="1" noRot="1" noChangeAspect="1"/>
-          </p:cNvSpPr>
-          <p:nvPr>
-            <p:ph type="sldImg" idx="2"/>
-          </p:nvPr>
-        </p:nvSpPr>
-        <p:spPr>
-          <a:xfrm>
-            <a:off x="1143225" y="685800"/>
-            <a:ext cx="4572300" cy="3429000"/>
-          </a:xfrm>
-          <a:custGeom>
-            <a:avLst/>
-            <a:gdLst/>
-            <a:ahLst/>
-            <a:cxnLst/>
-            <a:rect l="l" t="t" r="r" b="b"/>
-            <a:pathLst>
-              <a:path w="120000" h="120000" extrusionOk="0">
-                <a:moveTo>
-                  <a:pt x="0" y="0"/>
-                </a:moveTo>
-                <a:lnTo>
-                  <a:pt x="120000" y="0"/>
-                </a:lnTo>
-                <a:lnTo>
-                  <a:pt x="120000" y="120000"/>
-                </a:lnTo>
-                <a:lnTo>
-                  <a:pt x="0" y="120000"/>
-                </a:lnTo>
-                <a:close/>
-              </a:path>
-            </a:pathLst>
-          </a:custGeom>
-        </p:spPr>
-      </p:sp>
-      <p:sp>
-        <p:nvSpPr>
-          <p:cNvPr id="276" name="Google Shape;276;g3d2718e7292_0_23:notes"/>
-          <p:cNvSpPr txBox="1">
-            <a:spLocks noGrp="1"/>
-          </p:cNvSpPr>
-          <p:nvPr>
-            <p:ph type="body" idx="1"/>
-          </p:nvPr>
-        </p:nvSpPr>
-        <p:spPr>
-          <a:xfrm>
-            <a:off x="685800" y="4343400"/>
-            <a:ext cx="5486400" cy="4114800"/>
-          </a:xfrm>
-          <a:prstGeom prst="rect">
-            <a:avLst/>
-          </a:prstGeom>
-        </p:spPr>
-        <p:txBody>
-          <a:bodyPr spcFirstLastPara="1" wrap="square" lIns="91425" tIns="91425" rIns="91425" bIns="91425" anchor="t" anchorCtr="0">
-            <a:noAutofit/>
-          </a:bodyPr>
-          <a:lstStyle/>
-          <a:p>
-            <a:pPr marL="0" lvl="0" indent="0" algn="l" rtl="0">
-              <a:spcBef>
-                <a:spcPts val="0"/>
-              </a:spcBef>
-              <a:spcAft>
-                <a:spcPts val="0"/>
-              </a:spcAft>
-              <a:buNone/>
-            </a:pPr>
-            <a:endParaRPr/>
-          </a:p>
-        </p:txBody>
-      </p:sp>
-    </p:spTree>
-  </p:cSld>
-  <p:clrMapOvr>
-    <a:masterClrMapping/>
-  </p:clrMapOvr>
-</p:notes>
-</file>
-
-<file path=ppt/notesSlides/notesSlide13.xml><?xml version="1.0" encoding="utf-8"?>
-<p:notes xmlns:a="http://schemas.openxmlformats.org/drawingml/2006/main" xmlns:r="http://schemas.openxmlformats.org/officeDocument/2006/relationships" xmlns:p="http://schemas.openxmlformats.org/presentationml/2006/main" showMasterSp="0" showMasterPhAnim="0">
-  <p:cSld>
-    <p:spTree>
-      <p:nvGrpSpPr>
-        <p:cNvPr id="1" name="Shape 279"/>
-        <p:cNvGrpSpPr/>
-        <p:nvPr/>
-      </p:nvGrpSpPr>
-      <p:grpSpPr>
-        <a:xfrm>
-          <a:off x="0" y="0"/>
-          <a:ext cx="0" cy="0"/>
-          <a:chOff x="0" y="0"/>
-          <a:chExt cx="0" cy="0"/>
-        </a:xfrm>
-      </p:grpSpPr>
-      <p:sp>
-        <p:nvSpPr>
-          <p:cNvPr id="280" name="Google Shape;280;g3d2718e7292_0_26:notes"/>
-          <p:cNvSpPr>
-            <a:spLocks noGrp="1" noRot="1" noChangeAspect="1"/>
-          </p:cNvSpPr>
-          <p:nvPr>
-            <p:ph type="sldImg" idx="2"/>
-          </p:nvPr>
-        </p:nvSpPr>
-        <p:spPr>
-          <a:xfrm>
-            <a:off x="1143225" y="685800"/>
-            <a:ext cx="4572300" cy="3429000"/>
-          </a:xfrm>
-          <a:custGeom>
-            <a:avLst/>
-            <a:gdLst/>
-            <a:ahLst/>
-            <a:cxnLst/>
-            <a:rect l="l" t="t" r="r" b="b"/>
-            <a:pathLst>
-              <a:path w="120000" h="120000" extrusionOk="0">
-                <a:moveTo>
-                  <a:pt x="0" y="0"/>
-                </a:moveTo>
-                <a:lnTo>
-                  <a:pt x="120000" y="0"/>
-                </a:lnTo>
-                <a:lnTo>
-                  <a:pt x="120000" y="120000"/>
-                </a:lnTo>
-                <a:lnTo>
-                  <a:pt x="0" y="120000"/>
-                </a:lnTo>
-                <a:close/>
-              </a:path>
-            </a:pathLst>
-          </a:custGeom>
-        </p:spPr>
-      </p:sp>
-      <p:sp>
-        <p:nvSpPr>
-          <p:cNvPr id="281" name="Google Shape;281;g3d2718e7292_0_26:notes"/>
-          <p:cNvSpPr txBox="1">
-            <a:spLocks noGrp="1"/>
-          </p:cNvSpPr>
-          <p:nvPr>
-            <p:ph type="body" idx="1"/>
-          </p:nvPr>
-        </p:nvSpPr>
-        <p:spPr>
-          <a:xfrm>
-            <a:off x="685800" y="4343400"/>
-            <a:ext cx="5486400" cy="4114800"/>
-          </a:xfrm>
-          <a:prstGeom prst="rect">
-            <a:avLst/>
-          </a:prstGeom>
-        </p:spPr>
-        <p:txBody>
-          <a:bodyPr spcFirstLastPara="1" wrap="square" lIns="91425" tIns="91425" rIns="91425" bIns="91425" anchor="t" anchorCtr="0">
-            <a:noAutofit/>
-          </a:bodyPr>
-          <a:lstStyle/>
-          <a:p>
-            <a:pPr marL="0" lvl="0" indent="0" algn="l" rtl="0">
-              <a:spcBef>
-                <a:spcPts val="0"/>
-              </a:spcBef>
-              <a:spcAft>
-                <a:spcPts val="0"/>
-              </a:spcAft>
-              <a:buNone/>
-            </a:pPr>
-            <a:endParaRPr/>
-          </a:p>
-        </p:txBody>
-      </p:sp>
-    </p:spTree>
-  </p:cSld>
-  <p:clrMapOvr>
-    <a:masterClrMapping/>
-  </p:clrMapOvr>
-</p:notes>
-</file>
-
-<file path=ppt/notesSlides/notesSlide14.xml><?xml version="1.0" encoding="utf-8"?>
 <p:notes xmlns:a="http://schemas.openxmlformats.org/drawingml/2006/main" xmlns:r="http://schemas.openxmlformats.org/officeDocument/2006/relationships" xmlns:p="http://schemas.openxmlformats.org/presentationml/2006/main" showMasterSp="0" showMasterPhAnim="0">
   <p:cSld>
     <p:spTree>
@@ -1365,319 +1155,7 @@
 </p:notes>
 </file>
 
-<file path=ppt/notesSlides/notesSlide15.xml><?xml version="1.0" encoding="utf-8"?>
-<p:notes xmlns:a="http://schemas.openxmlformats.org/drawingml/2006/main" xmlns:r="http://schemas.openxmlformats.org/officeDocument/2006/relationships" xmlns:p="http://schemas.openxmlformats.org/presentationml/2006/main" showMasterSp="0" showMasterPhAnim="0">
-  <p:cSld>
-    <p:spTree>
-      <p:nvGrpSpPr>
-        <p:cNvPr id="1" name="Shape 291"/>
-        <p:cNvGrpSpPr/>
-        <p:nvPr/>
-      </p:nvGrpSpPr>
-      <p:grpSpPr>
-        <a:xfrm>
-          <a:off x="0" y="0"/>
-          <a:ext cx="0" cy="0"/>
-          <a:chOff x="0" y="0"/>
-          <a:chExt cx="0" cy="0"/>
-        </a:xfrm>
-      </p:grpSpPr>
-      <p:sp>
-        <p:nvSpPr>
-          <p:cNvPr id="292" name="Google Shape;292;g3d2718e7292_0_31:notes"/>
-          <p:cNvSpPr>
-            <a:spLocks noGrp="1" noRot="1" noChangeAspect="1"/>
-          </p:cNvSpPr>
-          <p:nvPr>
-            <p:ph type="sldImg" idx="2"/>
-          </p:nvPr>
-        </p:nvSpPr>
-        <p:spPr>
-          <a:xfrm>
-            <a:off x="1143225" y="685800"/>
-            <a:ext cx="4572300" cy="3429000"/>
-          </a:xfrm>
-          <a:custGeom>
-            <a:avLst/>
-            <a:gdLst/>
-            <a:ahLst/>
-            <a:cxnLst/>
-            <a:rect l="l" t="t" r="r" b="b"/>
-            <a:pathLst>
-              <a:path w="120000" h="120000" extrusionOk="0">
-                <a:moveTo>
-                  <a:pt x="0" y="0"/>
-                </a:moveTo>
-                <a:lnTo>
-                  <a:pt x="120000" y="0"/>
-                </a:lnTo>
-                <a:lnTo>
-                  <a:pt x="120000" y="120000"/>
-                </a:lnTo>
-                <a:lnTo>
-                  <a:pt x="0" y="120000"/>
-                </a:lnTo>
-                <a:close/>
-              </a:path>
-            </a:pathLst>
-          </a:custGeom>
-        </p:spPr>
-      </p:sp>
-      <p:sp>
-        <p:nvSpPr>
-          <p:cNvPr id="293" name="Google Shape;293;g3d2718e7292_0_31:notes"/>
-          <p:cNvSpPr txBox="1">
-            <a:spLocks noGrp="1"/>
-          </p:cNvSpPr>
-          <p:nvPr>
-            <p:ph type="body" idx="1"/>
-          </p:nvPr>
-        </p:nvSpPr>
-        <p:spPr>
-          <a:xfrm>
-            <a:off x="685800" y="4343400"/>
-            <a:ext cx="5486400" cy="4114800"/>
-          </a:xfrm>
-          <a:prstGeom prst="rect">
-            <a:avLst/>
-          </a:prstGeom>
-        </p:spPr>
-        <p:txBody>
-          <a:bodyPr spcFirstLastPara="1" wrap="square" lIns="91425" tIns="91425" rIns="91425" bIns="91425" anchor="t" anchorCtr="0">
-            <a:noAutofit/>
-          </a:bodyPr>
-          <a:lstStyle/>
-          <a:p>
-            <a:pPr marL="0" lvl="0" indent="0" algn="l" rtl="0">
-              <a:spcBef>
-                <a:spcPts val="0"/>
-              </a:spcBef>
-              <a:spcAft>
-                <a:spcPts val="0"/>
-              </a:spcAft>
-              <a:buNone/>
-            </a:pPr>
-            <a:endParaRPr/>
-          </a:p>
-        </p:txBody>
-      </p:sp>
-    </p:spTree>
-  </p:cSld>
-  <p:clrMapOvr>
-    <a:masterClrMapping/>
-  </p:clrMapOvr>
-</p:notes>
-</file>
-
-<file path=ppt/notesSlides/notesSlide16.xml><?xml version="1.0" encoding="utf-8"?>
-<p:notes xmlns:a="http://schemas.openxmlformats.org/drawingml/2006/main" xmlns:r="http://schemas.openxmlformats.org/officeDocument/2006/relationships" xmlns:p="http://schemas.openxmlformats.org/presentationml/2006/main" showMasterSp="0" showMasterPhAnim="0">
-  <p:cSld>
-    <p:spTree>
-      <p:nvGrpSpPr>
-        <p:cNvPr id="1" name="Shape 296"/>
-        <p:cNvGrpSpPr/>
-        <p:nvPr/>
-      </p:nvGrpSpPr>
-      <p:grpSpPr>
-        <a:xfrm>
-          <a:off x="0" y="0"/>
-          <a:ext cx="0" cy="0"/>
-          <a:chOff x="0" y="0"/>
-          <a:chExt cx="0" cy="0"/>
-        </a:xfrm>
-      </p:grpSpPr>
-      <p:sp>
-        <p:nvSpPr>
-          <p:cNvPr id="297" name="Google Shape;297;g3d2718e7292_0_41:notes"/>
-          <p:cNvSpPr>
-            <a:spLocks noGrp="1" noRot="1" noChangeAspect="1"/>
-          </p:cNvSpPr>
-          <p:nvPr>
-            <p:ph type="sldImg" idx="2"/>
-          </p:nvPr>
-        </p:nvSpPr>
-        <p:spPr>
-          <a:xfrm>
-            <a:off x="1143225" y="685800"/>
-            <a:ext cx="4572300" cy="3429000"/>
-          </a:xfrm>
-          <a:custGeom>
-            <a:avLst/>
-            <a:gdLst/>
-            <a:ahLst/>
-            <a:cxnLst/>
-            <a:rect l="l" t="t" r="r" b="b"/>
-            <a:pathLst>
-              <a:path w="120000" h="120000" extrusionOk="0">
-                <a:moveTo>
-                  <a:pt x="0" y="0"/>
-                </a:moveTo>
-                <a:lnTo>
-                  <a:pt x="120000" y="0"/>
-                </a:lnTo>
-                <a:lnTo>
-                  <a:pt x="120000" y="120000"/>
-                </a:lnTo>
-                <a:lnTo>
-                  <a:pt x="0" y="120000"/>
-                </a:lnTo>
-                <a:close/>
-              </a:path>
-            </a:pathLst>
-          </a:custGeom>
-        </p:spPr>
-      </p:sp>
-      <p:sp>
-        <p:nvSpPr>
-          <p:cNvPr id="298" name="Google Shape;298;g3d2718e7292_0_41:notes"/>
-          <p:cNvSpPr txBox="1">
-            <a:spLocks noGrp="1"/>
-          </p:cNvSpPr>
-          <p:nvPr>
-            <p:ph type="body" idx="1"/>
-          </p:nvPr>
-        </p:nvSpPr>
-        <p:spPr>
-          <a:xfrm>
-            <a:off x="685800" y="4343400"/>
-            <a:ext cx="5486400" cy="4114800"/>
-          </a:xfrm>
-          <a:prstGeom prst="rect">
-            <a:avLst/>
-          </a:prstGeom>
-        </p:spPr>
-        <p:txBody>
-          <a:bodyPr spcFirstLastPara="1" wrap="square" lIns="91425" tIns="91425" rIns="91425" bIns="91425" anchor="t" anchorCtr="0">
-            <a:noAutofit/>
-          </a:bodyPr>
-          <a:lstStyle/>
-          <a:p>
-            <a:pPr marL="0" lvl="0" indent="0" algn="l" rtl="0">
-              <a:spcBef>
-                <a:spcPts val="0"/>
-              </a:spcBef>
-              <a:spcAft>
-                <a:spcPts val="0"/>
-              </a:spcAft>
-              <a:buNone/>
-            </a:pPr>
-            <a:endParaRPr/>
-          </a:p>
-        </p:txBody>
-      </p:sp>
-    </p:spTree>
-  </p:cSld>
-  <p:clrMapOvr>
-    <a:masterClrMapping/>
-  </p:clrMapOvr>
-</p:notes>
-</file>
-
-<file path=ppt/notesSlides/notesSlide17.xml><?xml version="1.0" encoding="utf-8"?>
-<p:notes xmlns:a="http://schemas.openxmlformats.org/drawingml/2006/main" xmlns:r="http://schemas.openxmlformats.org/officeDocument/2006/relationships" xmlns:p="http://schemas.openxmlformats.org/presentationml/2006/main" showMasterSp="0" showMasterPhAnim="0">
-  <p:cSld>
-    <p:spTree>
-      <p:nvGrpSpPr>
-        <p:cNvPr id="1" name="Shape 301"/>
-        <p:cNvGrpSpPr/>
-        <p:nvPr/>
-      </p:nvGrpSpPr>
-      <p:grpSpPr>
-        <a:xfrm>
-          <a:off x="0" y="0"/>
-          <a:ext cx="0" cy="0"/>
-          <a:chOff x="0" y="0"/>
-          <a:chExt cx="0" cy="0"/>
-        </a:xfrm>
-      </p:grpSpPr>
-      <p:sp>
-        <p:nvSpPr>
-          <p:cNvPr id="302" name="Google Shape;302;g3d2718e7292_0_45:notes"/>
-          <p:cNvSpPr>
-            <a:spLocks noGrp="1" noRot="1" noChangeAspect="1"/>
-          </p:cNvSpPr>
-          <p:nvPr>
-            <p:ph type="sldImg" idx="2"/>
-          </p:nvPr>
-        </p:nvSpPr>
-        <p:spPr>
-          <a:xfrm>
-            <a:off x="1143225" y="685800"/>
-            <a:ext cx="4572300" cy="3429000"/>
-          </a:xfrm>
-          <a:custGeom>
-            <a:avLst/>
-            <a:gdLst/>
-            <a:ahLst/>
-            <a:cxnLst/>
-            <a:rect l="l" t="t" r="r" b="b"/>
-            <a:pathLst>
-              <a:path w="120000" h="120000" extrusionOk="0">
-                <a:moveTo>
-                  <a:pt x="0" y="0"/>
-                </a:moveTo>
-                <a:lnTo>
-                  <a:pt x="120000" y="0"/>
-                </a:lnTo>
-                <a:lnTo>
-                  <a:pt x="120000" y="120000"/>
-                </a:lnTo>
-                <a:lnTo>
-                  <a:pt x="0" y="120000"/>
-                </a:lnTo>
-                <a:close/>
-              </a:path>
-            </a:pathLst>
-          </a:custGeom>
-        </p:spPr>
-      </p:sp>
-      <p:sp>
-        <p:nvSpPr>
-          <p:cNvPr id="303" name="Google Shape;303;g3d2718e7292_0_45:notes"/>
-          <p:cNvSpPr txBox="1">
-            <a:spLocks noGrp="1"/>
-          </p:cNvSpPr>
-          <p:nvPr>
-            <p:ph type="body" idx="1"/>
-          </p:nvPr>
-        </p:nvSpPr>
-        <p:spPr>
-          <a:xfrm>
-            <a:off x="685800" y="4343400"/>
-            <a:ext cx="5486400" cy="4114800"/>
-          </a:xfrm>
-          <a:prstGeom prst="rect">
-            <a:avLst/>
-          </a:prstGeom>
-        </p:spPr>
-        <p:txBody>
-          <a:bodyPr spcFirstLastPara="1" wrap="square" lIns="91425" tIns="91425" rIns="91425" bIns="91425" anchor="t" anchorCtr="0">
-            <a:noAutofit/>
-          </a:bodyPr>
-          <a:lstStyle/>
-          <a:p>
-            <a:pPr marL="0" lvl="0" indent="0" algn="l" rtl="0">
-              <a:spcBef>
-                <a:spcPts val="0"/>
-              </a:spcBef>
-              <a:spcAft>
-                <a:spcPts val="0"/>
-              </a:spcAft>
-              <a:buNone/>
-            </a:pPr>
-            <a:endParaRPr/>
-          </a:p>
-        </p:txBody>
-      </p:sp>
-    </p:spTree>
-  </p:cSld>
-  <p:clrMapOvr>
-    <a:masterClrMapping/>
-  </p:clrMapOvr>
-</p:notes>
-</file>
-
-<file path=ppt/notesSlides/notesSlide18.xml><?xml version="1.0" encoding="utf-8"?>
+<file path=ppt/notesSlides/notesSlide13.xml><?xml version="1.0" encoding="utf-8"?>
 <p:notes xmlns:a="http://schemas.openxmlformats.org/drawingml/2006/main" xmlns:r="http://schemas.openxmlformats.org/officeDocument/2006/relationships" xmlns:p="http://schemas.openxmlformats.org/presentationml/2006/main" showMasterSp="0" showMasterPhAnim="0">
   <p:cSld>
     <p:spTree>
@@ -12847,7 +12325,7 @@
                 <a:cs typeface="Syne"/>
                 <a:sym typeface="Syne"/>
               </a:rPr>
-              <a:t>Overview Milestone-1</a:t>
+              <a:t>Milestone-1</a:t>
             </a:r>
             <a:br>
               <a:rPr lang="en-US" sz="3300" b="1" dirty="0">
@@ -12888,8 +12366,8 @@
         </p:nvSpPr>
         <p:spPr>
           <a:xfrm>
-            <a:off x="457200" y="1600200"/>
-            <a:ext cx="8229600" cy="4526100"/>
+            <a:off x="5022936" y="1600200"/>
+            <a:ext cx="3663863" cy="4149247"/>
           </a:xfrm>
           <a:prstGeom prst="rect">
             <a:avLst/>
@@ -12910,116 +12388,10 @@
               </a:spcAft>
               <a:buNone/>
             </a:pPr>
-            <a:endParaRPr/>
+            <a:endParaRPr dirty="0"/>
           </a:p>
         </p:txBody>
       </p:sp>
-      <p:pic>
-        <p:nvPicPr>
-          <p:cNvPr id="268" name="Google Shape;268;p22"/>
-          <p:cNvPicPr preferRelativeResize="0"/>
-          <p:nvPr/>
-        </p:nvPicPr>
-        <p:blipFill>
-          <a:blip r:embed="rId3">
-            <a:alphaModFix/>
-          </a:blip>
-          <a:stretch>
-            <a:fillRect/>
-          </a:stretch>
-        </p:blipFill>
-        <p:spPr>
-          <a:xfrm>
-            <a:off x="340150" y="1416850"/>
-            <a:ext cx="11130100" cy="4709450"/>
-          </a:xfrm>
-          <a:prstGeom prst="rect">
-            <a:avLst/>
-          </a:prstGeom>
-          <a:noFill/>
-          <a:ln>
-            <a:noFill/>
-          </a:ln>
-        </p:spPr>
-      </p:pic>
-    </p:spTree>
-  </p:cSld>
-  <p:clrMapOvr>
-    <a:masterClrMapping/>
-  </p:clrMapOvr>
-</p:sld>
-</file>
-
-<file path=ppt/slides/slide11.xml><?xml version="1.0" encoding="utf-8"?>
-<p:sld xmlns:a="http://schemas.openxmlformats.org/drawingml/2006/main" xmlns:r="http://schemas.openxmlformats.org/officeDocument/2006/relationships" xmlns:p="http://schemas.openxmlformats.org/presentationml/2006/main">
-  <p:cSld>
-    <p:spTree>
-      <p:nvGrpSpPr>
-        <p:cNvPr id="1" name="Shape 272"/>
-        <p:cNvGrpSpPr/>
-        <p:nvPr/>
-      </p:nvGrpSpPr>
-      <p:grpSpPr>
-        <a:xfrm>
-          <a:off x="0" y="0"/>
-          <a:ext cx="0" cy="0"/>
-          <a:chOff x="0" y="0"/>
-          <a:chExt cx="0" cy="0"/>
-        </a:xfrm>
-      </p:grpSpPr>
-      <p:pic>
-        <p:nvPicPr>
-          <p:cNvPr id="273" name="Google Shape;273;p23"/>
-          <p:cNvPicPr preferRelativeResize="0"/>
-          <p:nvPr/>
-        </p:nvPicPr>
-        <p:blipFill>
-          <a:blip r:embed="rId3">
-            <a:alphaModFix/>
-          </a:blip>
-          <a:stretch>
-            <a:fillRect/>
-          </a:stretch>
-        </p:blipFill>
-        <p:spPr>
-          <a:xfrm>
-            <a:off x="152400" y="152400"/>
-            <a:ext cx="11887199" cy="6307700"/>
-          </a:xfrm>
-          <a:prstGeom prst="rect">
-            <a:avLst/>
-          </a:prstGeom>
-          <a:noFill/>
-          <a:ln>
-            <a:noFill/>
-          </a:ln>
-        </p:spPr>
-      </p:pic>
-    </p:spTree>
-  </p:cSld>
-  <p:clrMapOvr>
-    <a:masterClrMapping/>
-  </p:clrMapOvr>
-</p:sld>
-</file>
-
-<file path=ppt/slides/slide12.xml><?xml version="1.0" encoding="utf-8"?>
-<p:sld xmlns:a="http://schemas.openxmlformats.org/drawingml/2006/main" xmlns:r="http://schemas.openxmlformats.org/officeDocument/2006/relationships" xmlns:p="http://schemas.openxmlformats.org/presentationml/2006/main">
-  <p:cSld>
-    <p:spTree>
-      <p:nvGrpSpPr>
-        <p:cNvPr id="1" name="Shape 277"/>
-        <p:cNvGrpSpPr/>
-        <p:nvPr/>
-      </p:nvGrpSpPr>
-      <p:grpSpPr>
-        <a:xfrm>
-          <a:off x="0" y="0"/>
-          <a:ext cx="0" cy="0"/>
-          <a:chOff x="0" y="0"/>
-          <a:chExt cx="0" cy="0"/>
-        </a:xfrm>
-      </p:grpSpPr>
       <p:pic>
         <p:nvPicPr>
           <p:cNvPr id="278" name="Google Shape;278;p24"/>
@@ -13036,8 +12408,8 @@
         </p:blipFill>
         <p:spPr>
           <a:xfrm>
-            <a:off x="152400" y="152400"/>
-            <a:ext cx="11887200" cy="6260875"/>
+            <a:off x="200416" y="1264050"/>
+            <a:ext cx="11749414" cy="5319300"/>
           </a:xfrm>
           <a:prstGeom prst="rect">
             <a:avLst/>
@@ -13056,7 +12428,7 @@
 </p:sld>
 </file>
 
-<file path=ppt/slides/slide13.xml><?xml version="1.0" encoding="utf-8"?>
+<file path=ppt/slides/slide11.xml><?xml version="1.0" encoding="utf-8"?>
 <p:sld xmlns:a="http://schemas.openxmlformats.org/drawingml/2006/main" xmlns:r="http://schemas.openxmlformats.org/officeDocument/2006/relationships" xmlns:p="http://schemas.openxmlformats.org/presentationml/2006/main">
   <p:cSld>
     <p:spTree>
@@ -13109,7 +12481,7 @@
 </p:sld>
 </file>
 
-<file path=ppt/slides/slide14.xml><?xml version="1.0" encoding="utf-8"?>
+<file path=ppt/slides/slide12.xml><?xml version="1.0" encoding="utf-8"?>
 <p:sld xmlns:a="http://schemas.openxmlformats.org/drawingml/2006/main" xmlns:r="http://schemas.openxmlformats.org/officeDocument/2006/relationships" xmlns:p="http://schemas.openxmlformats.org/presentationml/2006/main">
   <p:cSld>
     <p:spTree>
@@ -13164,7 +12536,7 @@
                 <a:cs typeface="Syne"/>
                 <a:sym typeface="Syne"/>
               </a:rPr>
-              <a:t>Overview Milestone-2</a:t>
+              <a:t>Milestone-2</a:t>
             </a:r>
             <a:br>
               <a:rPr lang="en-US" sz="3300" b="1" dirty="0">
@@ -13227,116 +12599,10 @@
               </a:spcAft>
               <a:buNone/>
             </a:pPr>
-            <a:endParaRPr/>
+            <a:endParaRPr dirty="0"/>
           </a:p>
         </p:txBody>
       </p:sp>
-      <p:pic>
-        <p:nvPicPr>
-          <p:cNvPr id="290" name="Google Shape;290;p26"/>
-          <p:cNvPicPr preferRelativeResize="0"/>
-          <p:nvPr/>
-        </p:nvPicPr>
-        <p:blipFill>
-          <a:blip r:embed="rId3">
-            <a:alphaModFix/>
-          </a:blip>
-          <a:stretch>
-            <a:fillRect/>
-          </a:stretch>
-        </p:blipFill>
-        <p:spPr>
-          <a:xfrm>
-            <a:off x="514925" y="1825650"/>
-            <a:ext cx="11117926" cy="4505274"/>
-          </a:xfrm>
-          <a:prstGeom prst="rect">
-            <a:avLst/>
-          </a:prstGeom>
-          <a:noFill/>
-          <a:ln>
-            <a:noFill/>
-          </a:ln>
-        </p:spPr>
-      </p:pic>
-    </p:spTree>
-  </p:cSld>
-  <p:clrMapOvr>
-    <a:masterClrMapping/>
-  </p:clrMapOvr>
-</p:sld>
-</file>
-
-<file path=ppt/slides/slide15.xml><?xml version="1.0" encoding="utf-8"?>
-<p:sld xmlns:a="http://schemas.openxmlformats.org/drawingml/2006/main" xmlns:r="http://schemas.openxmlformats.org/officeDocument/2006/relationships" xmlns:p="http://schemas.openxmlformats.org/presentationml/2006/main">
-  <p:cSld>
-    <p:spTree>
-      <p:nvGrpSpPr>
-        <p:cNvPr id="1" name="Shape 294"/>
-        <p:cNvGrpSpPr/>
-        <p:nvPr/>
-      </p:nvGrpSpPr>
-      <p:grpSpPr>
-        <a:xfrm>
-          <a:off x="0" y="0"/>
-          <a:ext cx="0" cy="0"/>
-          <a:chOff x="0" y="0"/>
-          <a:chExt cx="0" cy="0"/>
-        </a:xfrm>
-      </p:grpSpPr>
-      <p:pic>
-        <p:nvPicPr>
-          <p:cNvPr id="295" name="Google Shape;295;p27"/>
-          <p:cNvPicPr preferRelativeResize="0"/>
-          <p:nvPr/>
-        </p:nvPicPr>
-        <p:blipFill>
-          <a:blip r:embed="rId3">
-            <a:alphaModFix/>
-          </a:blip>
-          <a:stretch>
-            <a:fillRect/>
-          </a:stretch>
-        </p:blipFill>
-        <p:spPr>
-          <a:xfrm>
-            <a:off x="152400" y="152400"/>
-            <a:ext cx="11887201" cy="6448125"/>
-          </a:xfrm>
-          <a:prstGeom prst="rect">
-            <a:avLst/>
-          </a:prstGeom>
-          <a:noFill/>
-          <a:ln>
-            <a:noFill/>
-          </a:ln>
-        </p:spPr>
-      </p:pic>
-    </p:spTree>
-  </p:cSld>
-  <p:clrMapOvr>
-    <a:masterClrMapping/>
-  </p:clrMapOvr>
-</p:sld>
-</file>
-
-<file path=ppt/slides/slide16.xml><?xml version="1.0" encoding="utf-8"?>
-<p:sld xmlns:a="http://schemas.openxmlformats.org/drawingml/2006/main" xmlns:r="http://schemas.openxmlformats.org/officeDocument/2006/relationships" xmlns:p="http://schemas.openxmlformats.org/presentationml/2006/main">
-  <p:cSld>
-    <p:spTree>
-      <p:nvGrpSpPr>
-        <p:cNvPr id="1" name="Shape 299"/>
-        <p:cNvGrpSpPr/>
-        <p:nvPr/>
-      </p:nvGrpSpPr>
-      <p:grpSpPr>
-        <a:xfrm>
-          <a:off x="0" y="0"/>
-          <a:ext cx="0" cy="0"/>
-          <a:chOff x="0" y="0"/>
-          <a:chExt cx="0" cy="0"/>
-        </a:xfrm>
-      </p:grpSpPr>
       <p:pic>
         <p:nvPicPr>
           <p:cNvPr id="300" name="Google Shape;300;p28"/>
@@ -13353,8 +12619,8 @@
         </p:blipFill>
         <p:spPr>
           <a:xfrm>
-            <a:off x="152400" y="152400"/>
-            <a:ext cx="11574075" cy="6346975"/>
+            <a:off x="175364" y="1685200"/>
+            <a:ext cx="11812044" cy="4814175"/>
           </a:xfrm>
           <a:prstGeom prst="rect">
             <a:avLst/>
@@ -13373,12 +12639,12 @@
 </p:sld>
 </file>
 
-<file path=ppt/slides/slide17.xml><?xml version="1.0" encoding="utf-8"?>
+<file path=ppt/slides/slide13.xml><?xml version="1.0" encoding="utf-8"?>
 <p:sld xmlns:a="http://schemas.openxmlformats.org/drawingml/2006/main" xmlns:r="http://schemas.openxmlformats.org/officeDocument/2006/relationships" xmlns:p="http://schemas.openxmlformats.org/presentationml/2006/main">
   <p:cSld>
     <p:spTree>
       <p:nvGrpSpPr>
-        <p:cNvPr id="1" name="Shape 304"/>
+        <p:cNvPr id="1" name=""/>
         <p:cNvGrpSpPr/>
         <p:nvPr/>
       </p:nvGrpSpPr>
@@ -13392,33 +12658,40 @@
       </p:grpSpPr>
       <p:pic>
         <p:nvPicPr>
-          <p:cNvPr id="305" name="Google Shape;305;p29"/>
-          <p:cNvPicPr preferRelativeResize="0"/>
+          <p:cNvPr id="3" name="Picture 2">
+            <a:extLst>
+              <a:ext uri="{FF2B5EF4-FFF2-40B4-BE49-F238E27FC236}">
+                <a16:creationId xmlns:a16="http://schemas.microsoft.com/office/drawing/2014/main" id="{22ABDC94-F9E5-D2BD-F9AA-93BB59DBD39E}"/>
+              </a:ext>
+            </a:extLst>
+          </p:cNvPr>
+          <p:cNvPicPr>
+            <a:picLocks noChangeAspect="1"/>
+          </p:cNvPicPr>
           <p:nvPr/>
         </p:nvPicPr>
         <p:blipFill>
-          <a:blip r:embed="rId3">
-            <a:alphaModFix/>
-          </a:blip>
+          <a:blip r:embed="rId2"/>
           <a:stretch>
             <a:fillRect/>
           </a:stretch>
         </p:blipFill>
         <p:spPr>
           <a:xfrm>
-            <a:off x="152400" y="152400"/>
-            <a:ext cx="11887200" cy="6401325"/>
+            <a:off x="513567" y="107804"/>
+            <a:ext cx="11361107" cy="6430781"/>
           </a:xfrm>
           <a:prstGeom prst="rect">
             <a:avLst/>
           </a:prstGeom>
-          <a:noFill/>
-          <a:ln>
-            <a:noFill/>
-          </a:ln>
         </p:spPr>
       </p:pic>
     </p:spTree>
+    <p:extLst>
+      <p:ext uri="{BB962C8B-B14F-4D97-AF65-F5344CB8AC3E}">
+        <p14:creationId xmlns:p14="http://schemas.microsoft.com/office/powerpoint/2010/main" val="1576710915"/>
+      </p:ext>
+    </p:extLst>
   </p:cSld>
   <p:clrMapOvr>
     <a:masterClrMapping/>
@@ -13426,7 +12699,7 @@
 </p:sld>
 </file>
 
-<file path=ppt/slides/slide18.xml><?xml version="1.0" encoding="utf-8"?>
+<file path=ppt/slides/slide14.xml><?xml version="1.0" encoding="utf-8"?>
 <p:sld xmlns:a="http://schemas.openxmlformats.org/drawingml/2006/main" xmlns:r="http://schemas.openxmlformats.org/officeDocument/2006/relationships" xmlns:p="http://schemas.openxmlformats.org/presentationml/2006/main">
   <p:cSld>
     <p:spTree>
@@ -13481,7 +12754,7 @@
                 <a:cs typeface="Syne"/>
                 <a:sym typeface="Syne"/>
               </a:rPr>
-              <a:t>Overview Milestone-3</a:t>
+              <a:t>Milestone-3</a:t>
             </a:r>
             <a:br>
               <a:rPr lang="en-US" b="1" dirty="0">
@@ -13553,121 +12826,6 @@
       </p:sp>
       <p:pic>
         <p:nvPicPr>
-          <p:cNvPr id="7" name="Picture 6">
-            <a:extLst>
-              <a:ext uri="{FF2B5EF4-FFF2-40B4-BE49-F238E27FC236}">
-                <a16:creationId xmlns:a16="http://schemas.microsoft.com/office/drawing/2014/main" id="{F4FD77A7-9DF7-B928-415C-CBD41EA8D99C}"/>
-              </a:ext>
-            </a:extLst>
-          </p:cNvPr>
-          <p:cNvPicPr>
-            <a:picLocks noChangeAspect="1"/>
-          </p:cNvPicPr>
-          <p:nvPr/>
-        </p:nvPicPr>
-        <p:blipFill>
-          <a:blip r:embed="rId2"/>
-          <a:stretch>
-            <a:fillRect/>
-          </a:stretch>
-        </p:blipFill>
-        <p:spPr>
-          <a:xfrm>
-            <a:off x="432147" y="1354827"/>
-            <a:ext cx="10797435" cy="5258986"/>
-          </a:xfrm>
-          <a:prstGeom prst="rect">
-            <a:avLst/>
-          </a:prstGeom>
-        </p:spPr>
-      </p:pic>
-    </p:spTree>
-    <p:extLst>
-      <p:ext uri="{BB962C8B-B14F-4D97-AF65-F5344CB8AC3E}">
-        <p14:creationId xmlns:p14="http://schemas.microsoft.com/office/powerpoint/2010/main" val="686561891"/>
-      </p:ext>
-    </p:extLst>
-  </p:cSld>
-  <p:clrMapOvr>
-    <a:masterClrMapping/>
-  </p:clrMapOvr>
-</p:sld>
-</file>
-
-<file path=ppt/slides/slide19.xml><?xml version="1.0" encoding="utf-8"?>
-<p:sld xmlns:a="http://schemas.openxmlformats.org/drawingml/2006/main" xmlns:r="http://schemas.openxmlformats.org/officeDocument/2006/relationships" xmlns:p="http://schemas.openxmlformats.org/presentationml/2006/main">
-  <p:cSld>
-    <p:spTree>
-      <p:nvGrpSpPr>
-        <p:cNvPr id="1" name=""/>
-        <p:cNvGrpSpPr/>
-        <p:nvPr/>
-      </p:nvGrpSpPr>
-      <p:grpSpPr>
-        <a:xfrm>
-          <a:off x="0" y="0"/>
-          <a:ext cx="0" cy="0"/>
-          <a:chOff x="0" y="0"/>
-          <a:chExt cx="0" cy="0"/>
-        </a:xfrm>
-      </p:grpSpPr>
-      <p:sp>
-        <p:nvSpPr>
-          <p:cNvPr id="2" name="Title 1">
-            <a:extLst>
-              <a:ext uri="{FF2B5EF4-FFF2-40B4-BE49-F238E27FC236}">
-                <a16:creationId xmlns:a16="http://schemas.microsoft.com/office/drawing/2014/main" id="{E74C0B04-F41B-E0DD-B521-8CAD74C66815}"/>
-              </a:ext>
-            </a:extLst>
-          </p:cNvPr>
-          <p:cNvSpPr>
-            <a:spLocks noGrp="1"/>
-          </p:cNvSpPr>
-          <p:nvPr>
-            <p:ph type="ctrTitle"/>
-          </p:nvPr>
-        </p:nvSpPr>
-        <p:spPr>
-          <a:xfrm>
-            <a:off x="2455100" y="2130425"/>
-            <a:ext cx="6003099" cy="1470025"/>
-          </a:xfrm>
-        </p:spPr>
-        <p:txBody>
-          <a:bodyPr/>
-          <a:lstStyle/>
-          <a:p>
-            <a:endParaRPr lang="en-IN" dirty="0"/>
-          </a:p>
-        </p:txBody>
-      </p:sp>
-      <p:sp>
-        <p:nvSpPr>
-          <p:cNvPr id="3" name="Subtitle 2">
-            <a:extLst>
-              <a:ext uri="{FF2B5EF4-FFF2-40B4-BE49-F238E27FC236}">
-                <a16:creationId xmlns:a16="http://schemas.microsoft.com/office/drawing/2014/main" id="{B01E7458-DDE5-33FB-C853-8DC554366E05}"/>
-              </a:ext>
-            </a:extLst>
-          </p:cNvPr>
-          <p:cNvSpPr>
-            <a:spLocks noGrp="1"/>
-          </p:cNvSpPr>
-          <p:nvPr>
-            <p:ph type="subTitle" idx="1"/>
-          </p:nvPr>
-        </p:nvSpPr>
-        <p:spPr/>
-        <p:txBody>
-          <a:bodyPr/>
-          <a:lstStyle/>
-          <a:p>
-            <a:endParaRPr lang="en-IN" dirty="0"/>
-          </a:p>
-        </p:txBody>
-      </p:sp>
-      <p:pic>
-        <p:nvPicPr>
           <p:cNvPr id="5" name="Picture 4">
             <a:extLst>
               <a:ext uri="{FF2B5EF4-FFF2-40B4-BE49-F238E27FC236}">
@@ -13688,8 +12846,8 @@
         </p:blipFill>
         <p:spPr>
           <a:xfrm>
-            <a:off x="56307" y="432969"/>
-            <a:ext cx="12079386" cy="5992061"/>
+            <a:off x="56307" y="1365337"/>
+            <a:ext cx="11805841" cy="5254668"/>
           </a:xfrm>
           <a:prstGeom prst="rect">
             <a:avLst/>
@@ -13699,7 +12857,7 @@
     </p:spTree>
     <p:extLst>
       <p:ext uri="{BB962C8B-B14F-4D97-AF65-F5344CB8AC3E}">
-        <p14:creationId xmlns:p14="http://schemas.microsoft.com/office/powerpoint/2010/main" val="3500134861"/>
+        <p14:creationId xmlns:p14="http://schemas.microsoft.com/office/powerpoint/2010/main" val="686561891"/>
       </p:ext>
     </p:extLst>
   </p:cSld>
@@ -13709,669 +12867,7 @@
 </p:sld>
 </file>
 
-<file path=ppt/slides/slide2.xml><?xml version="1.0" encoding="utf-8"?>
-<p:sld xmlns:a="http://schemas.openxmlformats.org/drawingml/2006/main" xmlns:r="http://schemas.openxmlformats.org/officeDocument/2006/relationships" xmlns:p="http://schemas.openxmlformats.org/presentationml/2006/main">
-  <p:cSld>
-    <p:bg>
-      <p:bgPr>
-        <a:solidFill>
-          <a:srgbClr val="F5ECF5"/>
-        </a:solidFill>
-        <a:effectLst/>
-      </p:bgPr>
-    </p:bg>
-    <p:spTree>
-      <p:nvGrpSpPr>
-        <p:cNvPr id="1" name="Shape 94"/>
-        <p:cNvGrpSpPr/>
-        <p:nvPr/>
-      </p:nvGrpSpPr>
-      <p:grpSpPr>
-        <a:xfrm>
-          <a:off x="0" y="0"/>
-          <a:ext cx="0" cy="0"/>
-          <a:chOff x="0" y="0"/>
-          <a:chExt cx="0" cy="0"/>
-        </a:xfrm>
-      </p:grpSpPr>
-      <p:pic>
-        <p:nvPicPr>
-          <p:cNvPr id="95" name="Google Shape;95;p14" descr="image.png"/>
-          <p:cNvPicPr preferRelativeResize="0"/>
-          <p:nvPr/>
-        </p:nvPicPr>
-        <p:blipFill rotWithShape="1">
-          <a:blip r:embed="rId3">
-            <a:alphaModFix/>
-          </a:blip>
-          <a:srcRect/>
-          <a:stretch/>
-        </p:blipFill>
-        <p:spPr>
-          <a:xfrm>
-            <a:off x="0" y="0"/>
-            <a:ext cx="12192000" cy="6858000"/>
-          </a:xfrm>
-          <a:prstGeom prst="rect">
-            <a:avLst/>
-          </a:prstGeom>
-          <a:noFill/>
-          <a:ln>
-            <a:noFill/>
-          </a:ln>
-        </p:spPr>
-      </p:pic>
-      <p:pic>
-        <p:nvPicPr>
-          <p:cNvPr id="96" name="Google Shape;96;p14" descr="image.png"/>
-          <p:cNvPicPr preferRelativeResize="0"/>
-          <p:nvPr/>
-        </p:nvPicPr>
-        <p:blipFill rotWithShape="1">
-          <a:blip r:embed="rId4">
-            <a:alphaModFix/>
-          </a:blip>
-          <a:srcRect/>
-          <a:stretch/>
-        </p:blipFill>
-        <p:spPr>
-          <a:xfrm>
-            <a:off x="571500" y="2000398"/>
-            <a:ext cx="3492549" cy="3742878"/>
-          </a:xfrm>
-          <a:prstGeom prst="rect">
-            <a:avLst/>
-          </a:prstGeom>
-          <a:noFill/>
-          <a:ln>
-            <a:noFill/>
-          </a:ln>
-        </p:spPr>
-      </p:pic>
-      <p:pic>
-        <p:nvPicPr>
-          <p:cNvPr id="97" name="Google Shape;97;p14" descr="image.png"/>
-          <p:cNvPicPr preferRelativeResize="0"/>
-          <p:nvPr/>
-        </p:nvPicPr>
-        <p:blipFill rotWithShape="1">
-          <a:blip r:embed="rId5">
-            <a:alphaModFix/>
-          </a:blip>
-          <a:srcRect/>
-          <a:stretch/>
-        </p:blipFill>
-        <p:spPr>
-          <a:xfrm>
-            <a:off x="4349799" y="2000398"/>
-            <a:ext cx="3492549" cy="3742878"/>
-          </a:xfrm>
-          <a:prstGeom prst="rect">
-            <a:avLst/>
-          </a:prstGeom>
-          <a:noFill/>
-          <a:ln>
-            <a:noFill/>
-          </a:ln>
-        </p:spPr>
-      </p:pic>
-      <p:pic>
-        <p:nvPicPr>
-          <p:cNvPr id="98" name="Google Shape;98;p14" descr="image.png"/>
-          <p:cNvPicPr preferRelativeResize="0"/>
-          <p:nvPr/>
-        </p:nvPicPr>
-        <p:blipFill rotWithShape="1">
-          <a:blip r:embed="rId6">
-            <a:alphaModFix/>
-          </a:blip>
-          <a:srcRect/>
-          <a:stretch/>
-        </p:blipFill>
-        <p:spPr>
-          <a:xfrm>
-            <a:off x="8128099" y="2000398"/>
-            <a:ext cx="3492549" cy="3742878"/>
-          </a:xfrm>
-          <a:prstGeom prst="rect">
-            <a:avLst/>
-          </a:prstGeom>
-          <a:noFill/>
-          <a:ln>
-            <a:noFill/>
-          </a:ln>
-        </p:spPr>
-      </p:pic>
-      <p:pic>
-        <p:nvPicPr>
-          <p:cNvPr id="99" name="Google Shape;99;p14" descr="image.png"/>
-          <p:cNvPicPr preferRelativeResize="0"/>
-          <p:nvPr/>
-        </p:nvPicPr>
-        <p:blipFill rotWithShape="1">
-          <a:blip r:embed="rId7">
-            <a:alphaModFix/>
-          </a:blip>
-          <a:srcRect/>
-          <a:stretch/>
-        </p:blipFill>
-        <p:spPr>
-          <a:xfrm>
-            <a:off x="914400" y="2343298"/>
-            <a:ext cx="762000" cy="762000"/>
-          </a:xfrm>
-          <a:prstGeom prst="rect">
-            <a:avLst/>
-          </a:prstGeom>
-          <a:noFill/>
-          <a:ln>
-            <a:noFill/>
-          </a:ln>
-        </p:spPr>
-      </p:pic>
-      <p:sp>
-        <p:nvSpPr>
-          <p:cNvPr id="100" name="Google Shape;100;p14"/>
-          <p:cNvSpPr txBox="1"/>
-          <p:nvPr/>
-        </p:nvSpPr>
-        <p:spPr>
-          <a:xfrm>
-            <a:off x="914400" y="3343423"/>
-            <a:ext cx="1950243" cy="323850"/>
-          </a:xfrm>
-          <a:prstGeom prst="rect">
-            <a:avLst/>
-          </a:prstGeom>
-          <a:noFill/>
-          <a:ln>
-            <a:noFill/>
-          </a:ln>
-        </p:spPr>
-        <p:txBody>
-          <a:bodyPr spcFirstLastPara="1" wrap="square" lIns="0" tIns="0" rIns="0" bIns="0" anchor="t" anchorCtr="0">
-            <a:spAutoFit/>
-          </a:bodyPr>
-          <a:lstStyle/>
-          <a:p>
-            <a:pPr marL="0" marR="0" lvl="0" indent="0" algn="l" rtl="0">
-              <a:spcBef>
-                <a:spcPts val="0"/>
-              </a:spcBef>
-              <a:spcAft>
-                <a:spcPts val="0"/>
-              </a:spcAft>
-              <a:buNone/>
-            </a:pPr>
-            <a:r>
-              <a:rPr lang="en-US" sz="2100" b="1" i="0" u="none" strike="noStrike" cap="none">
-                <a:solidFill>
-                  <a:srgbClr val="6B2D8B"/>
-                </a:solidFill>
-                <a:latin typeface="Syne"/>
-                <a:ea typeface="Syne"/>
-                <a:cs typeface="Syne"/>
-                <a:sym typeface="Syne"/>
-              </a:rPr>
-              <a:t>Data Quality</a:t>
-            </a:r>
-            <a:endParaRPr/>
-          </a:p>
-        </p:txBody>
-      </p:sp>
-      <p:sp>
-        <p:nvSpPr>
-          <p:cNvPr id="101" name="Google Shape;101;p14"/>
-          <p:cNvSpPr txBox="1"/>
-          <p:nvPr/>
-        </p:nvSpPr>
-        <p:spPr>
-          <a:xfrm>
-            <a:off x="914400" y="3810148"/>
-            <a:ext cx="2806749" cy="1447353"/>
-          </a:xfrm>
-          <a:prstGeom prst="rect">
-            <a:avLst/>
-          </a:prstGeom>
-          <a:noFill/>
-          <a:ln>
-            <a:noFill/>
-          </a:ln>
-        </p:spPr>
-        <p:txBody>
-          <a:bodyPr spcFirstLastPara="1" wrap="square" lIns="0" tIns="0" rIns="0" bIns="0" anchor="t" anchorCtr="0">
-            <a:spAutoFit/>
-          </a:bodyPr>
-          <a:lstStyle/>
-          <a:p>
-            <a:pPr marL="0" marR="0" lvl="0" indent="0" algn="l" rtl="0">
-              <a:lnSpc>
-                <a:spcPct val="159929"/>
-              </a:lnSpc>
-              <a:spcBef>
-                <a:spcPts val="0"/>
-              </a:spcBef>
-              <a:spcAft>
-                <a:spcPts val="0"/>
-              </a:spcAft>
-              <a:buNone/>
-            </a:pPr>
-            <a:r>
-              <a:rPr lang="en-US" sz="1425" b="0" i="0" u="none" strike="noStrike" cap="none">
-                <a:solidFill>
-                  <a:srgbClr val="2D1B3D"/>
-                </a:solidFill>
-                <a:latin typeface="DM Sans"/>
-                <a:ea typeface="DM Sans"/>
-                <a:cs typeface="DM Sans"/>
-                <a:sym typeface="DM Sans"/>
-              </a:rPr>
-              <a:t>Automated five-layer null remediation eliminates manual data-cleaning effort, reducing pre-analysis preparation time by an estimated 70–85%.</a:t>
-            </a:r>
-            <a:endParaRPr/>
-          </a:p>
-        </p:txBody>
-      </p:sp>
-      <p:pic>
-        <p:nvPicPr>
-          <p:cNvPr id="102" name="Google Shape;102;p14" descr="image.png"/>
-          <p:cNvPicPr preferRelativeResize="0"/>
-          <p:nvPr/>
-        </p:nvPicPr>
-        <p:blipFill rotWithShape="1">
-          <a:blip r:embed="rId8">
-            <a:alphaModFix/>
-          </a:blip>
-          <a:srcRect/>
-          <a:stretch/>
-        </p:blipFill>
-        <p:spPr>
-          <a:xfrm>
-            <a:off x="4692699" y="2343298"/>
-            <a:ext cx="762000" cy="762000"/>
-          </a:xfrm>
-          <a:prstGeom prst="rect">
-            <a:avLst/>
-          </a:prstGeom>
-          <a:noFill/>
-          <a:ln>
-            <a:noFill/>
-          </a:ln>
-        </p:spPr>
-      </p:pic>
-      <p:sp>
-        <p:nvSpPr>
-          <p:cNvPr id="103" name="Google Shape;103;p14"/>
-          <p:cNvSpPr txBox="1"/>
-          <p:nvPr/>
-        </p:nvSpPr>
-        <p:spPr>
-          <a:xfrm>
-            <a:off x="4692699" y="3343423"/>
-            <a:ext cx="1610201" cy="323850"/>
-          </a:xfrm>
-          <a:prstGeom prst="rect">
-            <a:avLst/>
-          </a:prstGeom>
-          <a:noFill/>
-          <a:ln>
-            <a:noFill/>
-          </a:ln>
-        </p:spPr>
-        <p:txBody>
-          <a:bodyPr spcFirstLastPara="1" wrap="square" lIns="0" tIns="0" rIns="0" bIns="0" anchor="t" anchorCtr="0">
-            <a:spAutoFit/>
-          </a:bodyPr>
-          <a:lstStyle/>
-          <a:p>
-            <a:pPr marL="0" marR="0" lvl="0" indent="0" algn="l" rtl="0">
-              <a:spcBef>
-                <a:spcPts val="0"/>
-              </a:spcBef>
-              <a:spcAft>
-                <a:spcPts val="0"/>
-              </a:spcAft>
-              <a:buNone/>
-            </a:pPr>
-            <a:r>
-              <a:rPr lang="en-US" sz="2100" b="1" i="0" u="none" strike="noStrike" cap="none">
-                <a:solidFill>
-                  <a:srgbClr val="6B2D8B"/>
-                </a:solidFill>
-                <a:latin typeface="Syne"/>
-                <a:ea typeface="Syne"/>
-                <a:cs typeface="Syne"/>
-                <a:sym typeface="Syne"/>
-              </a:rPr>
-              <a:t>Scalability</a:t>
-            </a:r>
-            <a:endParaRPr/>
-          </a:p>
-        </p:txBody>
-      </p:sp>
-      <p:sp>
-        <p:nvSpPr>
-          <p:cNvPr id="104" name="Google Shape;104;p14"/>
-          <p:cNvSpPr txBox="1"/>
-          <p:nvPr/>
-        </p:nvSpPr>
-        <p:spPr>
-          <a:xfrm>
-            <a:off x="4692699" y="3810148"/>
-            <a:ext cx="2806749" cy="1447353"/>
-          </a:xfrm>
-          <a:prstGeom prst="rect">
-            <a:avLst/>
-          </a:prstGeom>
-          <a:noFill/>
-          <a:ln>
-            <a:noFill/>
-          </a:ln>
-        </p:spPr>
-        <p:txBody>
-          <a:bodyPr spcFirstLastPara="1" wrap="square" lIns="0" tIns="0" rIns="0" bIns="0" anchor="t" anchorCtr="0">
-            <a:spAutoFit/>
-          </a:bodyPr>
-          <a:lstStyle/>
-          <a:p>
-            <a:pPr marL="0" marR="0" lvl="0" indent="0" algn="l" rtl="0">
-              <a:lnSpc>
-                <a:spcPct val="159929"/>
-              </a:lnSpc>
-              <a:spcBef>
-                <a:spcPts val="0"/>
-              </a:spcBef>
-              <a:spcAft>
-                <a:spcPts val="0"/>
-              </a:spcAft>
-              <a:buNone/>
-            </a:pPr>
-            <a:r>
-              <a:rPr lang="en-US" sz="1425" b="0" i="0" u="none" strike="noStrike" cap="none">
-                <a:solidFill>
-                  <a:srgbClr val="2D1B3D"/>
-                </a:solidFill>
-                <a:latin typeface="DM Sans"/>
-                <a:ea typeface="DM Sans"/>
-                <a:cs typeface="DM Sans"/>
-                <a:sym typeface="DM Sans"/>
-              </a:rPr>
-              <a:t>Handles datasets from hundreds to tens of thousands of rows with consistent performance, leveraging Pandas vectorised operations.</a:t>
-            </a:r>
-            <a:endParaRPr/>
-          </a:p>
-        </p:txBody>
-      </p:sp>
-      <p:pic>
-        <p:nvPicPr>
-          <p:cNvPr id="105" name="Google Shape;105;p14" descr="image.png"/>
-          <p:cNvPicPr preferRelativeResize="0"/>
-          <p:nvPr/>
-        </p:nvPicPr>
-        <p:blipFill rotWithShape="1">
-          <a:blip r:embed="rId9">
-            <a:alphaModFix/>
-          </a:blip>
-          <a:srcRect/>
-          <a:stretch/>
-        </p:blipFill>
-        <p:spPr>
-          <a:xfrm>
-            <a:off x="8470999" y="2343298"/>
-            <a:ext cx="762000" cy="762000"/>
-          </a:xfrm>
-          <a:prstGeom prst="rect">
-            <a:avLst/>
-          </a:prstGeom>
-          <a:noFill/>
-          <a:ln>
-            <a:noFill/>
-          </a:ln>
-        </p:spPr>
-      </p:pic>
-      <p:sp>
-        <p:nvSpPr>
-          <p:cNvPr id="106" name="Google Shape;106;p14"/>
-          <p:cNvSpPr txBox="1"/>
-          <p:nvPr/>
-        </p:nvSpPr>
-        <p:spPr>
-          <a:xfrm>
-            <a:off x="8470999" y="3343423"/>
-            <a:ext cx="2340292" cy="323850"/>
-          </a:xfrm>
-          <a:prstGeom prst="rect">
-            <a:avLst/>
-          </a:prstGeom>
-          <a:noFill/>
-          <a:ln>
-            <a:noFill/>
-          </a:ln>
-        </p:spPr>
-        <p:txBody>
-          <a:bodyPr spcFirstLastPara="1" wrap="square" lIns="0" tIns="0" rIns="0" bIns="0" anchor="t" anchorCtr="0">
-            <a:spAutoFit/>
-          </a:bodyPr>
-          <a:lstStyle/>
-          <a:p>
-            <a:pPr marL="0" marR="0" lvl="0" indent="0" algn="l" rtl="0">
-              <a:spcBef>
-                <a:spcPts val="0"/>
-              </a:spcBef>
-              <a:spcAft>
-                <a:spcPts val="0"/>
-              </a:spcAft>
-              <a:buNone/>
-            </a:pPr>
-            <a:r>
-              <a:rPr lang="en-US" sz="2100" b="1" i="0" u="none" strike="noStrike" cap="none">
-                <a:solidFill>
-                  <a:srgbClr val="6B2D8B"/>
-                </a:solidFill>
-                <a:latin typeface="Syne"/>
-                <a:ea typeface="Syne"/>
-                <a:cs typeface="Syne"/>
-                <a:sym typeface="Syne"/>
-              </a:rPr>
-              <a:t>Insight Velocity</a:t>
-            </a:r>
-            <a:endParaRPr/>
-          </a:p>
-        </p:txBody>
-      </p:sp>
-      <p:sp>
-        <p:nvSpPr>
-          <p:cNvPr id="107" name="Google Shape;107;p14"/>
-          <p:cNvSpPr txBox="1"/>
-          <p:nvPr/>
-        </p:nvSpPr>
-        <p:spPr>
-          <a:xfrm>
-            <a:off x="8470999" y="3810148"/>
-            <a:ext cx="2806749" cy="1447353"/>
-          </a:xfrm>
-          <a:prstGeom prst="rect">
-            <a:avLst/>
-          </a:prstGeom>
-          <a:noFill/>
-          <a:ln>
-            <a:noFill/>
-          </a:ln>
-        </p:spPr>
-        <p:txBody>
-          <a:bodyPr spcFirstLastPara="1" wrap="square" lIns="0" tIns="0" rIns="0" bIns="0" anchor="t" anchorCtr="0">
-            <a:spAutoFit/>
-          </a:bodyPr>
-          <a:lstStyle/>
-          <a:p>
-            <a:pPr marL="0" marR="0" lvl="0" indent="0" algn="l" rtl="0">
-              <a:lnSpc>
-                <a:spcPct val="159929"/>
-              </a:lnSpc>
-              <a:spcBef>
-                <a:spcPts val="0"/>
-              </a:spcBef>
-              <a:spcAft>
-                <a:spcPts val="0"/>
-              </a:spcAft>
-              <a:buNone/>
-            </a:pPr>
-            <a:r>
-              <a:rPr lang="en-US" sz="1425" b="0" i="0" u="none" strike="noStrike" cap="none">
-                <a:solidFill>
-                  <a:srgbClr val="2D1B3D"/>
-                </a:solidFill>
-                <a:latin typeface="DM Sans"/>
-                <a:ea typeface="DM Sans"/>
-                <a:cs typeface="DM Sans"/>
-                <a:sym typeface="DM Sans"/>
-              </a:rPr>
-              <a:t>Full Exploratory Data Analysis (EDA)—including descriptive stats, correlations, and distributions—delivered in a single button click.</a:t>
-            </a:r>
-            <a:endParaRPr/>
-          </a:p>
-        </p:txBody>
-      </p:sp>
-      <p:pic>
-        <p:nvPicPr>
-          <p:cNvPr id="108" name="Google Shape;108;p14" descr="image.png"/>
-          <p:cNvPicPr preferRelativeResize="0"/>
-          <p:nvPr/>
-        </p:nvPicPr>
-        <p:blipFill rotWithShape="1">
-          <a:blip r:embed="rId10">
-            <a:alphaModFix/>
-          </a:blip>
-          <a:srcRect/>
-          <a:stretch/>
-        </p:blipFill>
-        <p:spPr>
-          <a:xfrm>
-            <a:off x="1071562" y="2524273"/>
-            <a:ext cx="447675" cy="400050"/>
-          </a:xfrm>
-          <a:prstGeom prst="rect">
-            <a:avLst/>
-          </a:prstGeom>
-          <a:noFill/>
-          <a:ln>
-            <a:noFill/>
-          </a:ln>
-        </p:spPr>
-      </p:pic>
-      <p:pic>
-        <p:nvPicPr>
-          <p:cNvPr id="109" name="Google Shape;109;p14" descr="image.png"/>
-          <p:cNvPicPr preferRelativeResize="0"/>
-          <p:nvPr/>
-        </p:nvPicPr>
-        <p:blipFill rotWithShape="1">
-          <a:blip r:embed="rId11">
-            <a:alphaModFix/>
-          </a:blip>
-          <a:srcRect/>
-          <a:stretch/>
-        </p:blipFill>
-        <p:spPr>
-          <a:xfrm>
-            <a:off x="4873674" y="2524273"/>
-            <a:ext cx="400050" cy="400050"/>
-          </a:xfrm>
-          <a:prstGeom prst="rect">
-            <a:avLst/>
-          </a:prstGeom>
-          <a:noFill/>
-          <a:ln>
-            <a:noFill/>
-          </a:ln>
-        </p:spPr>
-      </p:pic>
-      <p:pic>
-        <p:nvPicPr>
-          <p:cNvPr id="110" name="Google Shape;110;p14" descr="image.png"/>
-          <p:cNvPicPr preferRelativeResize="0"/>
-          <p:nvPr/>
-        </p:nvPicPr>
-        <p:blipFill rotWithShape="1">
-          <a:blip r:embed="rId12">
-            <a:alphaModFix/>
-          </a:blip>
-          <a:srcRect/>
-          <a:stretch/>
-        </p:blipFill>
-        <p:spPr>
-          <a:xfrm>
-            <a:off x="8651974" y="2524273"/>
-            <a:ext cx="400050" cy="400050"/>
-          </a:xfrm>
-          <a:prstGeom prst="rect">
-            <a:avLst/>
-          </a:prstGeom>
-          <a:noFill/>
-          <a:ln>
-            <a:noFill/>
-          </a:ln>
-        </p:spPr>
-      </p:pic>
-      <p:sp>
-        <p:nvSpPr>
-          <p:cNvPr id="111" name="Google Shape;111;p14"/>
-          <p:cNvSpPr txBox="1"/>
-          <p:nvPr/>
-        </p:nvSpPr>
-        <p:spPr>
-          <a:xfrm>
-            <a:off x="571500" y="571500"/>
-            <a:ext cx="11601450" cy="504825"/>
-          </a:xfrm>
-          <a:prstGeom prst="rect">
-            <a:avLst/>
-          </a:prstGeom>
-          <a:noFill/>
-          <a:ln>
-            <a:noFill/>
-          </a:ln>
-        </p:spPr>
-        <p:txBody>
-          <a:bodyPr spcFirstLastPara="1" wrap="square" lIns="0" tIns="0" rIns="0" bIns="0" anchor="t" anchorCtr="0">
-            <a:spAutoFit/>
-          </a:bodyPr>
-          <a:lstStyle/>
-          <a:p>
-            <a:pPr marL="0" marR="0" lvl="0" indent="0" algn="l" rtl="0">
-              <a:spcBef>
-                <a:spcPts val="0"/>
-              </a:spcBef>
-              <a:spcAft>
-                <a:spcPts val="0"/>
-              </a:spcAft>
-              <a:buNone/>
-            </a:pPr>
-            <a:r>
-              <a:rPr lang="en-US" sz="3300" b="1" i="0" u="none" strike="noStrike" cap="none">
-                <a:solidFill>
-                  <a:srgbClr val="6B2D8B"/>
-                </a:solidFill>
-                <a:latin typeface="Syne"/>
-                <a:ea typeface="Syne"/>
-                <a:cs typeface="Syne"/>
-                <a:sym typeface="Syne"/>
-              </a:rPr>
-              <a:t>Strategic Value Proposition</a:t>
-            </a:r>
-            <a:endParaRPr/>
-          </a:p>
-        </p:txBody>
-      </p:sp>
-    </p:spTree>
-  </p:cSld>
-  <p:clrMapOvr>
-    <a:masterClrMapping/>
-  </p:clrMapOvr>
-</p:sld>
-</file>
-
-<file path=ppt/slides/slide20.xml><?xml version="1.0" encoding="utf-8"?>
+<file path=ppt/slides/slide15.xml><?xml version="1.0" encoding="utf-8"?>
 <p:sld xmlns:a="http://schemas.openxmlformats.org/drawingml/2006/main" xmlns:r="http://schemas.openxmlformats.org/officeDocument/2006/relationships" xmlns:p="http://schemas.openxmlformats.org/presentationml/2006/main">
   <p:cSld>
     <p:spTree>
@@ -14481,7 +12977,7 @@
 </p:sld>
 </file>
 
-<file path=ppt/slides/slide21.xml><?xml version="1.0" encoding="utf-8"?>
+<file path=ppt/slides/slide16.xml><?xml version="1.0" encoding="utf-8"?>
 <p:sld xmlns:a="http://schemas.openxmlformats.org/drawingml/2006/main" xmlns:r="http://schemas.openxmlformats.org/officeDocument/2006/relationships" xmlns:p="http://schemas.openxmlformats.org/presentationml/2006/main">
   <p:cSld>
     <p:spTree>
@@ -14591,7 +13087,940 @@
 </p:sld>
 </file>
 
-<file path=ppt/slides/slide22.xml><?xml version="1.0" encoding="utf-8"?>
+<file path=ppt/slides/slide17.xml><?xml version="1.0" encoding="utf-8"?>
+<p:sld xmlns:a="http://schemas.openxmlformats.org/drawingml/2006/main" xmlns:r="http://schemas.openxmlformats.org/officeDocument/2006/relationships" xmlns:p="http://schemas.openxmlformats.org/presentationml/2006/main">
+  <p:cSld>
+    <p:spTree>
+      <p:nvGrpSpPr>
+        <p:cNvPr id="1" name=""/>
+        <p:cNvGrpSpPr/>
+        <p:nvPr/>
+      </p:nvGrpSpPr>
+      <p:grpSpPr>
+        <a:xfrm>
+          <a:off x="0" y="0"/>
+          <a:ext cx="0" cy="0"/>
+          <a:chOff x="0" y="0"/>
+          <a:chExt cx="0" cy="0"/>
+        </a:xfrm>
+      </p:grpSpPr>
+      <p:sp>
+        <p:nvSpPr>
+          <p:cNvPr id="2" name="Title 1">
+            <a:extLst>
+              <a:ext uri="{FF2B5EF4-FFF2-40B4-BE49-F238E27FC236}">
+                <a16:creationId xmlns:a16="http://schemas.microsoft.com/office/drawing/2014/main" id="{B84E2E44-D4DE-77E9-8533-B3CEA1421E3C}"/>
+              </a:ext>
+            </a:extLst>
+          </p:cNvPr>
+          <p:cNvSpPr>
+            <a:spLocks noGrp="1"/>
+          </p:cNvSpPr>
+          <p:nvPr>
+            <p:ph type="ctrTitle"/>
+          </p:nvPr>
+        </p:nvSpPr>
+        <p:spPr>
+          <a:xfrm>
+            <a:off x="1011476" y="246192"/>
+            <a:ext cx="7772400" cy="1470025"/>
+          </a:xfrm>
+        </p:spPr>
+        <p:txBody>
+          <a:bodyPr/>
+          <a:lstStyle/>
+          <a:p>
+            <a:r>
+              <a:rPr lang="en-US" b="1" dirty="0">
+                <a:solidFill>
+                  <a:srgbClr val="6B2D8B"/>
+                </a:solidFill>
+                <a:latin typeface="Syne"/>
+                <a:ea typeface="Syne"/>
+                <a:cs typeface="Syne"/>
+                <a:sym typeface="Syne"/>
+              </a:rPr>
+              <a:t>Milestone-4</a:t>
+            </a:r>
+            <a:br>
+              <a:rPr lang="en-US" b="1" dirty="0">
+                <a:solidFill>
+                  <a:srgbClr val="6B2D8B"/>
+                </a:solidFill>
+                <a:latin typeface="Syne"/>
+                <a:ea typeface="Syne"/>
+                <a:cs typeface="Syne"/>
+                <a:sym typeface="Syne"/>
+              </a:rPr>
+            </a:br>
+            <a:r>
+              <a:rPr lang="en-US" sz="2400" b="1" dirty="0">
+                <a:solidFill>
+                  <a:srgbClr val="6B2D8B"/>
+                </a:solidFill>
+                <a:latin typeface="Syne"/>
+                <a:ea typeface="Syne"/>
+                <a:cs typeface="Syne"/>
+                <a:sym typeface="Syne"/>
+              </a:rPr>
+              <a:t>Dashboard</a:t>
+            </a:r>
+            <a:endParaRPr lang="en-IN" sz="2400" dirty="0"/>
+          </a:p>
+        </p:txBody>
+      </p:sp>
+      <p:sp>
+        <p:nvSpPr>
+          <p:cNvPr id="3" name="Subtitle 2">
+            <a:extLst>
+              <a:ext uri="{FF2B5EF4-FFF2-40B4-BE49-F238E27FC236}">
+                <a16:creationId xmlns:a16="http://schemas.microsoft.com/office/drawing/2014/main" id="{B085F879-9305-BA09-D1DA-849C9E0EA99F}"/>
+              </a:ext>
+            </a:extLst>
+          </p:cNvPr>
+          <p:cNvSpPr>
+            <a:spLocks noGrp="1"/>
+          </p:cNvSpPr>
+          <p:nvPr>
+            <p:ph type="subTitle" idx="1"/>
+          </p:nvPr>
+        </p:nvSpPr>
+        <p:spPr>
+          <a:xfrm>
+            <a:off x="2395601" y="3429000"/>
+            <a:ext cx="6400800" cy="1752600"/>
+          </a:xfrm>
+        </p:spPr>
+        <p:txBody>
+          <a:bodyPr/>
+          <a:lstStyle/>
+          <a:p>
+            <a:endParaRPr lang="en-IN" dirty="0"/>
+          </a:p>
+        </p:txBody>
+      </p:sp>
+      <p:pic>
+        <p:nvPicPr>
+          <p:cNvPr id="268" name="Google Shape;268;p22"/>
+          <p:cNvPicPr preferRelativeResize="0"/>
+          <p:nvPr/>
+        </p:nvPicPr>
+        <p:blipFill>
+          <a:blip r:embed="rId2">
+            <a:alphaModFix/>
+          </a:blip>
+          <a:stretch>
+            <a:fillRect/>
+          </a:stretch>
+        </p:blipFill>
+        <p:spPr>
+          <a:xfrm>
+            <a:off x="344350" y="1902358"/>
+            <a:ext cx="11130100" cy="4709450"/>
+          </a:xfrm>
+          <a:prstGeom prst="rect">
+            <a:avLst/>
+          </a:prstGeom>
+          <a:noFill/>
+          <a:ln>
+            <a:noFill/>
+          </a:ln>
+        </p:spPr>
+      </p:pic>
+    </p:spTree>
+    <p:extLst>
+      <p:ext uri="{BB962C8B-B14F-4D97-AF65-F5344CB8AC3E}">
+        <p14:creationId xmlns:p14="http://schemas.microsoft.com/office/powerpoint/2010/main" val="2319730845"/>
+      </p:ext>
+    </p:extLst>
+  </p:cSld>
+  <p:clrMapOvr>
+    <a:masterClrMapping/>
+  </p:clrMapOvr>
+</p:sld>
+</file>
+
+<file path=ppt/slides/slide18.xml><?xml version="1.0" encoding="utf-8"?>
+<p:sld xmlns:a="http://schemas.openxmlformats.org/drawingml/2006/main" xmlns:r="http://schemas.openxmlformats.org/officeDocument/2006/relationships" xmlns:p="http://schemas.openxmlformats.org/presentationml/2006/main">
+  <p:cSld>
+    <p:spTree>
+      <p:nvGrpSpPr>
+        <p:cNvPr id="1" name=""/>
+        <p:cNvGrpSpPr/>
+        <p:nvPr/>
+      </p:nvGrpSpPr>
+      <p:grpSpPr>
+        <a:xfrm>
+          <a:off x="0" y="0"/>
+          <a:ext cx="0" cy="0"/>
+          <a:chOff x="0" y="0"/>
+          <a:chExt cx="0" cy="0"/>
+        </a:xfrm>
+      </p:grpSpPr>
+      <p:pic>
+        <p:nvPicPr>
+          <p:cNvPr id="290" name="Google Shape;290;p26"/>
+          <p:cNvPicPr preferRelativeResize="0"/>
+          <p:nvPr/>
+        </p:nvPicPr>
+        <p:blipFill>
+          <a:blip r:embed="rId2">
+            <a:alphaModFix/>
+          </a:blip>
+          <a:stretch>
+            <a:fillRect/>
+          </a:stretch>
+        </p:blipFill>
+        <p:spPr>
+          <a:xfrm>
+            <a:off x="450937" y="338203"/>
+            <a:ext cx="11181914" cy="5992721"/>
+          </a:xfrm>
+          <a:prstGeom prst="rect">
+            <a:avLst/>
+          </a:prstGeom>
+          <a:noFill/>
+          <a:ln>
+            <a:noFill/>
+          </a:ln>
+        </p:spPr>
+      </p:pic>
+    </p:spTree>
+    <p:extLst>
+      <p:ext uri="{BB962C8B-B14F-4D97-AF65-F5344CB8AC3E}">
+        <p14:creationId xmlns:p14="http://schemas.microsoft.com/office/powerpoint/2010/main" val="4292888307"/>
+      </p:ext>
+    </p:extLst>
+  </p:cSld>
+  <p:clrMapOvr>
+    <a:masterClrMapping/>
+  </p:clrMapOvr>
+</p:sld>
+</file>
+
+<file path=ppt/slides/slide19.xml><?xml version="1.0" encoding="utf-8"?>
+<p:sld xmlns:a="http://schemas.openxmlformats.org/drawingml/2006/main" xmlns:r="http://schemas.openxmlformats.org/officeDocument/2006/relationships" xmlns:p="http://schemas.openxmlformats.org/presentationml/2006/main">
+  <p:cSld>
+    <p:spTree>
+      <p:nvGrpSpPr>
+        <p:cNvPr id="1" name=""/>
+        <p:cNvGrpSpPr/>
+        <p:nvPr/>
+      </p:nvGrpSpPr>
+      <p:grpSpPr>
+        <a:xfrm>
+          <a:off x="0" y="0"/>
+          <a:ext cx="0" cy="0"/>
+          <a:chOff x="0" y="0"/>
+          <a:chExt cx="0" cy="0"/>
+        </a:xfrm>
+      </p:grpSpPr>
+      <p:pic>
+        <p:nvPicPr>
+          <p:cNvPr id="7" name="Picture 6">
+            <a:extLst>
+              <a:ext uri="{FF2B5EF4-FFF2-40B4-BE49-F238E27FC236}">
+                <a16:creationId xmlns:a16="http://schemas.microsoft.com/office/drawing/2014/main" id="{F4FD77A7-9DF7-B928-415C-CBD41EA8D99C}"/>
+              </a:ext>
+            </a:extLst>
+          </p:cNvPr>
+          <p:cNvPicPr>
+            <a:picLocks noChangeAspect="1"/>
+          </p:cNvPicPr>
+          <p:nvPr/>
+        </p:nvPicPr>
+        <p:blipFill>
+          <a:blip r:embed="rId2"/>
+          <a:stretch>
+            <a:fillRect/>
+          </a:stretch>
+        </p:blipFill>
+        <p:spPr>
+          <a:xfrm>
+            <a:off x="187890" y="112735"/>
+            <a:ext cx="11887200" cy="6501078"/>
+          </a:xfrm>
+          <a:prstGeom prst="rect">
+            <a:avLst/>
+          </a:prstGeom>
+        </p:spPr>
+      </p:pic>
+    </p:spTree>
+    <p:extLst>
+      <p:ext uri="{BB962C8B-B14F-4D97-AF65-F5344CB8AC3E}">
+        <p14:creationId xmlns:p14="http://schemas.microsoft.com/office/powerpoint/2010/main" val="1752231979"/>
+      </p:ext>
+    </p:extLst>
+  </p:cSld>
+  <p:clrMapOvr>
+    <a:masterClrMapping/>
+  </p:clrMapOvr>
+</p:sld>
+</file>
+
+<file path=ppt/slides/slide2.xml><?xml version="1.0" encoding="utf-8"?>
+<p:sld xmlns:a="http://schemas.openxmlformats.org/drawingml/2006/main" xmlns:r="http://schemas.openxmlformats.org/officeDocument/2006/relationships" xmlns:p="http://schemas.openxmlformats.org/presentationml/2006/main">
+  <p:cSld>
+    <p:bg>
+      <p:bgPr>
+        <a:solidFill>
+          <a:srgbClr val="F5ECF5"/>
+        </a:solidFill>
+        <a:effectLst/>
+      </p:bgPr>
+    </p:bg>
+    <p:spTree>
+      <p:nvGrpSpPr>
+        <p:cNvPr id="1" name="Shape 94"/>
+        <p:cNvGrpSpPr/>
+        <p:nvPr/>
+      </p:nvGrpSpPr>
+      <p:grpSpPr>
+        <a:xfrm>
+          <a:off x="0" y="0"/>
+          <a:ext cx="0" cy="0"/>
+          <a:chOff x="0" y="0"/>
+          <a:chExt cx="0" cy="0"/>
+        </a:xfrm>
+      </p:grpSpPr>
+      <p:pic>
+        <p:nvPicPr>
+          <p:cNvPr id="95" name="Google Shape;95;p14" descr="image.png"/>
+          <p:cNvPicPr preferRelativeResize="0"/>
+          <p:nvPr/>
+        </p:nvPicPr>
+        <p:blipFill rotWithShape="1">
+          <a:blip r:embed="rId3">
+            <a:alphaModFix/>
+          </a:blip>
+          <a:srcRect/>
+          <a:stretch/>
+        </p:blipFill>
+        <p:spPr>
+          <a:xfrm>
+            <a:off x="0" y="0"/>
+            <a:ext cx="12192000" cy="6858000"/>
+          </a:xfrm>
+          <a:prstGeom prst="rect">
+            <a:avLst/>
+          </a:prstGeom>
+          <a:noFill/>
+          <a:ln>
+            <a:noFill/>
+          </a:ln>
+        </p:spPr>
+      </p:pic>
+      <p:pic>
+        <p:nvPicPr>
+          <p:cNvPr id="96" name="Google Shape;96;p14" descr="image.png"/>
+          <p:cNvPicPr preferRelativeResize="0"/>
+          <p:nvPr/>
+        </p:nvPicPr>
+        <p:blipFill rotWithShape="1">
+          <a:blip r:embed="rId4">
+            <a:alphaModFix/>
+          </a:blip>
+          <a:srcRect/>
+          <a:stretch/>
+        </p:blipFill>
+        <p:spPr>
+          <a:xfrm>
+            <a:off x="571500" y="2000398"/>
+            <a:ext cx="3492549" cy="3742878"/>
+          </a:xfrm>
+          <a:prstGeom prst="rect">
+            <a:avLst/>
+          </a:prstGeom>
+          <a:noFill/>
+          <a:ln>
+            <a:noFill/>
+          </a:ln>
+        </p:spPr>
+      </p:pic>
+      <p:pic>
+        <p:nvPicPr>
+          <p:cNvPr id="97" name="Google Shape;97;p14" descr="image.png"/>
+          <p:cNvPicPr preferRelativeResize="0"/>
+          <p:nvPr/>
+        </p:nvPicPr>
+        <p:blipFill rotWithShape="1">
+          <a:blip r:embed="rId5">
+            <a:alphaModFix/>
+          </a:blip>
+          <a:srcRect/>
+          <a:stretch/>
+        </p:blipFill>
+        <p:spPr>
+          <a:xfrm>
+            <a:off x="4349799" y="2000398"/>
+            <a:ext cx="3492549" cy="3742878"/>
+          </a:xfrm>
+          <a:prstGeom prst="rect">
+            <a:avLst/>
+          </a:prstGeom>
+          <a:noFill/>
+          <a:ln>
+            <a:noFill/>
+          </a:ln>
+        </p:spPr>
+      </p:pic>
+      <p:pic>
+        <p:nvPicPr>
+          <p:cNvPr id="98" name="Google Shape;98;p14" descr="image.png"/>
+          <p:cNvPicPr preferRelativeResize="0"/>
+          <p:nvPr/>
+        </p:nvPicPr>
+        <p:blipFill rotWithShape="1">
+          <a:blip r:embed="rId6">
+            <a:alphaModFix/>
+          </a:blip>
+          <a:srcRect/>
+          <a:stretch/>
+        </p:blipFill>
+        <p:spPr>
+          <a:xfrm>
+            <a:off x="8128099" y="2000398"/>
+            <a:ext cx="3492549" cy="3742878"/>
+          </a:xfrm>
+          <a:prstGeom prst="rect">
+            <a:avLst/>
+          </a:prstGeom>
+          <a:noFill/>
+          <a:ln>
+            <a:noFill/>
+          </a:ln>
+        </p:spPr>
+      </p:pic>
+      <p:pic>
+        <p:nvPicPr>
+          <p:cNvPr id="99" name="Google Shape;99;p14" descr="image.png"/>
+          <p:cNvPicPr preferRelativeResize="0"/>
+          <p:nvPr/>
+        </p:nvPicPr>
+        <p:blipFill rotWithShape="1">
+          <a:blip r:embed="rId7">
+            <a:alphaModFix/>
+          </a:blip>
+          <a:srcRect/>
+          <a:stretch/>
+        </p:blipFill>
+        <p:spPr>
+          <a:xfrm>
+            <a:off x="914400" y="2343298"/>
+            <a:ext cx="762000" cy="762000"/>
+          </a:xfrm>
+          <a:prstGeom prst="rect">
+            <a:avLst/>
+          </a:prstGeom>
+          <a:noFill/>
+          <a:ln>
+            <a:noFill/>
+          </a:ln>
+        </p:spPr>
+      </p:pic>
+      <p:sp>
+        <p:nvSpPr>
+          <p:cNvPr id="100" name="Google Shape;100;p14"/>
+          <p:cNvSpPr txBox="1"/>
+          <p:nvPr/>
+        </p:nvSpPr>
+        <p:spPr>
+          <a:xfrm>
+            <a:off x="914400" y="3343423"/>
+            <a:ext cx="1950243" cy="323850"/>
+          </a:xfrm>
+          <a:prstGeom prst="rect">
+            <a:avLst/>
+          </a:prstGeom>
+          <a:noFill/>
+          <a:ln>
+            <a:noFill/>
+          </a:ln>
+        </p:spPr>
+        <p:txBody>
+          <a:bodyPr spcFirstLastPara="1" wrap="square" lIns="0" tIns="0" rIns="0" bIns="0" anchor="t" anchorCtr="0">
+            <a:spAutoFit/>
+          </a:bodyPr>
+          <a:lstStyle/>
+          <a:p>
+            <a:pPr marL="0" marR="0" lvl="0" indent="0" algn="l" rtl="0">
+              <a:spcBef>
+                <a:spcPts val="0"/>
+              </a:spcBef>
+              <a:spcAft>
+                <a:spcPts val="0"/>
+              </a:spcAft>
+              <a:buNone/>
+            </a:pPr>
+            <a:r>
+              <a:rPr lang="en-US" sz="2100" b="1" i="0" u="none" strike="noStrike" cap="none">
+                <a:solidFill>
+                  <a:srgbClr val="6B2D8B"/>
+                </a:solidFill>
+                <a:latin typeface="Syne"/>
+                <a:ea typeface="Syne"/>
+                <a:cs typeface="Syne"/>
+                <a:sym typeface="Syne"/>
+              </a:rPr>
+              <a:t>Data Quality</a:t>
+            </a:r>
+            <a:endParaRPr/>
+          </a:p>
+        </p:txBody>
+      </p:sp>
+      <p:sp>
+        <p:nvSpPr>
+          <p:cNvPr id="101" name="Google Shape;101;p14"/>
+          <p:cNvSpPr txBox="1"/>
+          <p:nvPr/>
+        </p:nvSpPr>
+        <p:spPr>
+          <a:xfrm>
+            <a:off x="914400" y="3810148"/>
+            <a:ext cx="2806749" cy="1447353"/>
+          </a:xfrm>
+          <a:prstGeom prst="rect">
+            <a:avLst/>
+          </a:prstGeom>
+          <a:noFill/>
+          <a:ln>
+            <a:noFill/>
+          </a:ln>
+        </p:spPr>
+        <p:txBody>
+          <a:bodyPr spcFirstLastPara="1" wrap="square" lIns="0" tIns="0" rIns="0" bIns="0" anchor="t" anchorCtr="0">
+            <a:spAutoFit/>
+          </a:bodyPr>
+          <a:lstStyle/>
+          <a:p>
+            <a:pPr marL="0" marR="0" lvl="0" indent="0" algn="l" rtl="0">
+              <a:lnSpc>
+                <a:spcPct val="159929"/>
+              </a:lnSpc>
+              <a:spcBef>
+                <a:spcPts val="0"/>
+              </a:spcBef>
+              <a:spcAft>
+                <a:spcPts val="0"/>
+              </a:spcAft>
+              <a:buNone/>
+            </a:pPr>
+            <a:r>
+              <a:rPr lang="en-US" sz="1425" b="0" i="0" u="none" strike="noStrike" cap="none">
+                <a:solidFill>
+                  <a:srgbClr val="2D1B3D"/>
+                </a:solidFill>
+                <a:latin typeface="DM Sans"/>
+                <a:ea typeface="DM Sans"/>
+                <a:cs typeface="DM Sans"/>
+                <a:sym typeface="DM Sans"/>
+              </a:rPr>
+              <a:t>Automated five-layer null remediation eliminates manual data-cleaning effort, reducing pre-analysis preparation time by an estimated 70–85%.</a:t>
+            </a:r>
+            <a:endParaRPr/>
+          </a:p>
+        </p:txBody>
+      </p:sp>
+      <p:pic>
+        <p:nvPicPr>
+          <p:cNvPr id="102" name="Google Shape;102;p14" descr="image.png"/>
+          <p:cNvPicPr preferRelativeResize="0"/>
+          <p:nvPr/>
+        </p:nvPicPr>
+        <p:blipFill rotWithShape="1">
+          <a:blip r:embed="rId8">
+            <a:alphaModFix/>
+          </a:blip>
+          <a:srcRect/>
+          <a:stretch/>
+        </p:blipFill>
+        <p:spPr>
+          <a:xfrm>
+            <a:off x="4692699" y="2343298"/>
+            <a:ext cx="762000" cy="762000"/>
+          </a:xfrm>
+          <a:prstGeom prst="rect">
+            <a:avLst/>
+          </a:prstGeom>
+          <a:noFill/>
+          <a:ln>
+            <a:noFill/>
+          </a:ln>
+        </p:spPr>
+      </p:pic>
+      <p:sp>
+        <p:nvSpPr>
+          <p:cNvPr id="103" name="Google Shape;103;p14"/>
+          <p:cNvSpPr txBox="1"/>
+          <p:nvPr/>
+        </p:nvSpPr>
+        <p:spPr>
+          <a:xfrm>
+            <a:off x="4692699" y="3343423"/>
+            <a:ext cx="1610201" cy="323850"/>
+          </a:xfrm>
+          <a:prstGeom prst="rect">
+            <a:avLst/>
+          </a:prstGeom>
+          <a:noFill/>
+          <a:ln>
+            <a:noFill/>
+          </a:ln>
+        </p:spPr>
+        <p:txBody>
+          <a:bodyPr spcFirstLastPara="1" wrap="square" lIns="0" tIns="0" rIns="0" bIns="0" anchor="t" anchorCtr="0">
+            <a:spAutoFit/>
+          </a:bodyPr>
+          <a:lstStyle/>
+          <a:p>
+            <a:pPr marL="0" marR="0" lvl="0" indent="0" algn="l" rtl="0">
+              <a:spcBef>
+                <a:spcPts val="0"/>
+              </a:spcBef>
+              <a:spcAft>
+                <a:spcPts val="0"/>
+              </a:spcAft>
+              <a:buNone/>
+            </a:pPr>
+            <a:r>
+              <a:rPr lang="en-US" sz="2100" b="1" i="0" u="none" strike="noStrike" cap="none">
+                <a:solidFill>
+                  <a:srgbClr val="6B2D8B"/>
+                </a:solidFill>
+                <a:latin typeface="Syne"/>
+                <a:ea typeface="Syne"/>
+                <a:cs typeface="Syne"/>
+                <a:sym typeface="Syne"/>
+              </a:rPr>
+              <a:t>Scalability</a:t>
+            </a:r>
+            <a:endParaRPr/>
+          </a:p>
+        </p:txBody>
+      </p:sp>
+      <p:sp>
+        <p:nvSpPr>
+          <p:cNvPr id="104" name="Google Shape;104;p14"/>
+          <p:cNvSpPr txBox="1"/>
+          <p:nvPr/>
+        </p:nvSpPr>
+        <p:spPr>
+          <a:xfrm>
+            <a:off x="4692699" y="3810148"/>
+            <a:ext cx="2806749" cy="1447353"/>
+          </a:xfrm>
+          <a:prstGeom prst="rect">
+            <a:avLst/>
+          </a:prstGeom>
+          <a:noFill/>
+          <a:ln>
+            <a:noFill/>
+          </a:ln>
+        </p:spPr>
+        <p:txBody>
+          <a:bodyPr spcFirstLastPara="1" wrap="square" lIns="0" tIns="0" rIns="0" bIns="0" anchor="t" anchorCtr="0">
+            <a:spAutoFit/>
+          </a:bodyPr>
+          <a:lstStyle/>
+          <a:p>
+            <a:pPr marL="0" marR="0" lvl="0" indent="0" algn="l" rtl="0">
+              <a:lnSpc>
+                <a:spcPct val="159929"/>
+              </a:lnSpc>
+              <a:spcBef>
+                <a:spcPts val="0"/>
+              </a:spcBef>
+              <a:spcAft>
+                <a:spcPts val="0"/>
+              </a:spcAft>
+              <a:buNone/>
+            </a:pPr>
+            <a:r>
+              <a:rPr lang="en-US" sz="1425" b="0" i="0" u="none" strike="noStrike" cap="none">
+                <a:solidFill>
+                  <a:srgbClr val="2D1B3D"/>
+                </a:solidFill>
+                <a:latin typeface="DM Sans"/>
+                <a:ea typeface="DM Sans"/>
+                <a:cs typeface="DM Sans"/>
+                <a:sym typeface="DM Sans"/>
+              </a:rPr>
+              <a:t>Handles datasets from hundreds to tens of thousands of rows with consistent performance, leveraging Pandas vectorised operations.</a:t>
+            </a:r>
+            <a:endParaRPr/>
+          </a:p>
+        </p:txBody>
+      </p:sp>
+      <p:pic>
+        <p:nvPicPr>
+          <p:cNvPr id="105" name="Google Shape;105;p14" descr="image.png"/>
+          <p:cNvPicPr preferRelativeResize="0"/>
+          <p:nvPr/>
+        </p:nvPicPr>
+        <p:blipFill rotWithShape="1">
+          <a:blip r:embed="rId9">
+            <a:alphaModFix/>
+          </a:blip>
+          <a:srcRect/>
+          <a:stretch/>
+        </p:blipFill>
+        <p:spPr>
+          <a:xfrm>
+            <a:off x="8470999" y="2343298"/>
+            <a:ext cx="762000" cy="762000"/>
+          </a:xfrm>
+          <a:prstGeom prst="rect">
+            <a:avLst/>
+          </a:prstGeom>
+          <a:noFill/>
+          <a:ln>
+            <a:noFill/>
+          </a:ln>
+        </p:spPr>
+      </p:pic>
+      <p:sp>
+        <p:nvSpPr>
+          <p:cNvPr id="106" name="Google Shape;106;p14"/>
+          <p:cNvSpPr txBox="1"/>
+          <p:nvPr/>
+        </p:nvSpPr>
+        <p:spPr>
+          <a:xfrm>
+            <a:off x="8470999" y="3343423"/>
+            <a:ext cx="2340292" cy="323850"/>
+          </a:xfrm>
+          <a:prstGeom prst="rect">
+            <a:avLst/>
+          </a:prstGeom>
+          <a:noFill/>
+          <a:ln>
+            <a:noFill/>
+          </a:ln>
+        </p:spPr>
+        <p:txBody>
+          <a:bodyPr spcFirstLastPara="1" wrap="square" lIns="0" tIns="0" rIns="0" bIns="0" anchor="t" anchorCtr="0">
+            <a:spAutoFit/>
+          </a:bodyPr>
+          <a:lstStyle/>
+          <a:p>
+            <a:pPr marL="0" marR="0" lvl="0" indent="0" algn="l" rtl="0">
+              <a:spcBef>
+                <a:spcPts val="0"/>
+              </a:spcBef>
+              <a:spcAft>
+                <a:spcPts val="0"/>
+              </a:spcAft>
+              <a:buNone/>
+            </a:pPr>
+            <a:r>
+              <a:rPr lang="en-US" sz="2100" b="1" i="0" u="none" strike="noStrike" cap="none">
+                <a:solidFill>
+                  <a:srgbClr val="6B2D8B"/>
+                </a:solidFill>
+                <a:latin typeface="Syne"/>
+                <a:ea typeface="Syne"/>
+                <a:cs typeface="Syne"/>
+                <a:sym typeface="Syne"/>
+              </a:rPr>
+              <a:t>Insight Velocity</a:t>
+            </a:r>
+            <a:endParaRPr/>
+          </a:p>
+        </p:txBody>
+      </p:sp>
+      <p:sp>
+        <p:nvSpPr>
+          <p:cNvPr id="107" name="Google Shape;107;p14"/>
+          <p:cNvSpPr txBox="1"/>
+          <p:nvPr/>
+        </p:nvSpPr>
+        <p:spPr>
+          <a:xfrm>
+            <a:off x="8470999" y="3810148"/>
+            <a:ext cx="2806749" cy="1447353"/>
+          </a:xfrm>
+          <a:prstGeom prst="rect">
+            <a:avLst/>
+          </a:prstGeom>
+          <a:noFill/>
+          <a:ln>
+            <a:noFill/>
+          </a:ln>
+        </p:spPr>
+        <p:txBody>
+          <a:bodyPr spcFirstLastPara="1" wrap="square" lIns="0" tIns="0" rIns="0" bIns="0" anchor="t" anchorCtr="0">
+            <a:spAutoFit/>
+          </a:bodyPr>
+          <a:lstStyle/>
+          <a:p>
+            <a:pPr marL="0" marR="0" lvl="0" indent="0" algn="l" rtl="0">
+              <a:lnSpc>
+                <a:spcPct val="159929"/>
+              </a:lnSpc>
+              <a:spcBef>
+                <a:spcPts val="0"/>
+              </a:spcBef>
+              <a:spcAft>
+                <a:spcPts val="0"/>
+              </a:spcAft>
+              <a:buNone/>
+            </a:pPr>
+            <a:r>
+              <a:rPr lang="en-US" sz="1425" b="0" i="0" u="none" strike="noStrike" cap="none">
+                <a:solidFill>
+                  <a:srgbClr val="2D1B3D"/>
+                </a:solidFill>
+                <a:latin typeface="DM Sans"/>
+                <a:ea typeface="DM Sans"/>
+                <a:cs typeface="DM Sans"/>
+                <a:sym typeface="DM Sans"/>
+              </a:rPr>
+              <a:t>Full Exploratory Data Analysis (EDA)—including descriptive stats, correlations, and distributions—delivered in a single button click.</a:t>
+            </a:r>
+            <a:endParaRPr/>
+          </a:p>
+        </p:txBody>
+      </p:sp>
+      <p:pic>
+        <p:nvPicPr>
+          <p:cNvPr id="108" name="Google Shape;108;p14" descr="image.png"/>
+          <p:cNvPicPr preferRelativeResize="0"/>
+          <p:nvPr/>
+        </p:nvPicPr>
+        <p:blipFill rotWithShape="1">
+          <a:blip r:embed="rId10">
+            <a:alphaModFix/>
+          </a:blip>
+          <a:srcRect/>
+          <a:stretch/>
+        </p:blipFill>
+        <p:spPr>
+          <a:xfrm>
+            <a:off x="1071562" y="2524273"/>
+            <a:ext cx="447675" cy="400050"/>
+          </a:xfrm>
+          <a:prstGeom prst="rect">
+            <a:avLst/>
+          </a:prstGeom>
+          <a:noFill/>
+          <a:ln>
+            <a:noFill/>
+          </a:ln>
+        </p:spPr>
+      </p:pic>
+      <p:pic>
+        <p:nvPicPr>
+          <p:cNvPr id="109" name="Google Shape;109;p14" descr="image.png"/>
+          <p:cNvPicPr preferRelativeResize="0"/>
+          <p:nvPr/>
+        </p:nvPicPr>
+        <p:blipFill rotWithShape="1">
+          <a:blip r:embed="rId11">
+            <a:alphaModFix/>
+          </a:blip>
+          <a:srcRect/>
+          <a:stretch/>
+        </p:blipFill>
+        <p:spPr>
+          <a:xfrm>
+            <a:off x="4873674" y="2524273"/>
+            <a:ext cx="400050" cy="400050"/>
+          </a:xfrm>
+          <a:prstGeom prst="rect">
+            <a:avLst/>
+          </a:prstGeom>
+          <a:noFill/>
+          <a:ln>
+            <a:noFill/>
+          </a:ln>
+        </p:spPr>
+      </p:pic>
+      <p:pic>
+        <p:nvPicPr>
+          <p:cNvPr id="110" name="Google Shape;110;p14" descr="image.png"/>
+          <p:cNvPicPr preferRelativeResize="0"/>
+          <p:nvPr/>
+        </p:nvPicPr>
+        <p:blipFill rotWithShape="1">
+          <a:blip r:embed="rId12">
+            <a:alphaModFix/>
+          </a:blip>
+          <a:srcRect/>
+          <a:stretch/>
+        </p:blipFill>
+        <p:spPr>
+          <a:xfrm>
+            <a:off x="8651974" y="2524273"/>
+            <a:ext cx="400050" cy="400050"/>
+          </a:xfrm>
+          <a:prstGeom prst="rect">
+            <a:avLst/>
+          </a:prstGeom>
+          <a:noFill/>
+          <a:ln>
+            <a:noFill/>
+          </a:ln>
+        </p:spPr>
+      </p:pic>
+      <p:sp>
+        <p:nvSpPr>
+          <p:cNvPr id="111" name="Google Shape;111;p14"/>
+          <p:cNvSpPr txBox="1"/>
+          <p:nvPr/>
+        </p:nvSpPr>
+        <p:spPr>
+          <a:xfrm>
+            <a:off x="571500" y="571500"/>
+            <a:ext cx="11601450" cy="504825"/>
+          </a:xfrm>
+          <a:prstGeom prst="rect">
+            <a:avLst/>
+          </a:prstGeom>
+          <a:noFill/>
+          <a:ln>
+            <a:noFill/>
+          </a:ln>
+        </p:spPr>
+        <p:txBody>
+          <a:bodyPr spcFirstLastPara="1" wrap="square" lIns="0" tIns="0" rIns="0" bIns="0" anchor="t" anchorCtr="0">
+            <a:spAutoFit/>
+          </a:bodyPr>
+          <a:lstStyle/>
+          <a:p>
+            <a:pPr marL="0" marR="0" lvl="0" indent="0" algn="l" rtl="0">
+              <a:spcBef>
+                <a:spcPts val="0"/>
+              </a:spcBef>
+              <a:spcAft>
+                <a:spcPts val="0"/>
+              </a:spcAft>
+              <a:buNone/>
+            </a:pPr>
+            <a:r>
+              <a:rPr lang="en-US" sz="3300" b="1" i="0" u="none" strike="noStrike" cap="none">
+                <a:solidFill>
+                  <a:srgbClr val="6B2D8B"/>
+                </a:solidFill>
+                <a:latin typeface="Syne"/>
+                <a:ea typeface="Syne"/>
+                <a:cs typeface="Syne"/>
+                <a:sym typeface="Syne"/>
+              </a:rPr>
+              <a:t>Strategic Value Proposition</a:t>
+            </a:r>
+            <a:endParaRPr/>
+          </a:p>
+        </p:txBody>
+      </p:sp>
+    </p:spTree>
+  </p:cSld>
+  <p:clrMapOvr>
+    <a:masterClrMapping/>
+  </p:clrMapOvr>
+</p:sld>
+</file>
+
+<file path=ppt/slides/slide20.xml><?xml version="1.0" encoding="utf-8"?>
 <p:sld xmlns:a="http://schemas.openxmlformats.org/drawingml/2006/main" xmlns:r="http://schemas.openxmlformats.org/officeDocument/2006/relationships" xmlns:p="http://schemas.openxmlformats.org/presentationml/2006/main">
   <p:cSld>
     <p:bg>

--- a/Documentation/FitPulse Analytics - Enterprise Health Data Intelligence Platform.pptx
+++ b/Documentation/FitPulse Analytics - Enterprise Health Data Intelligence Platform.pptx
@@ -5,7 +5,7 @@
     <p:sldMasterId id="2147483659" r:id="rId1"/>
   </p:sldMasterIdLst>
   <p:notesMasterIdLst>
-    <p:notesMasterId r:id="rId22"/>
+    <p:notesMasterId r:id="rId21"/>
   </p:notesMasterIdLst>
   <p:sldIdLst>
     <p:sldId id="256" r:id="rId2"/>
@@ -27,27 +27,26 @@
     <p:sldId id="278" r:id="rId18"/>
     <p:sldId id="279" r:id="rId19"/>
     <p:sldId id="281" r:id="rId20"/>
-    <p:sldId id="273" r:id="rId21"/>
   </p:sldIdLst>
   <p:sldSz cx="12192000" cy="6858000"/>
   <p:notesSz cx="6858000" cy="9144000"/>
   <p:embeddedFontLst>
     <p:embeddedFont>
       <p:font typeface="DM Mono" panose="020B0509040201040103" pitchFamily="49" charset="0"/>
-      <p:regular r:id="rId23"/>
-      <p:italic r:id="rId24"/>
+      <p:regular r:id="rId22"/>
+      <p:italic r:id="rId23"/>
     </p:embeddedFont>
     <p:embeddedFont>
       <p:font typeface="DM Sans" pitchFamily="2" charset="0"/>
-      <p:regular r:id="rId25"/>
-      <p:bold r:id="rId26"/>
-      <p:italic r:id="rId27"/>
-      <p:boldItalic r:id="rId28"/>
+      <p:regular r:id="rId24"/>
+      <p:bold r:id="rId25"/>
+      <p:italic r:id="rId26"/>
+      <p:boldItalic r:id="rId27"/>
     </p:embeddedFont>
     <p:embeddedFont>
       <p:font typeface="Syne" panose="020B0604020202020204" charset="0"/>
-      <p:regular r:id="rId29"/>
-      <p:bold r:id="rId30"/>
+      <p:regular r:id="rId28"/>
+      <p:bold r:id="rId29"/>
     </p:embeddedFont>
   </p:embeddedFontLst>
   <p:defaultTextStyle>
@@ -1146,110 +1145,6 @@
             <a:endParaRPr/>
           </a:p>
         </p:txBody>
-      </p:sp>
-    </p:spTree>
-  </p:cSld>
-  <p:clrMapOvr>
-    <a:masterClrMapping/>
-  </p:clrMapOvr>
-</p:notes>
-</file>
-
-<file path=ppt/notesSlides/notesSlide13.xml><?xml version="1.0" encoding="utf-8"?>
-<p:notes xmlns:a="http://schemas.openxmlformats.org/drawingml/2006/main" xmlns:r="http://schemas.openxmlformats.org/officeDocument/2006/relationships" xmlns:p="http://schemas.openxmlformats.org/presentationml/2006/main" showMasterSp="0" showMasterPhAnim="0">
-  <p:cSld>
-    <p:spTree>
-      <p:nvGrpSpPr>
-        <p:cNvPr id="1" name="Shape 306"/>
-        <p:cNvGrpSpPr/>
-        <p:nvPr/>
-      </p:nvGrpSpPr>
-      <p:grpSpPr>
-        <a:xfrm>
-          <a:off x="0" y="0"/>
-          <a:ext cx="0" cy="0"/>
-          <a:chOff x="0" y="0"/>
-          <a:chExt cx="0" cy="0"/>
-        </a:xfrm>
-      </p:grpSpPr>
-      <p:sp>
-        <p:nvSpPr>
-          <p:cNvPr id="307" name="Google Shape;307;p12:notes"/>
-          <p:cNvSpPr txBox="1">
-            <a:spLocks noGrp="1"/>
-          </p:cNvSpPr>
-          <p:nvPr>
-            <p:ph type="body" idx="1"/>
-          </p:nvPr>
-        </p:nvSpPr>
-        <p:spPr>
-          <a:xfrm>
-            <a:off x="685800" y="4343400"/>
-            <a:ext cx="5486400" cy="4114800"/>
-          </a:xfrm>
-          <a:prstGeom prst="rect">
-            <a:avLst/>
-          </a:prstGeom>
-        </p:spPr>
-        <p:txBody>
-          <a:bodyPr spcFirstLastPara="1" wrap="square" lIns="91425" tIns="91425" rIns="91425" bIns="91425" anchor="t" anchorCtr="0">
-            <a:noAutofit/>
-          </a:bodyPr>
-          <a:lstStyle/>
-          <a:p>
-            <a:pPr marL="0" lvl="0" indent="0" algn="l" rtl="0">
-              <a:spcBef>
-                <a:spcPts val="0"/>
-              </a:spcBef>
-              <a:spcAft>
-                <a:spcPts val="0"/>
-              </a:spcAft>
-              <a:buNone/>
-            </a:pPr>
-            <a:endParaRPr/>
-          </a:p>
-        </p:txBody>
-      </p:sp>
-      <p:sp>
-        <p:nvSpPr>
-          <p:cNvPr id="308" name="Google Shape;308;p12:notes"/>
-          <p:cNvSpPr>
-            <a:spLocks noGrp="1" noRot="1" noChangeAspect="1"/>
-          </p:cNvSpPr>
-          <p:nvPr>
-            <p:ph type="sldImg" idx="2"/>
-          </p:nvPr>
-        </p:nvSpPr>
-        <p:spPr>
-          <a:xfrm>
-            <a:off x="1143225" y="685800"/>
-            <a:ext cx="4572225" cy="3429000"/>
-          </a:xfrm>
-          <a:custGeom>
-            <a:avLst/>
-            <a:gdLst/>
-            <a:ahLst/>
-            <a:cxnLst/>
-            <a:rect l="l" t="t" r="r" b="b"/>
-            <a:pathLst>
-              <a:path w="120000" h="120000" extrusionOk="0">
-                <a:moveTo>
-                  <a:pt x="0" y="0"/>
-                </a:moveTo>
-                <a:lnTo>
-                  <a:pt x="120000" y="0"/>
-                </a:lnTo>
-                <a:lnTo>
-                  <a:pt x="120000" y="120000"/>
-                </a:lnTo>
-                <a:lnTo>
-                  <a:pt x="0" y="120000"/>
-                </a:lnTo>
-                <a:close/>
-              </a:path>
-            </a:pathLst>
-          </a:custGeom>
-        </p:spPr>
       </p:sp>
     </p:spTree>
   </p:cSld>
@@ -13201,30 +13096,32 @@
       </p:sp>
       <p:pic>
         <p:nvPicPr>
-          <p:cNvPr id="268" name="Google Shape;268;p22"/>
-          <p:cNvPicPr preferRelativeResize="0"/>
+          <p:cNvPr id="5" name="Picture 4">
+            <a:extLst>
+              <a:ext uri="{FF2B5EF4-FFF2-40B4-BE49-F238E27FC236}">
+                <a16:creationId xmlns:a16="http://schemas.microsoft.com/office/drawing/2014/main" id="{12AADC10-028E-72F3-59D8-43127FDF383A}"/>
+              </a:ext>
+            </a:extLst>
+          </p:cNvPr>
+          <p:cNvPicPr>
+            <a:picLocks noChangeAspect="1"/>
+          </p:cNvPicPr>
           <p:nvPr/>
         </p:nvPicPr>
         <p:blipFill>
-          <a:blip r:embed="rId2">
-            <a:alphaModFix/>
-          </a:blip>
+          <a:blip r:embed="rId2"/>
           <a:stretch>
             <a:fillRect/>
           </a:stretch>
         </p:blipFill>
         <p:spPr>
           <a:xfrm>
-            <a:off x="344350" y="1902358"/>
-            <a:ext cx="11130100" cy="4709450"/>
+            <a:off x="0" y="1676400"/>
+            <a:ext cx="12164272" cy="5025025"/>
           </a:xfrm>
           <a:prstGeom prst="rect">
             <a:avLst/>
           </a:prstGeom>
-          <a:noFill/>
-          <a:ln>
-            <a:noFill/>
-          </a:ln>
         </p:spPr>
       </p:pic>
     </p:spTree>
@@ -13259,30 +13156,32 @@
       </p:grpSpPr>
       <p:pic>
         <p:nvPicPr>
-          <p:cNvPr id="290" name="Google Shape;290;p26"/>
-          <p:cNvPicPr preferRelativeResize="0"/>
+          <p:cNvPr id="3" name="Picture 2">
+            <a:extLst>
+              <a:ext uri="{FF2B5EF4-FFF2-40B4-BE49-F238E27FC236}">
+                <a16:creationId xmlns:a16="http://schemas.microsoft.com/office/drawing/2014/main" id="{58206664-B36A-2FB5-8764-50EB73C90F68}"/>
+              </a:ext>
+            </a:extLst>
+          </p:cNvPr>
+          <p:cNvPicPr>
+            <a:picLocks noChangeAspect="1"/>
+          </p:cNvPicPr>
           <p:nvPr/>
         </p:nvPicPr>
         <p:blipFill>
-          <a:blip r:embed="rId2">
-            <a:alphaModFix/>
-          </a:blip>
+          <a:blip r:embed="rId2"/>
           <a:stretch>
             <a:fillRect/>
           </a:stretch>
         </p:blipFill>
         <p:spPr>
           <a:xfrm>
-            <a:off x="450937" y="338203"/>
-            <a:ext cx="11181914" cy="5992721"/>
+            <a:off x="22965" y="0"/>
+            <a:ext cx="12146070" cy="6438377"/>
           </a:xfrm>
           <a:prstGeom prst="rect">
             <a:avLst/>
           </a:prstGeom>
-          <a:noFill/>
-          <a:ln>
-            <a:noFill/>
-          </a:ln>
         </p:spPr>
       </p:pic>
     </p:spTree>
@@ -13317,10 +13216,10 @@
       </p:grpSpPr>
       <p:pic>
         <p:nvPicPr>
-          <p:cNvPr id="7" name="Picture 6">
+          <p:cNvPr id="3" name="Picture 2">
             <a:extLst>
               <a:ext uri="{FF2B5EF4-FFF2-40B4-BE49-F238E27FC236}">
-                <a16:creationId xmlns:a16="http://schemas.microsoft.com/office/drawing/2014/main" id="{F4FD77A7-9DF7-B928-415C-CBD41EA8D99C}"/>
+                <a16:creationId xmlns:a16="http://schemas.microsoft.com/office/drawing/2014/main" id="{82A0FD8F-5A47-60CC-16D3-6AA4FEC12384}"/>
               </a:ext>
             </a:extLst>
           </p:cNvPr>
@@ -13337,8 +13236,8 @@
         </p:blipFill>
         <p:spPr>
           <a:xfrm>
-            <a:off x="187890" y="112735"/>
-            <a:ext cx="11887200" cy="6501078"/>
+            <a:off x="3912" y="338203"/>
+            <a:ext cx="12184175" cy="6187857"/>
           </a:xfrm>
           <a:prstGeom prst="rect">
             <a:avLst/>
@@ -14009,169 +13908,6 @@
               <a:t>Strategic Value Proposition</a:t>
             </a:r>
             <a:endParaRPr/>
-          </a:p>
-        </p:txBody>
-      </p:sp>
-    </p:spTree>
-  </p:cSld>
-  <p:clrMapOvr>
-    <a:masterClrMapping/>
-  </p:clrMapOvr>
-</p:sld>
-</file>
-
-<file path=ppt/slides/slide20.xml><?xml version="1.0" encoding="utf-8"?>
-<p:sld xmlns:a="http://schemas.openxmlformats.org/drawingml/2006/main" xmlns:r="http://schemas.openxmlformats.org/officeDocument/2006/relationships" xmlns:p="http://schemas.openxmlformats.org/presentationml/2006/main">
-  <p:cSld>
-    <p:bg>
-      <p:bgPr>
-        <a:solidFill>
-          <a:srgbClr val="F5ECF5"/>
-        </a:solidFill>
-        <a:effectLst/>
-      </p:bgPr>
-    </p:bg>
-    <p:spTree>
-      <p:nvGrpSpPr>
-        <p:cNvPr id="1" name="Shape 309"/>
-        <p:cNvGrpSpPr/>
-        <p:nvPr/>
-      </p:nvGrpSpPr>
-      <p:grpSpPr>
-        <a:xfrm>
-          <a:off x="0" y="0"/>
-          <a:ext cx="0" cy="0"/>
-          <a:chOff x="0" y="0"/>
-          <a:chExt cx="0" cy="0"/>
-        </a:xfrm>
-      </p:grpSpPr>
-      <p:pic>
-        <p:nvPicPr>
-          <p:cNvPr id="310" name="Google Shape;310;p30" descr="image.png"/>
-          <p:cNvPicPr preferRelativeResize="0"/>
-          <p:nvPr/>
-        </p:nvPicPr>
-        <p:blipFill rotWithShape="1">
-          <a:blip r:embed="rId3">
-            <a:alphaModFix/>
-          </a:blip>
-          <a:srcRect/>
-          <a:stretch/>
-        </p:blipFill>
-        <p:spPr>
-          <a:xfrm>
-            <a:off x="0" y="0"/>
-            <a:ext cx="12192000" cy="6858000"/>
-          </a:xfrm>
-          <a:prstGeom prst="rect">
-            <a:avLst/>
-          </a:prstGeom>
-          <a:noFill/>
-          <a:ln>
-            <a:noFill/>
-          </a:ln>
-        </p:spPr>
-      </p:pic>
-      <p:sp>
-        <p:nvSpPr>
-          <p:cNvPr id="311" name="Google Shape;311;p30"/>
-          <p:cNvSpPr txBox="1"/>
-          <p:nvPr/>
-        </p:nvSpPr>
-        <p:spPr>
-          <a:xfrm>
-            <a:off x="295275" y="2107852"/>
-            <a:ext cx="11601450" cy="914400"/>
-          </a:xfrm>
-          <a:prstGeom prst="rect">
-            <a:avLst/>
-          </a:prstGeom>
-          <a:noFill/>
-          <a:ln>
-            <a:noFill/>
-          </a:ln>
-        </p:spPr>
-        <p:txBody>
-          <a:bodyPr spcFirstLastPara="1" wrap="square" lIns="0" tIns="0" rIns="0" bIns="0" anchor="t" anchorCtr="0">
-            <a:spAutoFit/>
-          </a:bodyPr>
-          <a:lstStyle/>
-          <a:p>
-            <a:pPr marL="0" marR="0" lvl="0" indent="0" algn="ctr" rtl="0">
-              <a:spcBef>
-                <a:spcPts val="0"/>
-              </a:spcBef>
-              <a:spcAft>
-                <a:spcPts val="0"/>
-              </a:spcAft>
-              <a:buNone/>
-            </a:pPr>
-            <a:r>
-              <a:rPr lang="en-US" sz="6000" b="1" i="0" u="none" strike="noStrike" cap="none">
-                <a:solidFill>
-                  <a:srgbClr val="6B2D8B"/>
-                </a:solidFill>
-                <a:latin typeface="Syne"/>
-                <a:ea typeface="Syne"/>
-                <a:cs typeface="Syne"/>
-                <a:sym typeface="Syne"/>
-              </a:rPr>
-              <a:t>Questions?</a:t>
-            </a:r>
-            <a:endParaRPr/>
-          </a:p>
-        </p:txBody>
-      </p:sp>
-      <p:sp>
-        <p:nvSpPr>
-          <p:cNvPr id="312" name="Google Shape;312;p30"/>
-          <p:cNvSpPr txBox="1"/>
-          <p:nvPr/>
-        </p:nvSpPr>
-        <p:spPr>
-          <a:xfrm>
-            <a:off x="571500" y="3212752"/>
-            <a:ext cx="11049000" cy="492600"/>
-          </a:xfrm>
-          <a:prstGeom prst="rect">
-            <a:avLst/>
-          </a:prstGeom>
-          <a:noFill/>
-          <a:ln>
-            <a:noFill/>
-          </a:ln>
-        </p:spPr>
-        <p:txBody>
-          <a:bodyPr spcFirstLastPara="1" wrap="square" lIns="0" tIns="0" rIns="0" bIns="0" anchor="t" anchorCtr="0">
-            <a:spAutoFit/>
-          </a:bodyPr>
-          <a:lstStyle/>
-          <a:p>
-            <a:pPr marL="0" marR="0" lvl="0" indent="0" algn="ctr" rtl="0">
-              <a:lnSpc>
-                <a:spcPct val="159944"/>
-              </a:lnSpc>
-              <a:spcBef>
-                <a:spcPts val="0"/>
-              </a:spcBef>
-              <a:spcAft>
-                <a:spcPts val="0"/>
-              </a:spcAft>
-              <a:buNone/>
-            </a:pPr>
-            <a:r>
-              <a:rPr lang="en-US" sz="3200" b="0" i="0" u="none" strike="noStrike" cap="none">
-                <a:solidFill>
-                  <a:srgbClr val="7B5C8A"/>
-                </a:solidFill>
-                <a:latin typeface="DM Sans"/>
-                <a:ea typeface="DM Sans"/>
-                <a:cs typeface="DM Sans"/>
-                <a:sym typeface="DM Sans"/>
-              </a:rPr>
-              <a:t>Thank you for exploring FitPulse Analytics.</a:t>
-            </a:r>
-            <a:endParaRPr sz="2800"/>
           </a:p>
         </p:txBody>
       </p:sp>

--- a/Documentation/FitPulse Analytics - Enterprise Health Data Intelligence Platform.pptx
+++ b/Documentation/FitPulse Analytics - Enterprise Health Data Intelligence Platform.pptx
@@ -5,7 +5,7 @@
     <p:sldMasterId id="2147483659" r:id="rId1"/>
   </p:sldMasterIdLst>
   <p:notesMasterIdLst>
-    <p:notesMasterId r:id="rId21"/>
+    <p:notesMasterId r:id="rId24"/>
   </p:notesMasterIdLst>
   <p:sldIdLst>
     <p:sldId id="256" r:id="rId2"/>
@@ -17,36 +17,39 @@
     <p:sldId id="262" r:id="rId8"/>
     <p:sldId id="263" r:id="rId9"/>
     <p:sldId id="264" r:id="rId10"/>
-    <p:sldId id="265" r:id="rId11"/>
-    <p:sldId id="268" r:id="rId12"/>
-    <p:sldId id="269" r:id="rId13"/>
-    <p:sldId id="282" r:id="rId14"/>
-    <p:sldId id="274" r:id="rId15"/>
-    <p:sldId id="276" r:id="rId16"/>
-    <p:sldId id="277" r:id="rId17"/>
-    <p:sldId id="278" r:id="rId18"/>
-    <p:sldId id="279" r:id="rId19"/>
-    <p:sldId id="281" r:id="rId20"/>
+    <p:sldId id="283" r:id="rId11"/>
+    <p:sldId id="284" r:id="rId12"/>
+    <p:sldId id="285" r:id="rId13"/>
+    <p:sldId id="265" r:id="rId14"/>
+    <p:sldId id="268" r:id="rId15"/>
+    <p:sldId id="269" r:id="rId16"/>
+    <p:sldId id="282" r:id="rId17"/>
+    <p:sldId id="274" r:id="rId18"/>
+    <p:sldId id="276" r:id="rId19"/>
+    <p:sldId id="277" r:id="rId20"/>
+    <p:sldId id="278" r:id="rId21"/>
+    <p:sldId id="279" r:id="rId22"/>
+    <p:sldId id="281" r:id="rId23"/>
   </p:sldIdLst>
   <p:sldSz cx="12192000" cy="6858000"/>
   <p:notesSz cx="6858000" cy="9144000"/>
   <p:embeddedFontLst>
     <p:embeddedFont>
       <p:font typeface="DM Mono" panose="020B0509040201040103" pitchFamily="49" charset="0"/>
-      <p:regular r:id="rId22"/>
-      <p:italic r:id="rId23"/>
+      <p:regular r:id="rId25"/>
+      <p:italic r:id="rId26"/>
     </p:embeddedFont>
     <p:embeddedFont>
       <p:font typeface="DM Sans" pitchFamily="2" charset="0"/>
-      <p:regular r:id="rId24"/>
-      <p:bold r:id="rId25"/>
-      <p:italic r:id="rId26"/>
-      <p:boldItalic r:id="rId27"/>
+      <p:regular r:id="rId27"/>
+      <p:bold r:id="rId28"/>
+      <p:italic r:id="rId29"/>
+      <p:boldItalic r:id="rId30"/>
     </p:embeddedFont>
     <p:embeddedFont>
       <p:font typeface="Syne" panose="020B0604020202020204" charset="0"/>
-      <p:regular r:id="rId28"/>
-      <p:bold r:id="rId29"/>
+      <p:regular r:id="rId31"/>
+      <p:bold r:id="rId32"/>
     </p:embeddedFont>
   </p:embeddedFontLst>
   <p:defaultTextStyle>
@@ -12170,6 +12173,1866 @@
 <file path=ppt/slides/slide10.xml><?xml version="1.0" encoding="utf-8"?>
 <p:sld xmlns:a="http://schemas.openxmlformats.org/drawingml/2006/main" xmlns:r="http://schemas.openxmlformats.org/officeDocument/2006/relationships" xmlns:p="http://schemas.openxmlformats.org/presentationml/2006/main">
   <p:cSld>
+    <p:bg>
+      <p:bgPr>
+        <a:solidFill>
+          <a:schemeClr val="bg1"/>
+        </a:solidFill>
+        <a:effectLst/>
+      </p:bgPr>
+    </p:bg>
+    <p:spTree>
+      <p:nvGrpSpPr>
+        <p:cNvPr id="1" name=""/>
+        <p:cNvGrpSpPr/>
+        <p:nvPr/>
+      </p:nvGrpSpPr>
+      <p:grpSpPr>
+        <a:xfrm>
+          <a:off x="0" y="0"/>
+          <a:ext cx="0" cy="0"/>
+          <a:chOff x="0" y="0"/>
+          <a:chExt cx="0" cy="0"/>
+        </a:xfrm>
+      </p:grpSpPr>
+      <p:sp>
+        <p:nvSpPr>
+          <p:cNvPr id="12" name="Rectangle 11">
+            <a:extLst>
+              <a:ext uri="{FF2B5EF4-FFF2-40B4-BE49-F238E27FC236}">
+                <a16:creationId xmlns:a16="http://schemas.microsoft.com/office/drawing/2014/main" id="{F3060C83-F051-4F0E-ABAD-AA0DFC48B218}"/>
+              </a:ext>
+              <a:ext uri="{C183D7F6-B498-43B3-948B-1728B52AA6E4}">
+                <adec:decorative xmlns:adec="http://schemas.microsoft.com/office/drawing/2017/decorative" val="1"/>
+              </a:ext>
+            </a:extLst>
+          </p:cNvPr>
+          <p:cNvSpPr>
+            <a:spLocks noGrp="1" noRot="1" noChangeAspect="1" noMove="1" noResize="1" noEditPoints="1" noAdjustHandles="1" noChangeArrowheads="1" noChangeShapeType="1" noTextEdit="1"/>
+          </p:cNvSpPr>
+          <p:nvPr>
+            <p:extLst>
+              <p:ext uri="{386F3935-93C4-4BCD-93E2-E3B085C9AB24}">
+                <p16:designElem xmlns:p16="http://schemas.microsoft.com/office/powerpoint/2015/main" val="1"/>
+              </p:ext>
+            </p:extLst>
+          </p:nvPr>
+        </p:nvSpPr>
+        <p:spPr>
+          <a:xfrm>
+            <a:off x="0" y="0"/>
+            <a:ext cx="12192000" cy="6858000"/>
+          </a:xfrm>
+          <a:prstGeom prst="rect">
+            <a:avLst/>
+          </a:prstGeom>
+          <a:solidFill>
+            <a:schemeClr val="bg1"/>
+          </a:solidFill>
+          <a:ln>
+            <a:noFill/>
+          </a:ln>
+        </p:spPr>
+        <p:style>
+          <a:lnRef idx="2">
+            <a:schemeClr val="accent1">
+              <a:shade val="50000"/>
+            </a:schemeClr>
+          </a:lnRef>
+          <a:fillRef idx="1">
+            <a:schemeClr val="accent1"/>
+          </a:fillRef>
+          <a:effectRef idx="0">
+            <a:schemeClr val="accent1"/>
+          </a:effectRef>
+          <a:fontRef idx="minor">
+            <a:schemeClr val="lt1"/>
+          </a:fontRef>
+        </p:style>
+        <p:txBody>
+          <a:bodyPr rtlCol="0" anchor="ctr"/>
+          <a:lstStyle/>
+          <a:p>
+            <a:pPr algn="ctr"/>
+            <a:endParaRPr lang="en-US" dirty="0"/>
+          </a:p>
+        </p:txBody>
+      </p:sp>
+      <p:sp>
+        <p:nvSpPr>
+          <p:cNvPr id="14" name="Freeform: Shape 13">
+            <a:extLst>
+              <a:ext uri="{FF2B5EF4-FFF2-40B4-BE49-F238E27FC236}">
+                <a16:creationId xmlns:a16="http://schemas.microsoft.com/office/drawing/2014/main" id="{83C98ABE-055B-441F-B07E-44F97F083C39}"/>
+              </a:ext>
+              <a:ext uri="{C183D7F6-B498-43B3-948B-1728B52AA6E4}">
+                <adec:decorative xmlns:adec="http://schemas.microsoft.com/office/drawing/2017/decorative" val="1"/>
+              </a:ext>
+            </a:extLst>
+          </p:cNvPr>
+          <p:cNvSpPr>
+            <a:spLocks noGrp="1" noRot="1" noChangeAspect="1" noMove="1" noResize="1" noEditPoints="1" noAdjustHandles="1" noChangeArrowheads="1" noChangeShapeType="1" noTextEdit="1"/>
+          </p:cNvSpPr>
+          <p:nvPr>
+            <p:extLst>
+              <p:ext uri="{386F3935-93C4-4BCD-93E2-E3B085C9AB24}">
+                <p16:designElem xmlns:p16="http://schemas.microsoft.com/office/powerpoint/2015/main" val="1"/>
+              </p:ext>
+            </p:extLst>
+          </p:nvPr>
+        </p:nvSpPr>
+        <p:spPr>
+          <a:xfrm rot="18900000" flipH="1">
+            <a:off x="-376156" y="-253670"/>
+            <a:ext cx="1827638" cy="1376989"/>
+          </a:xfrm>
+          <a:custGeom>
+            <a:avLst/>
+            <a:gdLst>
+              <a:gd name="connsiteX0" fmla="*/ 0 w 1827638"/>
+              <a:gd name="connsiteY0" fmla="*/ 987379 h 1376989"/>
+              <a:gd name="connsiteX1" fmla="*/ 987379 w 1827638"/>
+              <a:gd name="connsiteY1" fmla="*/ 0 h 1376989"/>
+              <a:gd name="connsiteX2" fmla="*/ 1827638 w 1827638"/>
+              <a:gd name="connsiteY2" fmla="*/ 840260 h 1376989"/>
+              <a:gd name="connsiteX3" fmla="*/ 1827638 w 1827638"/>
+              <a:gd name="connsiteY3" fmla="*/ 1376989 h 1376989"/>
+              <a:gd name="connsiteX4" fmla="*/ 0 w 1827638"/>
+              <a:gd name="connsiteY4" fmla="*/ 1376989 h 1376989"/>
+            </a:gdLst>
+            <a:ahLst/>
+            <a:cxnLst>
+              <a:cxn ang="0">
+                <a:pos x="connsiteX0" y="connsiteY0"/>
+              </a:cxn>
+              <a:cxn ang="0">
+                <a:pos x="connsiteX1" y="connsiteY1"/>
+              </a:cxn>
+              <a:cxn ang="0">
+                <a:pos x="connsiteX2" y="connsiteY2"/>
+              </a:cxn>
+              <a:cxn ang="0">
+                <a:pos x="connsiteX3" y="connsiteY3"/>
+              </a:cxn>
+              <a:cxn ang="0">
+                <a:pos x="connsiteX4" y="connsiteY4"/>
+              </a:cxn>
+            </a:cxnLst>
+            <a:rect l="l" t="t" r="r" b="b"/>
+            <a:pathLst>
+              <a:path w="1827638" h="1376989">
+                <a:moveTo>
+                  <a:pt x="0" y="987379"/>
+                </a:moveTo>
+                <a:lnTo>
+                  <a:pt x="987379" y="0"/>
+                </a:lnTo>
+                <a:lnTo>
+                  <a:pt x="1827638" y="840260"/>
+                </a:lnTo>
+                <a:lnTo>
+                  <a:pt x="1827638" y="1376989"/>
+                </a:lnTo>
+                <a:lnTo>
+                  <a:pt x="0" y="1376989"/>
+                </a:lnTo>
+                <a:close/>
+              </a:path>
+            </a:pathLst>
+          </a:custGeom>
+          <a:solidFill>
+            <a:schemeClr val="accent1">
+              <a:alpha val="30000"/>
+            </a:schemeClr>
+          </a:solidFill>
+          <a:ln>
+            <a:noFill/>
+          </a:ln>
+        </p:spPr>
+        <p:style>
+          <a:lnRef idx="2">
+            <a:schemeClr val="accent1">
+              <a:shade val="50000"/>
+            </a:schemeClr>
+          </a:lnRef>
+          <a:fillRef idx="1">
+            <a:schemeClr val="accent1"/>
+          </a:fillRef>
+          <a:effectRef idx="0">
+            <a:schemeClr val="accent1"/>
+          </a:effectRef>
+          <a:fontRef idx="minor">
+            <a:schemeClr val="lt1"/>
+          </a:fontRef>
+        </p:style>
+        <p:txBody>
+          <a:bodyPr rtlCol="0" anchor="ctr"/>
+          <a:lstStyle/>
+          <a:p>
+            <a:pPr algn="ctr"/>
+            <a:endParaRPr lang="en-US" dirty="0"/>
+          </a:p>
+        </p:txBody>
+      </p:sp>
+      <p:sp>
+        <p:nvSpPr>
+          <p:cNvPr id="16" name="Rectangle 15">
+            <a:extLst>
+              <a:ext uri="{FF2B5EF4-FFF2-40B4-BE49-F238E27FC236}">
+                <a16:creationId xmlns:a16="http://schemas.microsoft.com/office/drawing/2014/main" id="{29FDB030-9B49-4CED-8CCD-4D99382388AC}"/>
+              </a:ext>
+              <a:ext uri="{C183D7F6-B498-43B3-948B-1728B52AA6E4}">
+                <adec:decorative xmlns:adec="http://schemas.microsoft.com/office/drawing/2017/decorative" val="1"/>
+              </a:ext>
+            </a:extLst>
+          </p:cNvPr>
+          <p:cNvSpPr>
+            <a:spLocks noGrp="1" noRot="1" noChangeAspect="1" noMove="1" noResize="1" noEditPoints="1" noAdjustHandles="1" noChangeArrowheads="1" noChangeShapeType="1" noTextEdit="1"/>
+          </p:cNvSpPr>
+          <p:nvPr>
+            <p:extLst>
+              <p:ext uri="{386F3935-93C4-4BCD-93E2-E3B085C9AB24}">
+                <p16:designElem xmlns:p16="http://schemas.microsoft.com/office/powerpoint/2015/main" val="1"/>
+              </p:ext>
+            </p:extLst>
+          </p:nvPr>
+        </p:nvSpPr>
+        <p:spPr>
+          <a:xfrm rot="18900000" flipH="1">
+            <a:off x="891641" y="422146"/>
+            <a:ext cx="645368" cy="645368"/>
+          </a:xfrm>
+          <a:prstGeom prst="rect">
+            <a:avLst/>
+          </a:prstGeom>
+          <a:solidFill>
+            <a:schemeClr val="accent1">
+              <a:alpha val="30000"/>
+            </a:schemeClr>
+          </a:solidFill>
+          <a:ln>
+            <a:noFill/>
+          </a:ln>
+        </p:spPr>
+        <p:style>
+          <a:lnRef idx="2">
+            <a:schemeClr val="accent1">
+              <a:shade val="50000"/>
+            </a:schemeClr>
+          </a:lnRef>
+          <a:fillRef idx="1">
+            <a:schemeClr val="accent1"/>
+          </a:fillRef>
+          <a:effectRef idx="0">
+            <a:schemeClr val="accent1"/>
+          </a:effectRef>
+          <a:fontRef idx="minor">
+            <a:schemeClr val="lt1"/>
+          </a:fontRef>
+        </p:style>
+        <p:txBody>
+          <a:bodyPr rtlCol="0" anchor="ctr"/>
+          <a:lstStyle/>
+          <a:p>
+            <a:pPr algn="ctr"/>
+            <a:endParaRPr lang="en-US"/>
+          </a:p>
+        </p:txBody>
+      </p:sp>
+      <p:sp>
+        <p:nvSpPr>
+          <p:cNvPr id="18" name="Rectangle 17">
+            <a:extLst>
+              <a:ext uri="{FF2B5EF4-FFF2-40B4-BE49-F238E27FC236}">
+                <a16:creationId xmlns:a16="http://schemas.microsoft.com/office/drawing/2014/main" id="{3783CA14-24A1-485C-8B30-D6A5D87987AD}"/>
+              </a:ext>
+              <a:ext uri="{C183D7F6-B498-43B3-948B-1728B52AA6E4}">
+                <adec:decorative xmlns:adec="http://schemas.microsoft.com/office/drawing/2017/decorative" val="1"/>
+              </a:ext>
+            </a:extLst>
+          </p:cNvPr>
+          <p:cNvSpPr>
+            <a:spLocks noGrp="1" noRot="1" noChangeAspect="1" noMove="1" noResize="1" noEditPoints="1" noAdjustHandles="1" noChangeArrowheads="1" noChangeShapeType="1" noTextEdit="1"/>
+          </p:cNvSpPr>
+          <p:nvPr>
+            <p:extLst>
+              <p:ext uri="{386F3935-93C4-4BCD-93E2-E3B085C9AB24}">
+                <p16:designElem xmlns:p16="http://schemas.microsoft.com/office/powerpoint/2015/main" val="1"/>
+              </p:ext>
+            </p:extLst>
+          </p:nvPr>
+        </p:nvSpPr>
+        <p:spPr>
+          <a:xfrm rot="18900000" flipH="1">
+            <a:off x="10043482" y="655140"/>
+            <a:ext cx="687472" cy="687472"/>
+          </a:xfrm>
+          <a:prstGeom prst="rect">
+            <a:avLst/>
+          </a:prstGeom>
+          <a:solidFill>
+            <a:schemeClr val="accent4">
+              <a:alpha val="30000"/>
+            </a:schemeClr>
+          </a:solidFill>
+          <a:ln>
+            <a:noFill/>
+          </a:ln>
+        </p:spPr>
+        <p:style>
+          <a:lnRef idx="2">
+            <a:schemeClr val="accent1">
+              <a:shade val="50000"/>
+            </a:schemeClr>
+          </a:lnRef>
+          <a:fillRef idx="1">
+            <a:schemeClr val="accent1"/>
+          </a:fillRef>
+          <a:effectRef idx="0">
+            <a:schemeClr val="accent1"/>
+          </a:effectRef>
+          <a:fontRef idx="minor">
+            <a:schemeClr val="lt1"/>
+          </a:fontRef>
+        </p:style>
+        <p:txBody>
+          <a:bodyPr rtlCol="0" anchor="ctr"/>
+          <a:lstStyle/>
+          <a:p>
+            <a:pPr algn="ctr"/>
+            <a:endParaRPr lang="en-US"/>
+          </a:p>
+        </p:txBody>
+      </p:sp>
+      <p:sp>
+        <p:nvSpPr>
+          <p:cNvPr id="20" name="Freeform: Shape 19">
+            <a:extLst>
+              <a:ext uri="{FF2B5EF4-FFF2-40B4-BE49-F238E27FC236}">
+                <a16:creationId xmlns:a16="http://schemas.microsoft.com/office/drawing/2014/main" id="{9A97C86A-04D6-40F7-AE84-31AB43E6A846}"/>
+              </a:ext>
+              <a:ext uri="{C183D7F6-B498-43B3-948B-1728B52AA6E4}">
+                <adec:decorative xmlns:adec="http://schemas.microsoft.com/office/drawing/2017/decorative" val="1"/>
+              </a:ext>
+            </a:extLst>
+          </p:cNvPr>
+          <p:cNvSpPr>
+            <a:spLocks noGrp="1" noRot="1" noChangeAspect="1" noMove="1" noResize="1" noEditPoints="1" noAdjustHandles="1" noChangeArrowheads="1" noChangeShapeType="1" noTextEdit="1"/>
+          </p:cNvSpPr>
+          <p:nvPr>
+            <p:extLst>
+              <p:ext uri="{386F3935-93C4-4BCD-93E2-E3B085C9AB24}">
+                <p16:designElem xmlns:p16="http://schemas.microsoft.com/office/powerpoint/2015/main" val="1"/>
+              </p:ext>
+            </p:extLst>
+          </p:nvPr>
+        </p:nvSpPr>
+        <p:spPr>
+          <a:xfrm rot="10800000" flipH="1">
+            <a:off x="9356643" y="0"/>
+            <a:ext cx="2835357" cy="1480837"/>
+          </a:xfrm>
+          <a:custGeom>
+            <a:avLst/>
+            <a:gdLst>
+              <a:gd name="connsiteX0" fmla="*/ 2835357 w 2835357"/>
+              <a:gd name="connsiteY0" fmla="*/ 1480837 h 1480837"/>
+              <a:gd name="connsiteX1" fmla="*/ 0 w 2835357"/>
+              <a:gd name="connsiteY1" fmla="*/ 1480837 h 1480837"/>
+              <a:gd name="connsiteX2" fmla="*/ 1552727 w 2835357"/>
+              <a:gd name="connsiteY2" fmla="*/ 0 h 1480837"/>
+              <a:gd name="connsiteX3" fmla="*/ 2835357 w 2835357"/>
+              <a:gd name="connsiteY3" fmla="*/ 1223245 h 1480837"/>
+            </a:gdLst>
+            <a:ahLst/>
+            <a:cxnLst>
+              <a:cxn ang="0">
+                <a:pos x="connsiteX0" y="connsiteY0"/>
+              </a:cxn>
+              <a:cxn ang="0">
+                <a:pos x="connsiteX1" y="connsiteY1"/>
+              </a:cxn>
+              <a:cxn ang="0">
+                <a:pos x="connsiteX2" y="connsiteY2"/>
+              </a:cxn>
+              <a:cxn ang="0">
+                <a:pos x="connsiteX3" y="connsiteY3"/>
+              </a:cxn>
+            </a:cxnLst>
+            <a:rect l="l" t="t" r="r" b="b"/>
+            <a:pathLst>
+              <a:path w="2835357" h="1480837">
+                <a:moveTo>
+                  <a:pt x="2835357" y="1480837"/>
+                </a:moveTo>
+                <a:lnTo>
+                  <a:pt x="0" y="1480837"/>
+                </a:lnTo>
+                <a:lnTo>
+                  <a:pt x="1552727" y="0"/>
+                </a:lnTo>
+                <a:lnTo>
+                  <a:pt x="2835357" y="1223245"/>
+                </a:lnTo>
+                <a:close/>
+              </a:path>
+            </a:pathLst>
+          </a:custGeom>
+          <a:solidFill>
+            <a:schemeClr val="accent4">
+              <a:alpha val="30000"/>
+            </a:schemeClr>
+          </a:solidFill>
+          <a:ln>
+            <a:noFill/>
+          </a:ln>
+        </p:spPr>
+        <p:style>
+          <a:lnRef idx="2">
+            <a:schemeClr val="accent1">
+              <a:shade val="50000"/>
+            </a:schemeClr>
+          </a:lnRef>
+          <a:fillRef idx="1">
+            <a:schemeClr val="accent1"/>
+          </a:fillRef>
+          <a:effectRef idx="0">
+            <a:schemeClr val="accent1"/>
+          </a:effectRef>
+          <a:fontRef idx="minor">
+            <a:schemeClr val="lt1"/>
+          </a:fontRef>
+        </p:style>
+        <p:txBody>
+          <a:bodyPr wrap="square" rtlCol="0" anchor="ctr">
+            <a:noAutofit/>
+          </a:bodyPr>
+          <a:lstStyle/>
+          <a:p>
+            <a:pPr algn="ctr"/>
+            <a:endParaRPr lang="en-US" dirty="0"/>
+          </a:p>
+        </p:txBody>
+      </p:sp>
+      <p:sp>
+        <p:nvSpPr>
+          <p:cNvPr id="22" name="Isosceles Triangle 21">
+            <a:extLst>
+              <a:ext uri="{FF2B5EF4-FFF2-40B4-BE49-F238E27FC236}">
+                <a16:creationId xmlns:a16="http://schemas.microsoft.com/office/drawing/2014/main" id="{FF9F2414-84E8-453E-B1F3-389FDE8192D9}"/>
+              </a:ext>
+              <a:ext uri="{C183D7F6-B498-43B3-948B-1728B52AA6E4}">
+                <adec:decorative xmlns:adec="http://schemas.microsoft.com/office/drawing/2017/decorative" val="1"/>
+              </a:ext>
+            </a:extLst>
+          </p:cNvPr>
+          <p:cNvSpPr>
+            <a:spLocks noGrp="1" noRot="1" noChangeAspect="1" noMove="1" noResize="1" noEditPoints="1" noAdjustHandles="1" noChangeArrowheads="1" noChangeShapeType="1" noTextEdit="1"/>
+          </p:cNvSpPr>
+          <p:nvPr>
+            <p:extLst>
+              <p:ext uri="{386F3935-93C4-4BCD-93E2-E3B085C9AB24}">
+                <p16:designElem xmlns:p16="http://schemas.microsoft.com/office/powerpoint/2015/main" val="1"/>
+              </p:ext>
+            </p:extLst>
+          </p:nvPr>
+        </p:nvSpPr>
+        <p:spPr>
+          <a:xfrm flipH="1">
+            <a:off x="7976344" y="6115501"/>
+            <a:ext cx="1494513" cy="742499"/>
+          </a:xfrm>
+          <a:prstGeom prst="triangle">
+            <a:avLst/>
+          </a:prstGeom>
+          <a:solidFill>
+            <a:schemeClr val="accent1">
+              <a:alpha val="30000"/>
+            </a:schemeClr>
+          </a:solidFill>
+          <a:ln>
+            <a:noFill/>
+          </a:ln>
+        </p:spPr>
+        <p:style>
+          <a:lnRef idx="2">
+            <a:schemeClr val="accent1">
+              <a:shade val="50000"/>
+            </a:schemeClr>
+          </a:lnRef>
+          <a:fillRef idx="1">
+            <a:schemeClr val="accent1"/>
+          </a:fillRef>
+          <a:effectRef idx="0">
+            <a:schemeClr val="accent1"/>
+          </a:effectRef>
+          <a:fontRef idx="minor">
+            <a:schemeClr val="lt1"/>
+          </a:fontRef>
+        </p:style>
+        <p:txBody>
+          <a:bodyPr rtlCol="0" anchor="ctr"/>
+          <a:lstStyle/>
+          <a:p>
+            <a:pPr algn="ctr"/>
+            <a:endParaRPr lang="en-US"/>
+          </a:p>
+        </p:txBody>
+      </p:sp>
+      <p:pic>
+        <p:nvPicPr>
+          <p:cNvPr id="7" name="Picture 6">
+            <a:extLst>
+              <a:ext uri="{FF2B5EF4-FFF2-40B4-BE49-F238E27FC236}">
+                <a16:creationId xmlns:a16="http://schemas.microsoft.com/office/drawing/2014/main" id="{8EAE23ED-CABE-246E-6DF1-507668B4ABC3}"/>
+              </a:ext>
+            </a:extLst>
+          </p:cNvPr>
+          <p:cNvPicPr>
+            <a:picLocks noChangeAspect="1"/>
+          </p:cNvPicPr>
+          <p:nvPr/>
+        </p:nvPicPr>
+        <p:blipFill>
+          <a:blip r:embed="rId2"/>
+          <a:stretch>
+            <a:fillRect/>
+          </a:stretch>
+        </p:blipFill>
+        <p:spPr>
+          <a:xfrm>
+            <a:off x="1435100" y="80690"/>
+            <a:ext cx="8915400" cy="6133843"/>
+          </a:xfrm>
+          <a:prstGeom prst="rect">
+            <a:avLst/>
+          </a:prstGeom>
+          <a:ln>
+            <a:noFill/>
+          </a:ln>
+        </p:spPr>
+      </p:pic>
+      <p:sp>
+        <p:nvSpPr>
+          <p:cNvPr id="24" name="Isosceles Triangle 23">
+            <a:extLst>
+              <a:ext uri="{FF2B5EF4-FFF2-40B4-BE49-F238E27FC236}">
+                <a16:creationId xmlns:a16="http://schemas.microsoft.com/office/drawing/2014/main" id="{3ECA69A1-7536-43AC-85EF-C7106179F5ED}"/>
+              </a:ext>
+              <a:ext uri="{C183D7F6-B498-43B3-948B-1728B52AA6E4}">
+                <adec:decorative xmlns:adec="http://schemas.microsoft.com/office/drawing/2017/decorative" val="1"/>
+              </a:ext>
+            </a:extLst>
+          </p:cNvPr>
+          <p:cNvSpPr>
+            <a:spLocks noGrp="1" noRot="1" noChangeAspect="1" noMove="1" noResize="1" noEditPoints="1" noAdjustHandles="1" noChangeArrowheads="1" noChangeShapeType="1" noTextEdit="1"/>
+          </p:cNvSpPr>
+          <p:nvPr>
+            <p:extLst>
+              <p:ext uri="{386F3935-93C4-4BCD-93E2-E3B085C9AB24}">
+                <p16:designElem xmlns:p16="http://schemas.microsoft.com/office/powerpoint/2015/main" val="1"/>
+              </p:ext>
+            </p:extLst>
+          </p:nvPr>
+        </p:nvSpPr>
+        <p:spPr>
+          <a:xfrm flipH="1">
+            <a:off x="7604080" y="6453143"/>
+            <a:ext cx="814903" cy="404857"/>
+          </a:xfrm>
+          <a:prstGeom prst="triangle">
+            <a:avLst/>
+          </a:prstGeom>
+          <a:solidFill>
+            <a:schemeClr val="accent1">
+              <a:alpha val="30000"/>
+            </a:schemeClr>
+          </a:solidFill>
+          <a:ln>
+            <a:noFill/>
+          </a:ln>
+        </p:spPr>
+        <p:style>
+          <a:lnRef idx="2">
+            <a:schemeClr val="accent1">
+              <a:shade val="50000"/>
+            </a:schemeClr>
+          </a:lnRef>
+          <a:fillRef idx="1">
+            <a:schemeClr val="accent1"/>
+          </a:fillRef>
+          <a:effectRef idx="0">
+            <a:schemeClr val="accent1"/>
+          </a:effectRef>
+          <a:fontRef idx="minor">
+            <a:schemeClr val="lt1"/>
+          </a:fontRef>
+        </p:style>
+        <p:txBody>
+          <a:bodyPr rtlCol="0" anchor="ctr"/>
+          <a:lstStyle/>
+          <a:p>
+            <a:pPr algn="ctr"/>
+            <a:endParaRPr lang="en-US"/>
+          </a:p>
+        </p:txBody>
+      </p:sp>
+    </p:spTree>
+    <p:extLst>
+      <p:ext uri="{BB962C8B-B14F-4D97-AF65-F5344CB8AC3E}">
+        <p14:creationId xmlns:p14="http://schemas.microsoft.com/office/powerpoint/2010/main" val="2016670573"/>
+      </p:ext>
+    </p:extLst>
+  </p:cSld>
+  <p:clrMapOvr>
+    <a:overrideClrMapping bg1="lt1" tx1="dk1" bg2="lt2" tx2="dk2" accent1="accent1" accent2="accent2" accent3="accent3" accent4="accent4" accent5="accent5" accent6="accent6" hlink="hlink" folHlink="folHlink"/>
+  </p:clrMapOvr>
+</p:sld>
+</file>
+
+<file path=ppt/slides/slide11.xml><?xml version="1.0" encoding="utf-8"?>
+<p:sld xmlns:a="http://schemas.openxmlformats.org/drawingml/2006/main" xmlns:r="http://schemas.openxmlformats.org/officeDocument/2006/relationships" xmlns:p="http://schemas.openxmlformats.org/presentationml/2006/main">
+  <p:cSld>
+    <p:bg>
+      <p:bgPr>
+        <a:solidFill>
+          <a:schemeClr val="bg1"/>
+        </a:solidFill>
+        <a:effectLst/>
+      </p:bgPr>
+    </p:bg>
+    <p:spTree>
+      <p:nvGrpSpPr>
+        <p:cNvPr id="1" name=""/>
+        <p:cNvGrpSpPr/>
+        <p:nvPr/>
+      </p:nvGrpSpPr>
+      <p:grpSpPr>
+        <a:xfrm>
+          <a:off x="0" y="0"/>
+          <a:ext cx="0" cy="0"/>
+          <a:chOff x="0" y="0"/>
+          <a:chExt cx="0" cy="0"/>
+        </a:xfrm>
+      </p:grpSpPr>
+      <p:sp>
+        <p:nvSpPr>
+          <p:cNvPr id="8" name="Rectangle 7">
+            <a:extLst>
+              <a:ext uri="{FF2B5EF4-FFF2-40B4-BE49-F238E27FC236}">
+                <a16:creationId xmlns:a16="http://schemas.microsoft.com/office/drawing/2014/main" id="{F3060C83-F051-4F0E-ABAD-AA0DFC48B218}"/>
+              </a:ext>
+              <a:ext uri="{C183D7F6-B498-43B3-948B-1728B52AA6E4}">
+                <adec:decorative xmlns:adec="http://schemas.microsoft.com/office/drawing/2017/decorative" val="1"/>
+              </a:ext>
+            </a:extLst>
+          </p:cNvPr>
+          <p:cNvSpPr>
+            <a:spLocks noGrp="1" noRot="1" noChangeAspect="1" noMove="1" noResize="1" noEditPoints="1" noAdjustHandles="1" noChangeArrowheads="1" noChangeShapeType="1" noTextEdit="1"/>
+          </p:cNvSpPr>
+          <p:nvPr>
+            <p:extLst>
+              <p:ext uri="{386F3935-93C4-4BCD-93E2-E3B085C9AB24}">
+                <p16:designElem xmlns:p16="http://schemas.microsoft.com/office/powerpoint/2015/main" val="1"/>
+              </p:ext>
+            </p:extLst>
+          </p:nvPr>
+        </p:nvSpPr>
+        <p:spPr>
+          <a:xfrm>
+            <a:off x="0" y="0"/>
+            <a:ext cx="12192000" cy="6858000"/>
+          </a:xfrm>
+          <a:prstGeom prst="rect">
+            <a:avLst/>
+          </a:prstGeom>
+          <a:solidFill>
+            <a:schemeClr val="bg1"/>
+          </a:solidFill>
+          <a:ln>
+            <a:noFill/>
+          </a:ln>
+        </p:spPr>
+        <p:style>
+          <a:lnRef idx="2">
+            <a:schemeClr val="accent1">
+              <a:shade val="50000"/>
+            </a:schemeClr>
+          </a:lnRef>
+          <a:fillRef idx="1">
+            <a:schemeClr val="accent1"/>
+          </a:fillRef>
+          <a:effectRef idx="0">
+            <a:schemeClr val="accent1"/>
+          </a:effectRef>
+          <a:fontRef idx="minor">
+            <a:schemeClr val="lt1"/>
+          </a:fontRef>
+        </p:style>
+        <p:txBody>
+          <a:bodyPr rtlCol="0" anchor="ctr"/>
+          <a:lstStyle/>
+          <a:p>
+            <a:pPr algn="ctr"/>
+            <a:endParaRPr lang="en-US" dirty="0"/>
+          </a:p>
+        </p:txBody>
+      </p:sp>
+      <p:sp>
+        <p:nvSpPr>
+          <p:cNvPr id="10" name="Freeform: Shape 9">
+            <a:extLst>
+              <a:ext uri="{FF2B5EF4-FFF2-40B4-BE49-F238E27FC236}">
+                <a16:creationId xmlns:a16="http://schemas.microsoft.com/office/drawing/2014/main" id="{83C98ABE-055B-441F-B07E-44F97F083C39}"/>
+              </a:ext>
+              <a:ext uri="{C183D7F6-B498-43B3-948B-1728B52AA6E4}">
+                <adec:decorative xmlns:adec="http://schemas.microsoft.com/office/drawing/2017/decorative" val="1"/>
+              </a:ext>
+            </a:extLst>
+          </p:cNvPr>
+          <p:cNvSpPr>
+            <a:spLocks noGrp="1" noRot="1" noChangeAspect="1" noMove="1" noResize="1" noEditPoints="1" noAdjustHandles="1" noChangeArrowheads="1" noChangeShapeType="1" noTextEdit="1"/>
+          </p:cNvSpPr>
+          <p:nvPr>
+            <p:extLst>
+              <p:ext uri="{386F3935-93C4-4BCD-93E2-E3B085C9AB24}">
+                <p16:designElem xmlns:p16="http://schemas.microsoft.com/office/powerpoint/2015/main" val="1"/>
+              </p:ext>
+            </p:extLst>
+          </p:nvPr>
+        </p:nvSpPr>
+        <p:spPr>
+          <a:xfrm rot="18900000" flipH="1">
+            <a:off x="-376156" y="-253670"/>
+            <a:ext cx="1827638" cy="1376989"/>
+          </a:xfrm>
+          <a:custGeom>
+            <a:avLst/>
+            <a:gdLst>
+              <a:gd name="connsiteX0" fmla="*/ 0 w 1827638"/>
+              <a:gd name="connsiteY0" fmla="*/ 987379 h 1376989"/>
+              <a:gd name="connsiteX1" fmla="*/ 987379 w 1827638"/>
+              <a:gd name="connsiteY1" fmla="*/ 0 h 1376989"/>
+              <a:gd name="connsiteX2" fmla="*/ 1827638 w 1827638"/>
+              <a:gd name="connsiteY2" fmla="*/ 840260 h 1376989"/>
+              <a:gd name="connsiteX3" fmla="*/ 1827638 w 1827638"/>
+              <a:gd name="connsiteY3" fmla="*/ 1376989 h 1376989"/>
+              <a:gd name="connsiteX4" fmla="*/ 0 w 1827638"/>
+              <a:gd name="connsiteY4" fmla="*/ 1376989 h 1376989"/>
+            </a:gdLst>
+            <a:ahLst/>
+            <a:cxnLst>
+              <a:cxn ang="0">
+                <a:pos x="connsiteX0" y="connsiteY0"/>
+              </a:cxn>
+              <a:cxn ang="0">
+                <a:pos x="connsiteX1" y="connsiteY1"/>
+              </a:cxn>
+              <a:cxn ang="0">
+                <a:pos x="connsiteX2" y="connsiteY2"/>
+              </a:cxn>
+              <a:cxn ang="0">
+                <a:pos x="connsiteX3" y="connsiteY3"/>
+              </a:cxn>
+              <a:cxn ang="0">
+                <a:pos x="connsiteX4" y="connsiteY4"/>
+              </a:cxn>
+            </a:cxnLst>
+            <a:rect l="l" t="t" r="r" b="b"/>
+            <a:pathLst>
+              <a:path w="1827638" h="1376989">
+                <a:moveTo>
+                  <a:pt x="0" y="987379"/>
+                </a:moveTo>
+                <a:lnTo>
+                  <a:pt x="987379" y="0"/>
+                </a:lnTo>
+                <a:lnTo>
+                  <a:pt x="1827638" y="840260"/>
+                </a:lnTo>
+                <a:lnTo>
+                  <a:pt x="1827638" y="1376989"/>
+                </a:lnTo>
+                <a:lnTo>
+                  <a:pt x="0" y="1376989"/>
+                </a:lnTo>
+                <a:close/>
+              </a:path>
+            </a:pathLst>
+          </a:custGeom>
+          <a:solidFill>
+            <a:schemeClr val="accent1">
+              <a:alpha val="30000"/>
+            </a:schemeClr>
+          </a:solidFill>
+          <a:ln>
+            <a:noFill/>
+          </a:ln>
+        </p:spPr>
+        <p:style>
+          <a:lnRef idx="2">
+            <a:schemeClr val="accent1">
+              <a:shade val="50000"/>
+            </a:schemeClr>
+          </a:lnRef>
+          <a:fillRef idx="1">
+            <a:schemeClr val="accent1"/>
+          </a:fillRef>
+          <a:effectRef idx="0">
+            <a:schemeClr val="accent1"/>
+          </a:effectRef>
+          <a:fontRef idx="minor">
+            <a:schemeClr val="lt1"/>
+          </a:fontRef>
+        </p:style>
+        <p:txBody>
+          <a:bodyPr rtlCol="0" anchor="ctr"/>
+          <a:lstStyle/>
+          <a:p>
+            <a:pPr algn="ctr"/>
+            <a:endParaRPr lang="en-US" dirty="0"/>
+          </a:p>
+        </p:txBody>
+      </p:sp>
+      <p:sp>
+        <p:nvSpPr>
+          <p:cNvPr id="12" name="Rectangle 11">
+            <a:extLst>
+              <a:ext uri="{FF2B5EF4-FFF2-40B4-BE49-F238E27FC236}">
+                <a16:creationId xmlns:a16="http://schemas.microsoft.com/office/drawing/2014/main" id="{29FDB030-9B49-4CED-8CCD-4D99382388AC}"/>
+              </a:ext>
+              <a:ext uri="{C183D7F6-B498-43B3-948B-1728B52AA6E4}">
+                <adec:decorative xmlns:adec="http://schemas.microsoft.com/office/drawing/2017/decorative" val="1"/>
+              </a:ext>
+            </a:extLst>
+          </p:cNvPr>
+          <p:cNvSpPr>
+            <a:spLocks noGrp="1" noRot="1" noChangeAspect="1" noMove="1" noResize="1" noEditPoints="1" noAdjustHandles="1" noChangeArrowheads="1" noChangeShapeType="1" noTextEdit="1"/>
+          </p:cNvSpPr>
+          <p:nvPr>
+            <p:extLst>
+              <p:ext uri="{386F3935-93C4-4BCD-93E2-E3B085C9AB24}">
+                <p16:designElem xmlns:p16="http://schemas.microsoft.com/office/powerpoint/2015/main" val="1"/>
+              </p:ext>
+            </p:extLst>
+          </p:nvPr>
+        </p:nvSpPr>
+        <p:spPr>
+          <a:xfrm rot="18900000" flipH="1">
+            <a:off x="891641" y="422146"/>
+            <a:ext cx="645368" cy="645368"/>
+          </a:xfrm>
+          <a:prstGeom prst="rect">
+            <a:avLst/>
+          </a:prstGeom>
+          <a:solidFill>
+            <a:schemeClr val="accent1">
+              <a:alpha val="30000"/>
+            </a:schemeClr>
+          </a:solidFill>
+          <a:ln>
+            <a:noFill/>
+          </a:ln>
+        </p:spPr>
+        <p:style>
+          <a:lnRef idx="2">
+            <a:schemeClr val="accent1">
+              <a:shade val="50000"/>
+            </a:schemeClr>
+          </a:lnRef>
+          <a:fillRef idx="1">
+            <a:schemeClr val="accent1"/>
+          </a:fillRef>
+          <a:effectRef idx="0">
+            <a:schemeClr val="accent1"/>
+          </a:effectRef>
+          <a:fontRef idx="minor">
+            <a:schemeClr val="lt1"/>
+          </a:fontRef>
+        </p:style>
+        <p:txBody>
+          <a:bodyPr rtlCol="0" anchor="ctr"/>
+          <a:lstStyle/>
+          <a:p>
+            <a:pPr algn="ctr"/>
+            <a:endParaRPr lang="en-US"/>
+          </a:p>
+        </p:txBody>
+      </p:sp>
+      <p:sp>
+        <p:nvSpPr>
+          <p:cNvPr id="14" name="Rectangle 13">
+            <a:extLst>
+              <a:ext uri="{FF2B5EF4-FFF2-40B4-BE49-F238E27FC236}">
+                <a16:creationId xmlns:a16="http://schemas.microsoft.com/office/drawing/2014/main" id="{3783CA14-24A1-485C-8B30-D6A5D87987AD}"/>
+              </a:ext>
+              <a:ext uri="{C183D7F6-B498-43B3-948B-1728B52AA6E4}">
+                <adec:decorative xmlns:adec="http://schemas.microsoft.com/office/drawing/2017/decorative" val="1"/>
+              </a:ext>
+            </a:extLst>
+          </p:cNvPr>
+          <p:cNvSpPr>
+            <a:spLocks noGrp="1" noRot="1" noChangeAspect="1" noMove="1" noResize="1" noEditPoints="1" noAdjustHandles="1" noChangeArrowheads="1" noChangeShapeType="1" noTextEdit="1"/>
+          </p:cNvSpPr>
+          <p:nvPr>
+            <p:extLst>
+              <p:ext uri="{386F3935-93C4-4BCD-93E2-E3B085C9AB24}">
+                <p16:designElem xmlns:p16="http://schemas.microsoft.com/office/powerpoint/2015/main" val="1"/>
+              </p:ext>
+            </p:extLst>
+          </p:nvPr>
+        </p:nvSpPr>
+        <p:spPr>
+          <a:xfrm rot="18900000" flipH="1">
+            <a:off x="10043482" y="655140"/>
+            <a:ext cx="687472" cy="687472"/>
+          </a:xfrm>
+          <a:prstGeom prst="rect">
+            <a:avLst/>
+          </a:prstGeom>
+          <a:solidFill>
+            <a:schemeClr val="accent4">
+              <a:alpha val="30000"/>
+            </a:schemeClr>
+          </a:solidFill>
+          <a:ln>
+            <a:noFill/>
+          </a:ln>
+        </p:spPr>
+        <p:style>
+          <a:lnRef idx="2">
+            <a:schemeClr val="accent1">
+              <a:shade val="50000"/>
+            </a:schemeClr>
+          </a:lnRef>
+          <a:fillRef idx="1">
+            <a:schemeClr val="accent1"/>
+          </a:fillRef>
+          <a:effectRef idx="0">
+            <a:schemeClr val="accent1"/>
+          </a:effectRef>
+          <a:fontRef idx="minor">
+            <a:schemeClr val="lt1"/>
+          </a:fontRef>
+        </p:style>
+        <p:txBody>
+          <a:bodyPr rtlCol="0" anchor="ctr"/>
+          <a:lstStyle/>
+          <a:p>
+            <a:pPr algn="ctr"/>
+            <a:endParaRPr lang="en-US"/>
+          </a:p>
+        </p:txBody>
+      </p:sp>
+      <p:sp>
+        <p:nvSpPr>
+          <p:cNvPr id="16" name="Freeform: Shape 15">
+            <a:extLst>
+              <a:ext uri="{FF2B5EF4-FFF2-40B4-BE49-F238E27FC236}">
+                <a16:creationId xmlns:a16="http://schemas.microsoft.com/office/drawing/2014/main" id="{9A97C86A-04D6-40F7-AE84-31AB43E6A846}"/>
+              </a:ext>
+              <a:ext uri="{C183D7F6-B498-43B3-948B-1728B52AA6E4}">
+                <adec:decorative xmlns:adec="http://schemas.microsoft.com/office/drawing/2017/decorative" val="1"/>
+              </a:ext>
+            </a:extLst>
+          </p:cNvPr>
+          <p:cNvSpPr>
+            <a:spLocks noGrp="1" noRot="1" noChangeAspect="1" noMove="1" noResize="1" noEditPoints="1" noAdjustHandles="1" noChangeArrowheads="1" noChangeShapeType="1" noTextEdit="1"/>
+          </p:cNvSpPr>
+          <p:nvPr>
+            <p:extLst>
+              <p:ext uri="{386F3935-93C4-4BCD-93E2-E3B085C9AB24}">
+                <p16:designElem xmlns:p16="http://schemas.microsoft.com/office/powerpoint/2015/main" val="1"/>
+              </p:ext>
+            </p:extLst>
+          </p:nvPr>
+        </p:nvSpPr>
+        <p:spPr>
+          <a:xfrm rot="10800000" flipH="1">
+            <a:off x="9356643" y="0"/>
+            <a:ext cx="2835357" cy="1480837"/>
+          </a:xfrm>
+          <a:custGeom>
+            <a:avLst/>
+            <a:gdLst>
+              <a:gd name="connsiteX0" fmla="*/ 2835357 w 2835357"/>
+              <a:gd name="connsiteY0" fmla="*/ 1480837 h 1480837"/>
+              <a:gd name="connsiteX1" fmla="*/ 0 w 2835357"/>
+              <a:gd name="connsiteY1" fmla="*/ 1480837 h 1480837"/>
+              <a:gd name="connsiteX2" fmla="*/ 1552727 w 2835357"/>
+              <a:gd name="connsiteY2" fmla="*/ 0 h 1480837"/>
+              <a:gd name="connsiteX3" fmla="*/ 2835357 w 2835357"/>
+              <a:gd name="connsiteY3" fmla="*/ 1223245 h 1480837"/>
+            </a:gdLst>
+            <a:ahLst/>
+            <a:cxnLst>
+              <a:cxn ang="0">
+                <a:pos x="connsiteX0" y="connsiteY0"/>
+              </a:cxn>
+              <a:cxn ang="0">
+                <a:pos x="connsiteX1" y="connsiteY1"/>
+              </a:cxn>
+              <a:cxn ang="0">
+                <a:pos x="connsiteX2" y="connsiteY2"/>
+              </a:cxn>
+              <a:cxn ang="0">
+                <a:pos x="connsiteX3" y="connsiteY3"/>
+              </a:cxn>
+            </a:cxnLst>
+            <a:rect l="l" t="t" r="r" b="b"/>
+            <a:pathLst>
+              <a:path w="2835357" h="1480837">
+                <a:moveTo>
+                  <a:pt x="2835357" y="1480837"/>
+                </a:moveTo>
+                <a:lnTo>
+                  <a:pt x="0" y="1480837"/>
+                </a:lnTo>
+                <a:lnTo>
+                  <a:pt x="1552727" y="0"/>
+                </a:lnTo>
+                <a:lnTo>
+                  <a:pt x="2835357" y="1223245"/>
+                </a:lnTo>
+                <a:close/>
+              </a:path>
+            </a:pathLst>
+          </a:custGeom>
+          <a:solidFill>
+            <a:schemeClr val="accent4">
+              <a:alpha val="30000"/>
+            </a:schemeClr>
+          </a:solidFill>
+          <a:ln>
+            <a:noFill/>
+          </a:ln>
+        </p:spPr>
+        <p:style>
+          <a:lnRef idx="2">
+            <a:schemeClr val="accent1">
+              <a:shade val="50000"/>
+            </a:schemeClr>
+          </a:lnRef>
+          <a:fillRef idx="1">
+            <a:schemeClr val="accent1"/>
+          </a:fillRef>
+          <a:effectRef idx="0">
+            <a:schemeClr val="accent1"/>
+          </a:effectRef>
+          <a:fontRef idx="minor">
+            <a:schemeClr val="lt1"/>
+          </a:fontRef>
+        </p:style>
+        <p:txBody>
+          <a:bodyPr wrap="square" rtlCol="0" anchor="ctr">
+            <a:noAutofit/>
+          </a:bodyPr>
+          <a:lstStyle/>
+          <a:p>
+            <a:pPr algn="ctr"/>
+            <a:endParaRPr lang="en-US" dirty="0"/>
+          </a:p>
+        </p:txBody>
+      </p:sp>
+      <p:sp>
+        <p:nvSpPr>
+          <p:cNvPr id="18" name="Isosceles Triangle 17">
+            <a:extLst>
+              <a:ext uri="{FF2B5EF4-FFF2-40B4-BE49-F238E27FC236}">
+                <a16:creationId xmlns:a16="http://schemas.microsoft.com/office/drawing/2014/main" id="{FF9F2414-84E8-453E-B1F3-389FDE8192D9}"/>
+              </a:ext>
+              <a:ext uri="{C183D7F6-B498-43B3-948B-1728B52AA6E4}">
+                <adec:decorative xmlns:adec="http://schemas.microsoft.com/office/drawing/2017/decorative" val="1"/>
+              </a:ext>
+            </a:extLst>
+          </p:cNvPr>
+          <p:cNvSpPr>
+            <a:spLocks noGrp="1" noRot="1" noChangeAspect="1" noMove="1" noResize="1" noEditPoints="1" noAdjustHandles="1" noChangeArrowheads="1" noChangeShapeType="1" noTextEdit="1"/>
+          </p:cNvSpPr>
+          <p:nvPr>
+            <p:extLst>
+              <p:ext uri="{386F3935-93C4-4BCD-93E2-E3B085C9AB24}">
+                <p16:designElem xmlns:p16="http://schemas.microsoft.com/office/powerpoint/2015/main" val="1"/>
+              </p:ext>
+            </p:extLst>
+          </p:nvPr>
+        </p:nvSpPr>
+        <p:spPr>
+          <a:xfrm flipH="1">
+            <a:off x="7976344" y="6115501"/>
+            <a:ext cx="1494513" cy="742499"/>
+          </a:xfrm>
+          <a:prstGeom prst="triangle">
+            <a:avLst/>
+          </a:prstGeom>
+          <a:solidFill>
+            <a:schemeClr val="accent1">
+              <a:alpha val="30000"/>
+            </a:schemeClr>
+          </a:solidFill>
+          <a:ln>
+            <a:noFill/>
+          </a:ln>
+        </p:spPr>
+        <p:style>
+          <a:lnRef idx="2">
+            <a:schemeClr val="accent1">
+              <a:shade val="50000"/>
+            </a:schemeClr>
+          </a:lnRef>
+          <a:fillRef idx="1">
+            <a:schemeClr val="accent1"/>
+          </a:fillRef>
+          <a:effectRef idx="0">
+            <a:schemeClr val="accent1"/>
+          </a:effectRef>
+          <a:fontRef idx="minor">
+            <a:schemeClr val="lt1"/>
+          </a:fontRef>
+        </p:style>
+        <p:txBody>
+          <a:bodyPr rtlCol="0" anchor="ctr"/>
+          <a:lstStyle/>
+          <a:p>
+            <a:pPr algn="ctr"/>
+            <a:endParaRPr lang="en-US"/>
+          </a:p>
+        </p:txBody>
+      </p:sp>
+      <p:pic>
+        <p:nvPicPr>
+          <p:cNvPr id="3" name="Picture 2">
+            <a:extLst>
+              <a:ext uri="{FF2B5EF4-FFF2-40B4-BE49-F238E27FC236}">
+                <a16:creationId xmlns:a16="http://schemas.microsoft.com/office/drawing/2014/main" id="{47AA1C68-2060-D2A5-5539-B93A60DE1B40}"/>
+              </a:ext>
+            </a:extLst>
+          </p:cNvPr>
+          <p:cNvPicPr>
+            <a:picLocks noChangeAspect="1"/>
+          </p:cNvPicPr>
+          <p:nvPr/>
+        </p:nvPicPr>
+        <p:blipFill>
+          <a:blip r:embed="rId2"/>
+          <a:stretch>
+            <a:fillRect/>
+          </a:stretch>
+        </p:blipFill>
+        <p:spPr>
+          <a:xfrm>
+            <a:off x="1277653" y="101407"/>
+            <a:ext cx="8623448" cy="6101089"/>
+          </a:xfrm>
+          <a:prstGeom prst="rect">
+            <a:avLst/>
+          </a:prstGeom>
+          <a:ln>
+            <a:noFill/>
+          </a:ln>
+        </p:spPr>
+      </p:pic>
+      <p:sp>
+        <p:nvSpPr>
+          <p:cNvPr id="20" name="Isosceles Triangle 19">
+            <a:extLst>
+              <a:ext uri="{FF2B5EF4-FFF2-40B4-BE49-F238E27FC236}">
+                <a16:creationId xmlns:a16="http://schemas.microsoft.com/office/drawing/2014/main" id="{3ECA69A1-7536-43AC-85EF-C7106179F5ED}"/>
+              </a:ext>
+              <a:ext uri="{C183D7F6-B498-43B3-948B-1728B52AA6E4}">
+                <adec:decorative xmlns:adec="http://schemas.microsoft.com/office/drawing/2017/decorative" val="1"/>
+              </a:ext>
+            </a:extLst>
+          </p:cNvPr>
+          <p:cNvSpPr>
+            <a:spLocks noGrp="1" noRot="1" noChangeAspect="1" noMove="1" noResize="1" noEditPoints="1" noAdjustHandles="1" noChangeArrowheads="1" noChangeShapeType="1" noTextEdit="1"/>
+          </p:cNvSpPr>
+          <p:nvPr>
+            <p:extLst>
+              <p:ext uri="{386F3935-93C4-4BCD-93E2-E3B085C9AB24}">
+                <p16:designElem xmlns:p16="http://schemas.microsoft.com/office/powerpoint/2015/main" val="1"/>
+              </p:ext>
+            </p:extLst>
+          </p:nvPr>
+        </p:nvSpPr>
+        <p:spPr>
+          <a:xfrm flipH="1">
+            <a:off x="7604080" y="6453143"/>
+            <a:ext cx="814903" cy="404857"/>
+          </a:xfrm>
+          <a:prstGeom prst="triangle">
+            <a:avLst/>
+          </a:prstGeom>
+          <a:solidFill>
+            <a:schemeClr val="accent1">
+              <a:alpha val="30000"/>
+            </a:schemeClr>
+          </a:solidFill>
+          <a:ln>
+            <a:noFill/>
+          </a:ln>
+        </p:spPr>
+        <p:style>
+          <a:lnRef idx="2">
+            <a:schemeClr val="accent1">
+              <a:shade val="50000"/>
+            </a:schemeClr>
+          </a:lnRef>
+          <a:fillRef idx="1">
+            <a:schemeClr val="accent1"/>
+          </a:fillRef>
+          <a:effectRef idx="0">
+            <a:schemeClr val="accent1"/>
+          </a:effectRef>
+          <a:fontRef idx="minor">
+            <a:schemeClr val="lt1"/>
+          </a:fontRef>
+        </p:style>
+        <p:txBody>
+          <a:bodyPr rtlCol="0" anchor="ctr"/>
+          <a:lstStyle/>
+          <a:p>
+            <a:pPr algn="ctr"/>
+            <a:endParaRPr lang="en-US"/>
+          </a:p>
+        </p:txBody>
+      </p:sp>
+    </p:spTree>
+    <p:extLst>
+      <p:ext uri="{BB962C8B-B14F-4D97-AF65-F5344CB8AC3E}">
+        <p14:creationId xmlns:p14="http://schemas.microsoft.com/office/powerpoint/2010/main" val="1940731749"/>
+      </p:ext>
+    </p:extLst>
+  </p:cSld>
+  <p:clrMapOvr>
+    <a:overrideClrMapping bg1="lt1" tx1="dk1" bg2="lt2" tx2="dk2" accent1="accent1" accent2="accent2" accent3="accent3" accent4="accent4" accent5="accent5" accent6="accent6" hlink="hlink" folHlink="folHlink"/>
+  </p:clrMapOvr>
+</p:sld>
+</file>
+
+<file path=ppt/slides/slide12.xml><?xml version="1.0" encoding="utf-8"?>
+<p:sld xmlns:a="http://schemas.openxmlformats.org/drawingml/2006/main" xmlns:r="http://schemas.openxmlformats.org/officeDocument/2006/relationships" xmlns:p="http://schemas.openxmlformats.org/presentationml/2006/main">
+  <p:cSld>
+    <p:bg>
+      <p:bgPr>
+        <a:solidFill>
+          <a:schemeClr val="bg1"/>
+        </a:solidFill>
+        <a:effectLst/>
+      </p:bgPr>
+    </p:bg>
+    <p:spTree>
+      <p:nvGrpSpPr>
+        <p:cNvPr id="1" name=""/>
+        <p:cNvGrpSpPr/>
+        <p:nvPr/>
+      </p:nvGrpSpPr>
+      <p:grpSpPr>
+        <a:xfrm>
+          <a:off x="0" y="0"/>
+          <a:ext cx="0" cy="0"/>
+          <a:chOff x="0" y="0"/>
+          <a:chExt cx="0" cy="0"/>
+        </a:xfrm>
+      </p:grpSpPr>
+      <p:sp>
+        <p:nvSpPr>
+          <p:cNvPr id="8" name="Rectangle 7">
+            <a:extLst>
+              <a:ext uri="{FF2B5EF4-FFF2-40B4-BE49-F238E27FC236}">
+                <a16:creationId xmlns:a16="http://schemas.microsoft.com/office/drawing/2014/main" id="{F3060C83-F051-4F0E-ABAD-AA0DFC48B218}"/>
+              </a:ext>
+              <a:ext uri="{C183D7F6-B498-43B3-948B-1728B52AA6E4}">
+                <adec:decorative xmlns:adec="http://schemas.microsoft.com/office/drawing/2017/decorative" val="1"/>
+              </a:ext>
+            </a:extLst>
+          </p:cNvPr>
+          <p:cNvSpPr>
+            <a:spLocks noGrp="1" noRot="1" noChangeAspect="1" noMove="1" noResize="1" noEditPoints="1" noAdjustHandles="1" noChangeArrowheads="1" noChangeShapeType="1" noTextEdit="1"/>
+          </p:cNvSpPr>
+          <p:nvPr>
+            <p:extLst>
+              <p:ext uri="{386F3935-93C4-4BCD-93E2-E3B085C9AB24}">
+                <p16:designElem xmlns:p16="http://schemas.microsoft.com/office/powerpoint/2015/main" val="1"/>
+              </p:ext>
+            </p:extLst>
+          </p:nvPr>
+        </p:nvSpPr>
+        <p:spPr>
+          <a:xfrm>
+            <a:off x="0" y="0"/>
+            <a:ext cx="12192000" cy="6858000"/>
+          </a:xfrm>
+          <a:prstGeom prst="rect">
+            <a:avLst/>
+          </a:prstGeom>
+          <a:solidFill>
+            <a:schemeClr val="bg1"/>
+          </a:solidFill>
+          <a:ln>
+            <a:noFill/>
+          </a:ln>
+        </p:spPr>
+        <p:style>
+          <a:lnRef idx="2">
+            <a:schemeClr val="accent1">
+              <a:shade val="50000"/>
+            </a:schemeClr>
+          </a:lnRef>
+          <a:fillRef idx="1">
+            <a:schemeClr val="accent1"/>
+          </a:fillRef>
+          <a:effectRef idx="0">
+            <a:schemeClr val="accent1"/>
+          </a:effectRef>
+          <a:fontRef idx="minor">
+            <a:schemeClr val="lt1"/>
+          </a:fontRef>
+        </p:style>
+        <p:txBody>
+          <a:bodyPr rtlCol="0" anchor="ctr"/>
+          <a:lstStyle/>
+          <a:p>
+            <a:pPr algn="ctr"/>
+            <a:endParaRPr lang="en-US" dirty="0"/>
+          </a:p>
+        </p:txBody>
+      </p:sp>
+      <p:sp>
+        <p:nvSpPr>
+          <p:cNvPr id="10" name="Freeform: Shape 9">
+            <a:extLst>
+              <a:ext uri="{FF2B5EF4-FFF2-40B4-BE49-F238E27FC236}">
+                <a16:creationId xmlns:a16="http://schemas.microsoft.com/office/drawing/2014/main" id="{83C98ABE-055B-441F-B07E-44F97F083C39}"/>
+              </a:ext>
+              <a:ext uri="{C183D7F6-B498-43B3-948B-1728B52AA6E4}">
+                <adec:decorative xmlns:adec="http://schemas.microsoft.com/office/drawing/2017/decorative" val="1"/>
+              </a:ext>
+            </a:extLst>
+          </p:cNvPr>
+          <p:cNvSpPr>
+            <a:spLocks noGrp="1" noRot="1" noChangeAspect="1" noMove="1" noResize="1" noEditPoints="1" noAdjustHandles="1" noChangeArrowheads="1" noChangeShapeType="1" noTextEdit="1"/>
+          </p:cNvSpPr>
+          <p:nvPr>
+            <p:extLst>
+              <p:ext uri="{386F3935-93C4-4BCD-93E2-E3B085C9AB24}">
+                <p16:designElem xmlns:p16="http://schemas.microsoft.com/office/powerpoint/2015/main" val="1"/>
+              </p:ext>
+            </p:extLst>
+          </p:nvPr>
+        </p:nvSpPr>
+        <p:spPr>
+          <a:xfrm rot="18900000" flipH="1">
+            <a:off x="-376156" y="-253670"/>
+            <a:ext cx="1827638" cy="1376989"/>
+          </a:xfrm>
+          <a:custGeom>
+            <a:avLst/>
+            <a:gdLst>
+              <a:gd name="connsiteX0" fmla="*/ 0 w 1827638"/>
+              <a:gd name="connsiteY0" fmla="*/ 987379 h 1376989"/>
+              <a:gd name="connsiteX1" fmla="*/ 987379 w 1827638"/>
+              <a:gd name="connsiteY1" fmla="*/ 0 h 1376989"/>
+              <a:gd name="connsiteX2" fmla="*/ 1827638 w 1827638"/>
+              <a:gd name="connsiteY2" fmla="*/ 840260 h 1376989"/>
+              <a:gd name="connsiteX3" fmla="*/ 1827638 w 1827638"/>
+              <a:gd name="connsiteY3" fmla="*/ 1376989 h 1376989"/>
+              <a:gd name="connsiteX4" fmla="*/ 0 w 1827638"/>
+              <a:gd name="connsiteY4" fmla="*/ 1376989 h 1376989"/>
+            </a:gdLst>
+            <a:ahLst/>
+            <a:cxnLst>
+              <a:cxn ang="0">
+                <a:pos x="connsiteX0" y="connsiteY0"/>
+              </a:cxn>
+              <a:cxn ang="0">
+                <a:pos x="connsiteX1" y="connsiteY1"/>
+              </a:cxn>
+              <a:cxn ang="0">
+                <a:pos x="connsiteX2" y="connsiteY2"/>
+              </a:cxn>
+              <a:cxn ang="0">
+                <a:pos x="connsiteX3" y="connsiteY3"/>
+              </a:cxn>
+              <a:cxn ang="0">
+                <a:pos x="connsiteX4" y="connsiteY4"/>
+              </a:cxn>
+            </a:cxnLst>
+            <a:rect l="l" t="t" r="r" b="b"/>
+            <a:pathLst>
+              <a:path w="1827638" h="1376989">
+                <a:moveTo>
+                  <a:pt x="0" y="987379"/>
+                </a:moveTo>
+                <a:lnTo>
+                  <a:pt x="987379" y="0"/>
+                </a:lnTo>
+                <a:lnTo>
+                  <a:pt x="1827638" y="840260"/>
+                </a:lnTo>
+                <a:lnTo>
+                  <a:pt x="1827638" y="1376989"/>
+                </a:lnTo>
+                <a:lnTo>
+                  <a:pt x="0" y="1376989"/>
+                </a:lnTo>
+                <a:close/>
+              </a:path>
+            </a:pathLst>
+          </a:custGeom>
+          <a:solidFill>
+            <a:schemeClr val="accent1">
+              <a:alpha val="30000"/>
+            </a:schemeClr>
+          </a:solidFill>
+          <a:ln>
+            <a:noFill/>
+          </a:ln>
+        </p:spPr>
+        <p:style>
+          <a:lnRef idx="2">
+            <a:schemeClr val="accent1">
+              <a:shade val="50000"/>
+            </a:schemeClr>
+          </a:lnRef>
+          <a:fillRef idx="1">
+            <a:schemeClr val="accent1"/>
+          </a:fillRef>
+          <a:effectRef idx="0">
+            <a:schemeClr val="accent1"/>
+          </a:effectRef>
+          <a:fontRef idx="minor">
+            <a:schemeClr val="lt1"/>
+          </a:fontRef>
+        </p:style>
+        <p:txBody>
+          <a:bodyPr rtlCol="0" anchor="ctr"/>
+          <a:lstStyle/>
+          <a:p>
+            <a:pPr algn="ctr"/>
+            <a:endParaRPr lang="en-US" dirty="0"/>
+          </a:p>
+        </p:txBody>
+      </p:sp>
+      <p:sp>
+        <p:nvSpPr>
+          <p:cNvPr id="12" name="Rectangle 11">
+            <a:extLst>
+              <a:ext uri="{FF2B5EF4-FFF2-40B4-BE49-F238E27FC236}">
+                <a16:creationId xmlns:a16="http://schemas.microsoft.com/office/drawing/2014/main" id="{29FDB030-9B49-4CED-8CCD-4D99382388AC}"/>
+              </a:ext>
+              <a:ext uri="{C183D7F6-B498-43B3-948B-1728B52AA6E4}">
+                <adec:decorative xmlns:adec="http://schemas.microsoft.com/office/drawing/2017/decorative" val="1"/>
+              </a:ext>
+            </a:extLst>
+          </p:cNvPr>
+          <p:cNvSpPr>
+            <a:spLocks noGrp="1" noRot="1" noChangeAspect="1" noMove="1" noResize="1" noEditPoints="1" noAdjustHandles="1" noChangeArrowheads="1" noChangeShapeType="1" noTextEdit="1"/>
+          </p:cNvSpPr>
+          <p:nvPr>
+            <p:extLst>
+              <p:ext uri="{386F3935-93C4-4BCD-93E2-E3B085C9AB24}">
+                <p16:designElem xmlns:p16="http://schemas.microsoft.com/office/powerpoint/2015/main" val="1"/>
+              </p:ext>
+            </p:extLst>
+          </p:nvPr>
+        </p:nvSpPr>
+        <p:spPr>
+          <a:xfrm rot="18900000" flipH="1">
+            <a:off x="891641" y="422146"/>
+            <a:ext cx="645368" cy="645368"/>
+          </a:xfrm>
+          <a:prstGeom prst="rect">
+            <a:avLst/>
+          </a:prstGeom>
+          <a:solidFill>
+            <a:schemeClr val="accent1">
+              <a:alpha val="30000"/>
+            </a:schemeClr>
+          </a:solidFill>
+          <a:ln>
+            <a:noFill/>
+          </a:ln>
+        </p:spPr>
+        <p:style>
+          <a:lnRef idx="2">
+            <a:schemeClr val="accent1">
+              <a:shade val="50000"/>
+            </a:schemeClr>
+          </a:lnRef>
+          <a:fillRef idx="1">
+            <a:schemeClr val="accent1"/>
+          </a:fillRef>
+          <a:effectRef idx="0">
+            <a:schemeClr val="accent1"/>
+          </a:effectRef>
+          <a:fontRef idx="minor">
+            <a:schemeClr val="lt1"/>
+          </a:fontRef>
+        </p:style>
+        <p:txBody>
+          <a:bodyPr rtlCol="0" anchor="ctr"/>
+          <a:lstStyle/>
+          <a:p>
+            <a:pPr algn="ctr"/>
+            <a:endParaRPr lang="en-US"/>
+          </a:p>
+        </p:txBody>
+      </p:sp>
+      <p:sp>
+        <p:nvSpPr>
+          <p:cNvPr id="14" name="Rectangle 13">
+            <a:extLst>
+              <a:ext uri="{FF2B5EF4-FFF2-40B4-BE49-F238E27FC236}">
+                <a16:creationId xmlns:a16="http://schemas.microsoft.com/office/drawing/2014/main" id="{3783CA14-24A1-485C-8B30-D6A5D87987AD}"/>
+              </a:ext>
+              <a:ext uri="{C183D7F6-B498-43B3-948B-1728B52AA6E4}">
+                <adec:decorative xmlns:adec="http://schemas.microsoft.com/office/drawing/2017/decorative" val="1"/>
+              </a:ext>
+            </a:extLst>
+          </p:cNvPr>
+          <p:cNvSpPr>
+            <a:spLocks noGrp="1" noRot="1" noChangeAspect="1" noMove="1" noResize="1" noEditPoints="1" noAdjustHandles="1" noChangeArrowheads="1" noChangeShapeType="1" noTextEdit="1"/>
+          </p:cNvSpPr>
+          <p:nvPr>
+            <p:extLst>
+              <p:ext uri="{386F3935-93C4-4BCD-93E2-E3B085C9AB24}">
+                <p16:designElem xmlns:p16="http://schemas.microsoft.com/office/powerpoint/2015/main" val="1"/>
+              </p:ext>
+            </p:extLst>
+          </p:nvPr>
+        </p:nvSpPr>
+        <p:spPr>
+          <a:xfrm rot="18900000" flipH="1">
+            <a:off x="10043482" y="655140"/>
+            <a:ext cx="687472" cy="687472"/>
+          </a:xfrm>
+          <a:prstGeom prst="rect">
+            <a:avLst/>
+          </a:prstGeom>
+          <a:solidFill>
+            <a:schemeClr val="accent4">
+              <a:alpha val="30000"/>
+            </a:schemeClr>
+          </a:solidFill>
+          <a:ln>
+            <a:noFill/>
+          </a:ln>
+        </p:spPr>
+        <p:style>
+          <a:lnRef idx="2">
+            <a:schemeClr val="accent1">
+              <a:shade val="50000"/>
+            </a:schemeClr>
+          </a:lnRef>
+          <a:fillRef idx="1">
+            <a:schemeClr val="accent1"/>
+          </a:fillRef>
+          <a:effectRef idx="0">
+            <a:schemeClr val="accent1"/>
+          </a:effectRef>
+          <a:fontRef idx="minor">
+            <a:schemeClr val="lt1"/>
+          </a:fontRef>
+        </p:style>
+        <p:txBody>
+          <a:bodyPr rtlCol="0" anchor="ctr"/>
+          <a:lstStyle/>
+          <a:p>
+            <a:pPr algn="ctr"/>
+            <a:endParaRPr lang="en-US"/>
+          </a:p>
+        </p:txBody>
+      </p:sp>
+      <p:sp>
+        <p:nvSpPr>
+          <p:cNvPr id="16" name="Freeform: Shape 15">
+            <a:extLst>
+              <a:ext uri="{FF2B5EF4-FFF2-40B4-BE49-F238E27FC236}">
+                <a16:creationId xmlns:a16="http://schemas.microsoft.com/office/drawing/2014/main" id="{9A97C86A-04D6-40F7-AE84-31AB43E6A846}"/>
+              </a:ext>
+              <a:ext uri="{C183D7F6-B498-43B3-948B-1728B52AA6E4}">
+                <adec:decorative xmlns:adec="http://schemas.microsoft.com/office/drawing/2017/decorative" val="1"/>
+              </a:ext>
+            </a:extLst>
+          </p:cNvPr>
+          <p:cNvSpPr>
+            <a:spLocks noGrp="1" noRot="1" noChangeAspect="1" noMove="1" noResize="1" noEditPoints="1" noAdjustHandles="1" noChangeArrowheads="1" noChangeShapeType="1" noTextEdit="1"/>
+          </p:cNvSpPr>
+          <p:nvPr>
+            <p:extLst>
+              <p:ext uri="{386F3935-93C4-4BCD-93E2-E3B085C9AB24}">
+                <p16:designElem xmlns:p16="http://schemas.microsoft.com/office/powerpoint/2015/main" val="1"/>
+              </p:ext>
+            </p:extLst>
+          </p:nvPr>
+        </p:nvSpPr>
+        <p:spPr>
+          <a:xfrm rot="10800000" flipH="1">
+            <a:off x="9356643" y="0"/>
+            <a:ext cx="2835357" cy="1480837"/>
+          </a:xfrm>
+          <a:custGeom>
+            <a:avLst/>
+            <a:gdLst>
+              <a:gd name="connsiteX0" fmla="*/ 2835357 w 2835357"/>
+              <a:gd name="connsiteY0" fmla="*/ 1480837 h 1480837"/>
+              <a:gd name="connsiteX1" fmla="*/ 0 w 2835357"/>
+              <a:gd name="connsiteY1" fmla="*/ 1480837 h 1480837"/>
+              <a:gd name="connsiteX2" fmla="*/ 1552727 w 2835357"/>
+              <a:gd name="connsiteY2" fmla="*/ 0 h 1480837"/>
+              <a:gd name="connsiteX3" fmla="*/ 2835357 w 2835357"/>
+              <a:gd name="connsiteY3" fmla="*/ 1223245 h 1480837"/>
+            </a:gdLst>
+            <a:ahLst/>
+            <a:cxnLst>
+              <a:cxn ang="0">
+                <a:pos x="connsiteX0" y="connsiteY0"/>
+              </a:cxn>
+              <a:cxn ang="0">
+                <a:pos x="connsiteX1" y="connsiteY1"/>
+              </a:cxn>
+              <a:cxn ang="0">
+                <a:pos x="connsiteX2" y="connsiteY2"/>
+              </a:cxn>
+              <a:cxn ang="0">
+                <a:pos x="connsiteX3" y="connsiteY3"/>
+              </a:cxn>
+            </a:cxnLst>
+            <a:rect l="l" t="t" r="r" b="b"/>
+            <a:pathLst>
+              <a:path w="2835357" h="1480837">
+                <a:moveTo>
+                  <a:pt x="2835357" y="1480837"/>
+                </a:moveTo>
+                <a:lnTo>
+                  <a:pt x="0" y="1480837"/>
+                </a:lnTo>
+                <a:lnTo>
+                  <a:pt x="1552727" y="0"/>
+                </a:lnTo>
+                <a:lnTo>
+                  <a:pt x="2835357" y="1223245"/>
+                </a:lnTo>
+                <a:close/>
+              </a:path>
+            </a:pathLst>
+          </a:custGeom>
+          <a:solidFill>
+            <a:schemeClr val="accent4">
+              <a:alpha val="30000"/>
+            </a:schemeClr>
+          </a:solidFill>
+          <a:ln>
+            <a:noFill/>
+          </a:ln>
+        </p:spPr>
+        <p:style>
+          <a:lnRef idx="2">
+            <a:schemeClr val="accent1">
+              <a:shade val="50000"/>
+            </a:schemeClr>
+          </a:lnRef>
+          <a:fillRef idx="1">
+            <a:schemeClr val="accent1"/>
+          </a:fillRef>
+          <a:effectRef idx="0">
+            <a:schemeClr val="accent1"/>
+          </a:effectRef>
+          <a:fontRef idx="minor">
+            <a:schemeClr val="lt1"/>
+          </a:fontRef>
+        </p:style>
+        <p:txBody>
+          <a:bodyPr wrap="square" rtlCol="0" anchor="ctr">
+            <a:noAutofit/>
+          </a:bodyPr>
+          <a:lstStyle/>
+          <a:p>
+            <a:pPr algn="ctr"/>
+            <a:endParaRPr lang="en-US" dirty="0"/>
+          </a:p>
+        </p:txBody>
+      </p:sp>
+      <p:sp>
+        <p:nvSpPr>
+          <p:cNvPr id="18" name="Isosceles Triangle 17">
+            <a:extLst>
+              <a:ext uri="{FF2B5EF4-FFF2-40B4-BE49-F238E27FC236}">
+                <a16:creationId xmlns:a16="http://schemas.microsoft.com/office/drawing/2014/main" id="{FF9F2414-84E8-453E-B1F3-389FDE8192D9}"/>
+              </a:ext>
+              <a:ext uri="{C183D7F6-B498-43B3-948B-1728B52AA6E4}">
+                <adec:decorative xmlns:adec="http://schemas.microsoft.com/office/drawing/2017/decorative" val="1"/>
+              </a:ext>
+            </a:extLst>
+          </p:cNvPr>
+          <p:cNvSpPr>
+            <a:spLocks noGrp="1" noRot="1" noChangeAspect="1" noMove="1" noResize="1" noEditPoints="1" noAdjustHandles="1" noChangeArrowheads="1" noChangeShapeType="1" noTextEdit="1"/>
+          </p:cNvSpPr>
+          <p:nvPr>
+            <p:extLst>
+              <p:ext uri="{386F3935-93C4-4BCD-93E2-E3B085C9AB24}">
+                <p16:designElem xmlns:p16="http://schemas.microsoft.com/office/powerpoint/2015/main" val="1"/>
+              </p:ext>
+            </p:extLst>
+          </p:nvPr>
+        </p:nvSpPr>
+        <p:spPr>
+          <a:xfrm flipH="1">
+            <a:off x="7976344" y="6115501"/>
+            <a:ext cx="1494513" cy="742499"/>
+          </a:xfrm>
+          <a:prstGeom prst="triangle">
+            <a:avLst/>
+          </a:prstGeom>
+          <a:solidFill>
+            <a:schemeClr val="accent1">
+              <a:alpha val="30000"/>
+            </a:schemeClr>
+          </a:solidFill>
+          <a:ln>
+            <a:noFill/>
+          </a:ln>
+        </p:spPr>
+        <p:style>
+          <a:lnRef idx="2">
+            <a:schemeClr val="accent1">
+              <a:shade val="50000"/>
+            </a:schemeClr>
+          </a:lnRef>
+          <a:fillRef idx="1">
+            <a:schemeClr val="accent1"/>
+          </a:fillRef>
+          <a:effectRef idx="0">
+            <a:schemeClr val="accent1"/>
+          </a:effectRef>
+          <a:fontRef idx="minor">
+            <a:schemeClr val="lt1"/>
+          </a:fontRef>
+        </p:style>
+        <p:txBody>
+          <a:bodyPr rtlCol="0" anchor="ctr"/>
+          <a:lstStyle/>
+          <a:p>
+            <a:pPr algn="ctr"/>
+            <a:endParaRPr lang="en-US"/>
+          </a:p>
+        </p:txBody>
+      </p:sp>
+      <p:pic>
+        <p:nvPicPr>
+          <p:cNvPr id="3" name="Picture 2">
+            <a:extLst>
+              <a:ext uri="{FF2B5EF4-FFF2-40B4-BE49-F238E27FC236}">
+                <a16:creationId xmlns:a16="http://schemas.microsoft.com/office/drawing/2014/main" id="{898C0C21-5051-6AA4-DB85-3A925D4DC311}"/>
+              </a:ext>
+            </a:extLst>
+          </p:cNvPr>
+          <p:cNvPicPr>
+            <a:picLocks noChangeAspect="1"/>
+          </p:cNvPicPr>
+          <p:nvPr/>
+        </p:nvPicPr>
+        <p:blipFill>
+          <a:blip r:embed="rId2"/>
+          <a:stretch>
+            <a:fillRect/>
+          </a:stretch>
+        </p:blipFill>
+        <p:spPr>
+          <a:xfrm>
+            <a:off x="1444200" y="393701"/>
+            <a:ext cx="8920816" cy="5820832"/>
+          </a:xfrm>
+          <a:prstGeom prst="rect">
+            <a:avLst/>
+          </a:prstGeom>
+          <a:ln>
+            <a:noFill/>
+          </a:ln>
+        </p:spPr>
+      </p:pic>
+      <p:sp>
+        <p:nvSpPr>
+          <p:cNvPr id="20" name="Isosceles Triangle 19">
+            <a:extLst>
+              <a:ext uri="{FF2B5EF4-FFF2-40B4-BE49-F238E27FC236}">
+                <a16:creationId xmlns:a16="http://schemas.microsoft.com/office/drawing/2014/main" id="{3ECA69A1-7536-43AC-85EF-C7106179F5ED}"/>
+              </a:ext>
+              <a:ext uri="{C183D7F6-B498-43B3-948B-1728B52AA6E4}">
+                <adec:decorative xmlns:adec="http://schemas.microsoft.com/office/drawing/2017/decorative" val="1"/>
+              </a:ext>
+            </a:extLst>
+          </p:cNvPr>
+          <p:cNvSpPr>
+            <a:spLocks noGrp="1" noRot="1" noChangeAspect="1" noMove="1" noResize="1" noEditPoints="1" noAdjustHandles="1" noChangeArrowheads="1" noChangeShapeType="1" noTextEdit="1"/>
+          </p:cNvSpPr>
+          <p:nvPr>
+            <p:extLst>
+              <p:ext uri="{386F3935-93C4-4BCD-93E2-E3B085C9AB24}">
+                <p16:designElem xmlns:p16="http://schemas.microsoft.com/office/powerpoint/2015/main" val="1"/>
+              </p:ext>
+            </p:extLst>
+          </p:nvPr>
+        </p:nvSpPr>
+        <p:spPr>
+          <a:xfrm flipH="1">
+            <a:off x="7604080" y="6453143"/>
+            <a:ext cx="814903" cy="404857"/>
+          </a:xfrm>
+          <a:prstGeom prst="triangle">
+            <a:avLst/>
+          </a:prstGeom>
+          <a:solidFill>
+            <a:schemeClr val="accent1">
+              <a:alpha val="30000"/>
+            </a:schemeClr>
+          </a:solidFill>
+          <a:ln>
+            <a:noFill/>
+          </a:ln>
+        </p:spPr>
+        <p:style>
+          <a:lnRef idx="2">
+            <a:schemeClr val="accent1">
+              <a:shade val="50000"/>
+            </a:schemeClr>
+          </a:lnRef>
+          <a:fillRef idx="1">
+            <a:schemeClr val="accent1"/>
+          </a:fillRef>
+          <a:effectRef idx="0">
+            <a:schemeClr val="accent1"/>
+          </a:effectRef>
+          <a:fontRef idx="minor">
+            <a:schemeClr val="lt1"/>
+          </a:fontRef>
+        </p:style>
+        <p:txBody>
+          <a:bodyPr rtlCol="0" anchor="ctr"/>
+          <a:lstStyle/>
+          <a:p>
+            <a:pPr algn="ctr"/>
+            <a:endParaRPr lang="en-US"/>
+          </a:p>
+        </p:txBody>
+      </p:sp>
+    </p:spTree>
+    <p:extLst>
+      <p:ext uri="{BB962C8B-B14F-4D97-AF65-F5344CB8AC3E}">
+        <p14:creationId xmlns:p14="http://schemas.microsoft.com/office/powerpoint/2010/main" val="3352006046"/>
+      </p:ext>
+    </p:extLst>
+  </p:cSld>
+  <p:clrMapOvr>
+    <a:overrideClrMapping bg1="lt1" tx1="dk1" bg2="lt2" tx2="dk2" accent1="accent1" accent2="accent2" accent3="accent3" accent4="accent4" accent5="accent5" accent6="accent6" hlink="hlink" folHlink="folHlink"/>
+  </p:clrMapOvr>
+</p:sld>
+</file>
+
+<file path=ppt/slides/slide13.xml><?xml version="1.0" encoding="utf-8"?>
+<p:sld xmlns:a="http://schemas.openxmlformats.org/drawingml/2006/main" xmlns:r="http://schemas.openxmlformats.org/officeDocument/2006/relationships" xmlns:p="http://schemas.openxmlformats.org/presentationml/2006/main">
+  <p:cSld>
     <p:spTree>
       <p:nvGrpSpPr>
         <p:cNvPr id="1" name="Shape 265"/>
@@ -12323,7 +14186,7 @@
 </p:sld>
 </file>
 
-<file path=ppt/slides/slide11.xml><?xml version="1.0" encoding="utf-8"?>
+<file path=ppt/slides/slide14.xml><?xml version="1.0" encoding="utf-8"?>
 <p:sld xmlns:a="http://schemas.openxmlformats.org/drawingml/2006/main" xmlns:r="http://schemas.openxmlformats.org/officeDocument/2006/relationships" xmlns:p="http://schemas.openxmlformats.org/presentationml/2006/main">
   <p:cSld>
     <p:spTree>
@@ -12376,7 +14239,7 @@
 </p:sld>
 </file>
 
-<file path=ppt/slides/slide12.xml><?xml version="1.0" encoding="utf-8"?>
+<file path=ppt/slides/slide15.xml><?xml version="1.0" encoding="utf-8"?>
 <p:sld xmlns:a="http://schemas.openxmlformats.org/drawingml/2006/main" xmlns:r="http://schemas.openxmlformats.org/officeDocument/2006/relationships" xmlns:p="http://schemas.openxmlformats.org/presentationml/2006/main">
   <p:cSld>
     <p:spTree>
@@ -12534,7 +14397,7 @@
 </p:sld>
 </file>
 
-<file path=ppt/slides/slide13.xml><?xml version="1.0" encoding="utf-8"?>
+<file path=ppt/slides/slide16.xml><?xml version="1.0" encoding="utf-8"?>
 <p:sld xmlns:a="http://schemas.openxmlformats.org/drawingml/2006/main" xmlns:r="http://schemas.openxmlformats.org/officeDocument/2006/relationships" xmlns:p="http://schemas.openxmlformats.org/presentationml/2006/main">
   <p:cSld>
     <p:spTree>
@@ -12594,7 +14457,7 @@
 </p:sld>
 </file>
 
-<file path=ppt/slides/slide14.xml><?xml version="1.0" encoding="utf-8"?>
+<file path=ppt/slides/slide17.xml><?xml version="1.0" encoding="utf-8"?>
 <p:sld xmlns:a="http://schemas.openxmlformats.org/drawingml/2006/main" xmlns:r="http://schemas.openxmlformats.org/officeDocument/2006/relationships" xmlns:p="http://schemas.openxmlformats.org/presentationml/2006/main">
   <p:cSld>
     <p:spTree>
@@ -12762,7 +14625,7 @@
 </p:sld>
 </file>
 
-<file path=ppt/slides/slide15.xml><?xml version="1.0" encoding="utf-8"?>
+<file path=ppt/slides/slide18.xml><?xml version="1.0" encoding="utf-8"?>
 <p:sld xmlns:a="http://schemas.openxmlformats.org/drawingml/2006/main" xmlns:r="http://schemas.openxmlformats.org/officeDocument/2006/relationships" xmlns:p="http://schemas.openxmlformats.org/presentationml/2006/main">
   <p:cSld>
     <p:spTree>
@@ -12872,7 +14735,7 @@
 </p:sld>
 </file>
 
-<file path=ppt/slides/slide16.xml><?xml version="1.0" encoding="utf-8"?>
+<file path=ppt/slides/slide19.xml><?xml version="1.0" encoding="utf-8"?>
 <p:sld xmlns:a="http://schemas.openxmlformats.org/drawingml/2006/main" xmlns:r="http://schemas.openxmlformats.org/officeDocument/2006/relationships" xmlns:p="http://schemas.openxmlformats.org/presentationml/2006/main">
   <p:cSld>
     <p:spTree>
@@ -12982,7 +14845,669 @@
 </p:sld>
 </file>
 
-<file path=ppt/slides/slide17.xml><?xml version="1.0" encoding="utf-8"?>
+<file path=ppt/slides/slide2.xml><?xml version="1.0" encoding="utf-8"?>
+<p:sld xmlns:a="http://schemas.openxmlformats.org/drawingml/2006/main" xmlns:r="http://schemas.openxmlformats.org/officeDocument/2006/relationships" xmlns:p="http://schemas.openxmlformats.org/presentationml/2006/main">
+  <p:cSld>
+    <p:bg>
+      <p:bgPr>
+        <a:solidFill>
+          <a:srgbClr val="F5ECF5"/>
+        </a:solidFill>
+        <a:effectLst/>
+      </p:bgPr>
+    </p:bg>
+    <p:spTree>
+      <p:nvGrpSpPr>
+        <p:cNvPr id="1" name="Shape 94"/>
+        <p:cNvGrpSpPr/>
+        <p:nvPr/>
+      </p:nvGrpSpPr>
+      <p:grpSpPr>
+        <a:xfrm>
+          <a:off x="0" y="0"/>
+          <a:ext cx="0" cy="0"/>
+          <a:chOff x="0" y="0"/>
+          <a:chExt cx="0" cy="0"/>
+        </a:xfrm>
+      </p:grpSpPr>
+      <p:pic>
+        <p:nvPicPr>
+          <p:cNvPr id="95" name="Google Shape;95;p14" descr="image.png"/>
+          <p:cNvPicPr preferRelativeResize="0"/>
+          <p:nvPr/>
+        </p:nvPicPr>
+        <p:blipFill rotWithShape="1">
+          <a:blip r:embed="rId3">
+            <a:alphaModFix/>
+          </a:blip>
+          <a:srcRect/>
+          <a:stretch/>
+        </p:blipFill>
+        <p:spPr>
+          <a:xfrm>
+            <a:off x="0" y="0"/>
+            <a:ext cx="12192000" cy="6858000"/>
+          </a:xfrm>
+          <a:prstGeom prst="rect">
+            <a:avLst/>
+          </a:prstGeom>
+          <a:noFill/>
+          <a:ln>
+            <a:noFill/>
+          </a:ln>
+        </p:spPr>
+      </p:pic>
+      <p:pic>
+        <p:nvPicPr>
+          <p:cNvPr id="96" name="Google Shape;96;p14" descr="image.png"/>
+          <p:cNvPicPr preferRelativeResize="0"/>
+          <p:nvPr/>
+        </p:nvPicPr>
+        <p:blipFill rotWithShape="1">
+          <a:blip r:embed="rId4">
+            <a:alphaModFix/>
+          </a:blip>
+          <a:srcRect/>
+          <a:stretch/>
+        </p:blipFill>
+        <p:spPr>
+          <a:xfrm>
+            <a:off x="571500" y="2000398"/>
+            <a:ext cx="3492549" cy="3742878"/>
+          </a:xfrm>
+          <a:prstGeom prst="rect">
+            <a:avLst/>
+          </a:prstGeom>
+          <a:noFill/>
+          <a:ln>
+            <a:noFill/>
+          </a:ln>
+        </p:spPr>
+      </p:pic>
+      <p:pic>
+        <p:nvPicPr>
+          <p:cNvPr id="97" name="Google Shape;97;p14" descr="image.png"/>
+          <p:cNvPicPr preferRelativeResize="0"/>
+          <p:nvPr/>
+        </p:nvPicPr>
+        <p:blipFill rotWithShape="1">
+          <a:blip r:embed="rId5">
+            <a:alphaModFix/>
+          </a:blip>
+          <a:srcRect/>
+          <a:stretch/>
+        </p:blipFill>
+        <p:spPr>
+          <a:xfrm>
+            <a:off x="4349799" y="2000398"/>
+            <a:ext cx="3492549" cy="3742878"/>
+          </a:xfrm>
+          <a:prstGeom prst="rect">
+            <a:avLst/>
+          </a:prstGeom>
+          <a:noFill/>
+          <a:ln>
+            <a:noFill/>
+          </a:ln>
+        </p:spPr>
+      </p:pic>
+      <p:pic>
+        <p:nvPicPr>
+          <p:cNvPr id="98" name="Google Shape;98;p14" descr="image.png"/>
+          <p:cNvPicPr preferRelativeResize="0"/>
+          <p:nvPr/>
+        </p:nvPicPr>
+        <p:blipFill rotWithShape="1">
+          <a:blip r:embed="rId6">
+            <a:alphaModFix/>
+          </a:blip>
+          <a:srcRect/>
+          <a:stretch/>
+        </p:blipFill>
+        <p:spPr>
+          <a:xfrm>
+            <a:off x="8128099" y="2000398"/>
+            <a:ext cx="3492549" cy="3742878"/>
+          </a:xfrm>
+          <a:prstGeom prst="rect">
+            <a:avLst/>
+          </a:prstGeom>
+          <a:noFill/>
+          <a:ln>
+            <a:noFill/>
+          </a:ln>
+        </p:spPr>
+      </p:pic>
+      <p:pic>
+        <p:nvPicPr>
+          <p:cNvPr id="99" name="Google Shape;99;p14" descr="image.png"/>
+          <p:cNvPicPr preferRelativeResize="0"/>
+          <p:nvPr/>
+        </p:nvPicPr>
+        <p:blipFill rotWithShape="1">
+          <a:blip r:embed="rId7">
+            <a:alphaModFix/>
+          </a:blip>
+          <a:srcRect/>
+          <a:stretch/>
+        </p:blipFill>
+        <p:spPr>
+          <a:xfrm>
+            <a:off x="914400" y="2343298"/>
+            <a:ext cx="762000" cy="762000"/>
+          </a:xfrm>
+          <a:prstGeom prst="rect">
+            <a:avLst/>
+          </a:prstGeom>
+          <a:noFill/>
+          <a:ln>
+            <a:noFill/>
+          </a:ln>
+        </p:spPr>
+      </p:pic>
+      <p:sp>
+        <p:nvSpPr>
+          <p:cNvPr id="100" name="Google Shape;100;p14"/>
+          <p:cNvSpPr txBox="1"/>
+          <p:nvPr/>
+        </p:nvSpPr>
+        <p:spPr>
+          <a:xfrm>
+            <a:off x="914400" y="3343423"/>
+            <a:ext cx="1950243" cy="323850"/>
+          </a:xfrm>
+          <a:prstGeom prst="rect">
+            <a:avLst/>
+          </a:prstGeom>
+          <a:noFill/>
+          <a:ln>
+            <a:noFill/>
+          </a:ln>
+        </p:spPr>
+        <p:txBody>
+          <a:bodyPr spcFirstLastPara="1" wrap="square" lIns="0" tIns="0" rIns="0" bIns="0" anchor="t" anchorCtr="0">
+            <a:spAutoFit/>
+          </a:bodyPr>
+          <a:lstStyle/>
+          <a:p>
+            <a:pPr marL="0" marR="0" lvl="0" indent="0" algn="l" rtl="0">
+              <a:spcBef>
+                <a:spcPts val="0"/>
+              </a:spcBef>
+              <a:spcAft>
+                <a:spcPts val="0"/>
+              </a:spcAft>
+              <a:buNone/>
+            </a:pPr>
+            <a:r>
+              <a:rPr lang="en-US" sz="2100" b="1" i="0" u="none" strike="noStrike" cap="none">
+                <a:solidFill>
+                  <a:srgbClr val="6B2D8B"/>
+                </a:solidFill>
+                <a:latin typeface="Syne"/>
+                <a:ea typeface="Syne"/>
+                <a:cs typeface="Syne"/>
+                <a:sym typeface="Syne"/>
+              </a:rPr>
+              <a:t>Data Quality</a:t>
+            </a:r>
+            <a:endParaRPr/>
+          </a:p>
+        </p:txBody>
+      </p:sp>
+      <p:sp>
+        <p:nvSpPr>
+          <p:cNvPr id="101" name="Google Shape;101;p14"/>
+          <p:cNvSpPr txBox="1"/>
+          <p:nvPr/>
+        </p:nvSpPr>
+        <p:spPr>
+          <a:xfrm>
+            <a:off x="914400" y="3810148"/>
+            <a:ext cx="2806749" cy="1447353"/>
+          </a:xfrm>
+          <a:prstGeom prst="rect">
+            <a:avLst/>
+          </a:prstGeom>
+          <a:noFill/>
+          <a:ln>
+            <a:noFill/>
+          </a:ln>
+        </p:spPr>
+        <p:txBody>
+          <a:bodyPr spcFirstLastPara="1" wrap="square" lIns="0" tIns="0" rIns="0" bIns="0" anchor="t" anchorCtr="0">
+            <a:spAutoFit/>
+          </a:bodyPr>
+          <a:lstStyle/>
+          <a:p>
+            <a:pPr marL="0" marR="0" lvl="0" indent="0" algn="l" rtl="0">
+              <a:lnSpc>
+                <a:spcPct val="159929"/>
+              </a:lnSpc>
+              <a:spcBef>
+                <a:spcPts val="0"/>
+              </a:spcBef>
+              <a:spcAft>
+                <a:spcPts val="0"/>
+              </a:spcAft>
+              <a:buNone/>
+            </a:pPr>
+            <a:r>
+              <a:rPr lang="en-US" sz="1425" b="0" i="0" u="none" strike="noStrike" cap="none">
+                <a:solidFill>
+                  <a:srgbClr val="2D1B3D"/>
+                </a:solidFill>
+                <a:latin typeface="DM Sans"/>
+                <a:ea typeface="DM Sans"/>
+                <a:cs typeface="DM Sans"/>
+                <a:sym typeface="DM Sans"/>
+              </a:rPr>
+              <a:t>Automated five-layer null remediation eliminates manual data-cleaning effort, reducing pre-analysis preparation time by an estimated 70–85%.</a:t>
+            </a:r>
+            <a:endParaRPr/>
+          </a:p>
+        </p:txBody>
+      </p:sp>
+      <p:pic>
+        <p:nvPicPr>
+          <p:cNvPr id="102" name="Google Shape;102;p14" descr="image.png"/>
+          <p:cNvPicPr preferRelativeResize="0"/>
+          <p:nvPr/>
+        </p:nvPicPr>
+        <p:blipFill rotWithShape="1">
+          <a:blip r:embed="rId8">
+            <a:alphaModFix/>
+          </a:blip>
+          <a:srcRect/>
+          <a:stretch/>
+        </p:blipFill>
+        <p:spPr>
+          <a:xfrm>
+            <a:off x="4692699" y="2343298"/>
+            <a:ext cx="762000" cy="762000"/>
+          </a:xfrm>
+          <a:prstGeom prst="rect">
+            <a:avLst/>
+          </a:prstGeom>
+          <a:noFill/>
+          <a:ln>
+            <a:noFill/>
+          </a:ln>
+        </p:spPr>
+      </p:pic>
+      <p:sp>
+        <p:nvSpPr>
+          <p:cNvPr id="103" name="Google Shape;103;p14"/>
+          <p:cNvSpPr txBox="1"/>
+          <p:nvPr/>
+        </p:nvSpPr>
+        <p:spPr>
+          <a:xfrm>
+            <a:off x="4692699" y="3343423"/>
+            <a:ext cx="1610201" cy="323850"/>
+          </a:xfrm>
+          <a:prstGeom prst="rect">
+            <a:avLst/>
+          </a:prstGeom>
+          <a:noFill/>
+          <a:ln>
+            <a:noFill/>
+          </a:ln>
+        </p:spPr>
+        <p:txBody>
+          <a:bodyPr spcFirstLastPara="1" wrap="square" lIns="0" tIns="0" rIns="0" bIns="0" anchor="t" anchorCtr="0">
+            <a:spAutoFit/>
+          </a:bodyPr>
+          <a:lstStyle/>
+          <a:p>
+            <a:pPr marL="0" marR="0" lvl="0" indent="0" algn="l" rtl="0">
+              <a:spcBef>
+                <a:spcPts val="0"/>
+              </a:spcBef>
+              <a:spcAft>
+                <a:spcPts val="0"/>
+              </a:spcAft>
+              <a:buNone/>
+            </a:pPr>
+            <a:r>
+              <a:rPr lang="en-US" sz="2100" b="1" i="0" u="none" strike="noStrike" cap="none">
+                <a:solidFill>
+                  <a:srgbClr val="6B2D8B"/>
+                </a:solidFill>
+                <a:latin typeface="Syne"/>
+                <a:ea typeface="Syne"/>
+                <a:cs typeface="Syne"/>
+                <a:sym typeface="Syne"/>
+              </a:rPr>
+              <a:t>Scalability</a:t>
+            </a:r>
+            <a:endParaRPr/>
+          </a:p>
+        </p:txBody>
+      </p:sp>
+      <p:sp>
+        <p:nvSpPr>
+          <p:cNvPr id="104" name="Google Shape;104;p14"/>
+          <p:cNvSpPr txBox="1"/>
+          <p:nvPr/>
+        </p:nvSpPr>
+        <p:spPr>
+          <a:xfrm>
+            <a:off x="4692699" y="3810148"/>
+            <a:ext cx="2806749" cy="1447353"/>
+          </a:xfrm>
+          <a:prstGeom prst="rect">
+            <a:avLst/>
+          </a:prstGeom>
+          <a:noFill/>
+          <a:ln>
+            <a:noFill/>
+          </a:ln>
+        </p:spPr>
+        <p:txBody>
+          <a:bodyPr spcFirstLastPara="1" wrap="square" lIns="0" tIns="0" rIns="0" bIns="0" anchor="t" anchorCtr="0">
+            <a:spAutoFit/>
+          </a:bodyPr>
+          <a:lstStyle/>
+          <a:p>
+            <a:pPr marL="0" marR="0" lvl="0" indent="0" algn="l" rtl="0">
+              <a:lnSpc>
+                <a:spcPct val="159929"/>
+              </a:lnSpc>
+              <a:spcBef>
+                <a:spcPts val="0"/>
+              </a:spcBef>
+              <a:spcAft>
+                <a:spcPts val="0"/>
+              </a:spcAft>
+              <a:buNone/>
+            </a:pPr>
+            <a:r>
+              <a:rPr lang="en-US" sz="1425" b="0" i="0" u="none" strike="noStrike" cap="none">
+                <a:solidFill>
+                  <a:srgbClr val="2D1B3D"/>
+                </a:solidFill>
+                <a:latin typeface="DM Sans"/>
+                <a:ea typeface="DM Sans"/>
+                <a:cs typeface="DM Sans"/>
+                <a:sym typeface="DM Sans"/>
+              </a:rPr>
+              <a:t>Handles datasets from hundreds to tens of thousands of rows with consistent performance, leveraging Pandas vectorised operations.</a:t>
+            </a:r>
+            <a:endParaRPr/>
+          </a:p>
+        </p:txBody>
+      </p:sp>
+      <p:pic>
+        <p:nvPicPr>
+          <p:cNvPr id="105" name="Google Shape;105;p14" descr="image.png"/>
+          <p:cNvPicPr preferRelativeResize="0"/>
+          <p:nvPr/>
+        </p:nvPicPr>
+        <p:blipFill rotWithShape="1">
+          <a:blip r:embed="rId9">
+            <a:alphaModFix/>
+          </a:blip>
+          <a:srcRect/>
+          <a:stretch/>
+        </p:blipFill>
+        <p:spPr>
+          <a:xfrm>
+            <a:off x="8470999" y="2343298"/>
+            <a:ext cx="762000" cy="762000"/>
+          </a:xfrm>
+          <a:prstGeom prst="rect">
+            <a:avLst/>
+          </a:prstGeom>
+          <a:noFill/>
+          <a:ln>
+            <a:noFill/>
+          </a:ln>
+        </p:spPr>
+      </p:pic>
+      <p:sp>
+        <p:nvSpPr>
+          <p:cNvPr id="106" name="Google Shape;106;p14"/>
+          <p:cNvSpPr txBox="1"/>
+          <p:nvPr/>
+        </p:nvSpPr>
+        <p:spPr>
+          <a:xfrm>
+            <a:off x="8470999" y="3343423"/>
+            <a:ext cx="2340292" cy="323850"/>
+          </a:xfrm>
+          <a:prstGeom prst="rect">
+            <a:avLst/>
+          </a:prstGeom>
+          <a:noFill/>
+          <a:ln>
+            <a:noFill/>
+          </a:ln>
+        </p:spPr>
+        <p:txBody>
+          <a:bodyPr spcFirstLastPara="1" wrap="square" lIns="0" tIns="0" rIns="0" bIns="0" anchor="t" anchorCtr="0">
+            <a:spAutoFit/>
+          </a:bodyPr>
+          <a:lstStyle/>
+          <a:p>
+            <a:pPr marL="0" marR="0" lvl="0" indent="0" algn="l" rtl="0">
+              <a:spcBef>
+                <a:spcPts val="0"/>
+              </a:spcBef>
+              <a:spcAft>
+                <a:spcPts val="0"/>
+              </a:spcAft>
+              <a:buNone/>
+            </a:pPr>
+            <a:r>
+              <a:rPr lang="en-US" sz="2100" b="1" i="0" u="none" strike="noStrike" cap="none">
+                <a:solidFill>
+                  <a:srgbClr val="6B2D8B"/>
+                </a:solidFill>
+                <a:latin typeface="Syne"/>
+                <a:ea typeface="Syne"/>
+                <a:cs typeface="Syne"/>
+                <a:sym typeface="Syne"/>
+              </a:rPr>
+              <a:t>Insight Velocity</a:t>
+            </a:r>
+            <a:endParaRPr/>
+          </a:p>
+        </p:txBody>
+      </p:sp>
+      <p:sp>
+        <p:nvSpPr>
+          <p:cNvPr id="107" name="Google Shape;107;p14"/>
+          <p:cNvSpPr txBox="1"/>
+          <p:nvPr/>
+        </p:nvSpPr>
+        <p:spPr>
+          <a:xfrm>
+            <a:off x="8470999" y="3810148"/>
+            <a:ext cx="2806749" cy="1447353"/>
+          </a:xfrm>
+          <a:prstGeom prst="rect">
+            <a:avLst/>
+          </a:prstGeom>
+          <a:noFill/>
+          <a:ln>
+            <a:noFill/>
+          </a:ln>
+        </p:spPr>
+        <p:txBody>
+          <a:bodyPr spcFirstLastPara="1" wrap="square" lIns="0" tIns="0" rIns="0" bIns="0" anchor="t" anchorCtr="0">
+            <a:spAutoFit/>
+          </a:bodyPr>
+          <a:lstStyle/>
+          <a:p>
+            <a:pPr marL="0" marR="0" lvl="0" indent="0" algn="l" rtl="0">
+              <a:lnSpc>
+                <a:spcPct val="159929"/>
+              </a:lnSpc>
+              <a:spcBef>
+                <a:spcPts val="0"/>
+              </a:spcBef>
+              <a:spcAft>
+                <a:spcPts val="0"/>
+              </a:spcAft>
+              <a:buNone/>
+            </a:pPr>
+            <a:r>
+              <a:rPr lang="en-US" sz="1425" b="0" i="0" u="none" strike="noStrike" cap="none">
+                <a:solidFill>
+                  <a:srgbClr val="2D1B3D"/>
+                </a:solidFill>
+                <a:latin typeface="DM Sans"/>
+                <a:ea typeface="DM Sans"/>
+                <a:cs typeface="DM Sans"/>
+                <a:sym typeface="DM Sans"/>
+              </a:rPr>
+              <a:t>Full Exploratory Data Analysis (EDA)—including descriptive stats, correlations, and distributions—delivered in a single button click.</a:t>
+            </a:r>
+            <a:endParaRPr/>
+          </a:p>
+        </p:txBody>
+      </p:sp>
+      <p:pic>
+        <p:nvPicPr>
+          <p:cNvPr id="108" name="Google Shape;108;p14" descr="image.png"/>
+          <p:cNvPicPr preferRelativeResize="0"/>
+          <p:nvPr/>
+        </p:nvPicPr>
+        <p:blipFill rotWithShape="1">
+          <a:blip r:embed="rId10">
+            <a:alphaModFix/>
+          </a:blip>
+          <a:srcRect/>
+          <a:stretch/>
+        </p:blipFill>
+        <p:spPr>
+          <a:xfrm>
+            <a:off x="1071562" y="2524273"/>
+            <a:ext cx="447675" cy="400050"/>
+          </a:xfrm>
+          <a:prstGeom prst="rect">
+            <a:avLst/>
+          </a:prstGeom>
+          <a:noFill/>
+          <a:ln>
+            <a:noFill/>
+          </a:ln>
+        </p:spPr>
+      </p:pic>
+      <p:pic>
+        <p:nvPicPr>
+          <p:cNvPr id="109" name="Google Shape;109;p14" descr="image.png"/>
+          <p:cNvPicPr preferRelativeResize="0"/>
+          <p:nvPr/>
+        </p:nvPicPr>
+        <p:blipFill rotWithShape="1">
+          <a:blip r:embed="rId11">
+            <a:alphaModFix/>
+          </a:blip>
+          <a:srcRect/>
+          <a:stretch/>
+        </p:blipFill>
+        <p:spPr>
+          <a:xfrm>
+            <a:off x="4873674" y="2524273"/>
+            <a:ext cx="400050" cy="400050"/>
+          </a:xfrm>
+          <a:prstGeom prst="rect">
+            <a:avLst/>
+          </a:prstGeom>
+          <a:noFill/>
+          <a:ln>
+            <a:noFill/>
+          </a:ln>
+        </p:spPr>
+      </p:pic>
+      <p:pic>
+        <p:nvPicPr>
+          <p:cNvPr id="110" name="Google Shape;110;p14" descr="image.png"/>
+          <p:cNvPicPr preferRelativeResize="0"/>
+          <p:nvPr/>
+        </p:nvPicPr>
+        <p:blipFill rotWithShape="1">
+          <a:blip r:embed="rId12">
+            <a:alphaModFix/>
+          </a:blip>
+          <a:srcRect/>
+          <a:stretch/>
+        </p:blipFill>
+        <p:spPr>
+          <a:xfrm>
+            <a:off x="8651974" y="2524273"/>
+            <a:ext cx="400050" cy="400050"/>
+          </a:xfrm>
+          <a:prstGeom prst="rect">
+            <a:avLst/>
+          </a:prstGeom>
+          <a:noFill/>
+          <a:ln>
+            <a:noFill/>
+          </a:ln>
+        </p:spPr>
+      </p:pic>
+      <p:sp>
+        <p:nvSpPr>
+          <p:cNvPr id="111" name="Google Shape;111;p14"/>
+          <p:cNvSpPr txBox="1"/>
+          <p:nvPr/>
+        </p:nvSpPr>
+        <p:spPr>
+          <a:xfrm>
+            <a:off x="571500" y="571500"/>
+            <a:ext cx="11601450" cy="504825"/>
+          </a:xfrm>
+          <a:prstGeom prst="rect">
+            <a:avLst/>
+          </a:prstGeom>
+          <a:noFill/>
+          <a:ln>
+            <a:noFill/>
+          </a:ln>
+        </p:spPr>
+        <p:txBody>
+          <a:bodyPr spcFirstLastPara="1" wrap="square" lIns="0" tIns="0" rIns="0" bIns="0" anchor="t" anchorCtr="0">
+            <a:spAutoFit/>
+          </a:bodyPr>
+          <a:lstStyle/>
+          <a:p>
+            <a:pPr marL="0" marR="0" lvl="0" indent="0" algn="l" rtl="0">
+              <a:spcBef>
+                <a:spcPts val="0"/>
+              </a:spcBef>
+              <a:spcAft>
+                <a:spcPts val="0"/>
+              </a:spcAft>
+              <a:buNone/>
+            </a:pPr>
+            <a:r>
+              <a:rPr lang="en-US" sz="3300" b="1" i="0" u="none" strike="noStrike" cap="none">
+                <a:solidFill>
+                  <a:srgbClr val="6B2D8B"/>
+                </a:solidFill>
+                <a:latin typeface="Syne"/>
+                <a:ea typeface="Syne"/>
+                <a:cs typeface="Syne"/>
+                <a:sym typeface="Syne"/>
+              </a:rPr>
+              <a:t>Strategic Value Proposition</a:t>
+            </a:r>
+            <a:endParaRPr/>
+          </a:p>
+        </p:txBody>
+      </p:sp>
+    </p:spTree>
+  </p:cSld>
+  <p:clrMapOvr>
+    <a:masterClrMapping/>
+  </p:clrMapOvr>
+</p:sld>
+</file>
+
+<file path=ppt/slides/slide20.xml><?xml version="1.0" encoding="utf-8"?>
 <p:sld xmlns:a="http://schemas.openxmlformats.org/drawingml/2006/main" xmlns:r="http://schemas.openxmlformats.org/officeDocument/2006/relationships" xmlns:p="http://schemas.openxmlformats.org/presentationml/2006/main">
   <p:cSld>
     <p:spTree>
@@ -13137,7 +15662,7 @@
 </p:sld>
 </file>
 
-<file path=ppt/slides/slide18.xml><?xml version="1.0" encoding="utf-8"?>
+<file path=ppt/slides/slide21.xml><?xml version="1.0" encoding="utf-8"?>
 <p:sld xmlns:a="http://schemas.openxmlformats.org/drawingml/2006/main" xmlns:r="http://schemas.openxmlformats.org/officeDocument/2006/relationships" xmlns:p="http://schemas.openxmlformats.org/presentationml/2006/main">
   <p:cSld>
     <p:spTree>
@@ -13197,7 +15722,7 @@
 </p:sld>
 </file>
 
-<file path=ppt/slides/slide19.xml><?xml version="1.0" encoding="utf-8"?>
+<file path=ppt/slides/slide22.xml><?xml version="1.0" encoding="utf-8"?>
 <p:sld xmlns:a="http://schemas.openxmlformats.org/drawingml/2006/main" xmlns:r="http://schemas.openxmlformats.org/officeDocument/2006/relationships" xmlns:p="http://schemas.openxmlformats.org/presentationml/2006/main">
   <p:cSld>
     <p:spTree>
@@ -13250,668 +15775,6 @@
         <p14:creationId xmlns:p14="http://schemas.microsoft.com/office/powerpoint/2010/main" val="1752231979"/>
       </p:ext>
     </p:extLst>
-  </p:cSld>
-  <p:clrMapOvr>
-    <a:masterClrMapping/>
-  </p:clrMapOvr>
-</p:sld>
-</file>
-
-<file path=ppt/slides/slide2.xml><?xml version="1.0" encoding="utf-8"?>
-<p:sld xmlns:a="http://schemas.openxmlformats.org/drawingml/2006/main" xmlns:r="http://schemas.openxmlformats.org/officeDocument/2006/relationships" xmlns:p="http://schemas.openxmlformats.org/presentationml/2006/main">
-  <p:cSld>
-    <p:bg>
-      <p:bgPr>
-        <a:solidFill>
-          <a:srgbClr val="F5ECF5"/>
-        </a:solidFill>
-        <a:effectLst/>
-      </p:bgPr>
-    </p:bg>
-    <p:spTree>
-      <p:nvGrpSpPr>
-        <p:cNvPr id="1" name="Shape 94"/>
-        <p:cNvGrpSpPr/>
-        <p:nvPr/>
-      </p:nvGrpSpPr>
-      <p:grpSpPr>
-        <a:xfrm>
-          <a:off x="0" y="0"/>
-          <a:ext cx="0" cy="0"/>
-          <a:chOff x="0" y="0"/>
-          <a:chExt cx="0" cy="0"/>
-        </a:xfrm>
-      </p:grpSpPr>
-      <p:pic>
-        <p:nvPicPr>
-          <p:cNvPr id="95" name="Google Shape;95;p14" descr="image.png"/>
-          <p:cNvPicPr preferRelativeResize="0"/>
-          <p:nvPr/>
-        </p:nvPicPr>
-        <p:blipFill rotWithShape="1">
-          <a:blip r:embed="rId3">
-            <a:alphaModFix/>
-          </a:blip>
-          <a:srcRect/>
-          <a:stretch/>
-        </p:blipFill>
-        <p:spPr>
-          <a:xfrm>
-            <a:off x="0" y="0"/>
-            <a:ext cx="12192000" cy="6858000"/>
-          </a:xfrm>
-          <a:prstGeom prst="rect">
-            <a:avLst/>
-          </a:prstGeom>
-          <a:noFill/>
-          <a:ln>
-            <a:noFill/>
-          </a:ln>
-        </p:spPr>
-      </p:pic>
-      <p:pic>
-        <p:nvPicPr>
-          <p:cNvPr id="96" name="Google Shape;96;p14" descr="image.png"/>
-          <p:cNvPicPr preferRelativeResize="0"/>
-          <p:nvPr/>
-        </p:nvPicPr>
-        <p:blipFill rotWithShape="1">
-          <a:blip r:embed="rId4">
-            <a:alphaModFix/>
-          </a:blip>
-          <a:srcRect/>
-          <a:stretch/>
-        </p:blipFill>
-        <p:spPr>
-          <a:xfrm>
-            <a:off x="571500" y="2000398"/>
-            <a:ext cx="3492549" cy="3742878"/>
-          </a:xfrm>
-          <a:prstGeom prst="rect">
-            <a:avLst/>
-          </a:prstGeom>
-          <a:noFill/>
-          <a:ln>
-            <a:noFill/>
-          </a:ln>
-        </p:spPr>
-      </p:pic>
-      <p:pic>
-        <p:nvPicPr>
-          <p:cNvPr id="97" name="Google Shape;97;p14" descr="image.png"/>
-          <p:cNvPicPr preferRelativeResize="0"/>
-          <p:nvPr/>
-        </p:nvPicPr>
-        <p:blipFill rotWithShape="1">
-          <a:blip r:embed="rId5">
-            <a:alphaModFix/>
-          </a:blip>
-          <a:srcRect/>
-          <a:stretch/>
-        </p:blipFill>
-        <p:spPr>
-          <a:xfrm>
-            <a:off x="4349799" y="2000398"/>
-            <a:ext cx="3492549" cy="3742878"/>
-          </a:xfrm>
-          <a:prstGeom prst="rect">
-            <a:avLst/>
-          </a:prstGeom>
-          <a:noFill/>
-          <a:ln>
-            <a:noFill/>
-          </a:ln>
-        </p:spPr>
-      </p:pic>
-      <p:pic>
-        <p:nvPicPr>
-          <p:cNvPr id="98" name="Google Shape;98;p14" descr="image.png"/>
-          <p:cNvPicPr preferRelativeResize="0"/>
-          <p:nvPr/>
-        </p:nvPicPr>
-        <p:blipFill rotWithShape="1">
-          <a:blip r:embed="rId6">
-            <a:alphaModFix/>
-          </a:blip>
-          <a:srcRect/>
-          <a:stretch/>
-        </p:blipFill>
-        <p:spPr>
-          <a:xfrm>
-            <a:off x="8128099" y="2000398"/>
-            <a:ext cx="3492549" cy="3742878"/>
-          </a:xfrm>
-          <a:prstGeom prst="rect">
-            <a:avLst/>
-          </a:prstGeom>
-          <a:noFill/>
-          <a:ln>
-            <a:noFill/>
-          </a:ln>
-        </p:spPr>
-      </p:pic>
-      <p:pic>
-        <p:nvPicPr>
-          <p:cNvPr id="99" name="Google Shape;99;p14" descr="image.png"/>
-          <p:cNvPicPr preferRelativeResize="0"/>
-          <p:nvPr/>
-        </p:nvPicPr>
-        <p:blipFill rotWithShape="1">
-          <a:blip r:embed="rId7">
-            <a:alphaModFix/>
-          </a:blip>
-          <a:srcRect/>
-          <a:stretch/>
-        </p:blipFill>
-        <p:spPr>
-          <a:xfrm>
-            <a:off x="914400" y="2343298"/>
-            <a:ext cx="762000" cy="762000"/>
-          </a:xfrm>
-          <a:prstGeom prst="rect">
-            <a:avLst/>
-          </a:prstGeom>
-          <a:noFill/>
-          <a:ln>
-            <a:noFill/>
-          </a:ln>
-        </p:spPr>
-      </p:pic>
-      <p:sp>
-        <p:nvSpPr>
-          <p:cNvPr id="100" name="Google Shape;100;p14"/>
-          <p:cNvSpPr txBox="1"/>
-          <p:nvPr/>
-        </p:nvSpPr>
-        <p:spPr>
-          <a:xfrm>
-            <a:off x="914400" y="3343423"/>
-            <a:ext cx="1950243" cy="323850"/>
-          </a:xfrm>
-          <a:prstGeom prst="rect">
-            <a:avLst/>
-          </a:prstGeom>
-          <a:noFill/>
-          <a:ln>
-            <a:noFill/>
-          </a:ln>
-        </p:spPr>
-        <p:txBody>
-          <a:bodyPr spcFirstLastPara="1" wrap="square" lIns="0" tIns="0" rIns="0" bIns="0" anchor="t" anchorCtr="0">
-            <a:spAutoFit/>
-          </a:bodyPr>
-          <a:lstStyle/>
-          <a:p>
-            <a:pPr marL="0" marR="0" lvl="0" indent="0" algn="l" rtl="0">
-              <a:spcBef>
-                <a:spcPts val="0"/>
-              </a:spcBef>
-              <a:spcAft>
-                <a:spcPts val="0"/>
-              </a:spcAft>
-              <a:buNone/>
-            </a:pPr>
-            <a:r>
-              <a:rPr lang="en-US" sz="2100" b="1" i="0" u="none" strike="noStrike" cap="none">
-                <a:solidFill>
-                  <a:srgbClr val="6B2D8B"/>
-                </a:solidFill>
-                <a:latin typeface="Syne"/>
-                <a:ea typeface="Syne"/>
-                <a:cs typeface="Syne"/>
-                <a:sym typeface="Syne"/>
-              </a:rPr>
-              <a:t>Data Quality</a:t>
-            </a:r>
-            <a:endParaRPr/>
-          </a:p>
-        </p:txBody>
-      </p:sp>
-      <p:sp>
-        <p:nvSpPr>
-          <p:cNvPr id="101" name="Google Shape;101;p14"/>
-          <p:cNvSpPr txBox="1"/>
-          <p:nvPr/>
-        </p:nvSpPr>
-        <p:spPr>
-          <a:xfrm>
-            <a:off x="914400" y="3810148"/>
-            <a:ext cx="2806749" cy="1447353"/>
-          </a:xfrm>
-          <a:prstGeom prst="rect">
-            <a:avLst/>
-          </a:prstGeom>
-          <a:noFill/>
-          <a:ln>
-            <a:noFill/>
-          </a:ln>
-        </p:spPr>
-        <p:txBody>
-          <a:bodyPr spcFirstLastPara="1" wrap="square" lIns="0" tIns="0" rIns="0" bIns="0" anchor="t" anchorCtr="0">
-            <a:spAutoFit/>
-          </a:bodyPr>
-          <a:lstStyle/>
-          <a:p>
-            <a:pPr marL="0" marR="0" lvl="0" indent="0" algn="l" rtl="0">
-              <a:lnSpc>
-                <a:spcPct val="159929"/>
-              </a:lnSpc>
-              <a:spcBef>
-                <a:spcPts val="0"/>
-              </a:spcBef>
-              <a:spcAft>
-                <a:spcPts val="0"/>
-              </a:spcAft>
-              <a:buNone/>
-            </a:pPr>
-            <a:r>
-              <a:rPr lang="en-US" sz="1425" b="0" i="0" u="none" strike="noStrike" cap="none">
-                <a:solidFill>
-                  <a:srgbClr val="2D1B3D"/>
-                </a:solidFill>
-                <a:latin typeface="DM Sans"/>
-                <a:ea typeface="DM Sans"/>
-                <a:cs typeface="DM Sans"/>
-                <a:sym typeface="DM Sans"/>
-              </a:rPr>
-              <a:t>Automated five-layer null remediation eliminates manual data-cleaning effort, reducing pre-analysis preparation time by an estimated 70–85%.</a:t>
-            </a:r>
-            <a:endParaRPr/>
-          </a:p>
-        </p:txBody>
-      </p:sp>
-      <p:pic>
-        <p:nvPicPr>
-          <p:cNvPr id="102" name="Google Shape;102;p14" descr="image.png"/>
-          <p:cNvPicPr preferRelativeResize="0"/>
-          <p:nvPr/>
-        </p:nvPicPr>
-        <p:blipFill rotWithShape="1">
-          <a:blip r:embed="rId8">
-            <a:alphaModFix/>
-          </a:blip>
-          <a:srcRect/>
-          <a:stretch/>
-        </p:blipFill>
-        <p:spPr>
-          <a:xfrm>
-            <a:off x="4692699" y="2343298"/>
-            <a:ext cx="762000" cy="762000"/>
-          </a:xfrm>
-          <a:prstGeom prst="rect">
-            <a:avLst/>
-          </a:prstGeom>
-          <a:noFill/>
-          <a:ln>
-            <a:noFill/>
-          </a:ln>
-        </p:spPr>
-      </p:pic>
-      <p:sp>
-        <p:nvSpPr>
-          <p:cNvPr id="103" name="Google Shape;103;p14"/>
-          <p:cNvSpPr txBox="1"/>
-          <p:nvPr/>
-        </p:nvSpPr>
-        <p:spPr>
-          <a:xfrm>
-            <a:off x="4692699" y="3343423"/>
-            <a:ext cx="1610201" cy="323850"/>
-          </a:xfrm>
-          <a:prstGeom prst="rect">
-            <a:avLst/>
-          </a:prstGeom>
-          <a:noFill/>
-          <a:ln>
-            <a:noFill/>
-          </a:ln>
-        </p:spPr>
-        <p:txBody>
-          <a:bodyPr spcFirstLastPara="1" wrap="square" lIns="0" tIns="0" rIns="0" bIns="0" anchor="t" anchorCtr="0">
-            <a:spAutoFit/>
-          </a:bodyPr>
-          <a:lstStyle/>
-          <a:p>
-            <a:pPr marL="0" marR="0" lvl="0" indent="0" algn="l" rtl="0">
-              <a:spcBef>
-                <a:spcPts val="0"/>
-              </a:spcBef>
-              <a:spcAft>
-                <a:spcPts val="0"/>
-              </a:spcAft>
-              <a:buNone/>
-            </a:pPr>
-            <a:r>
-              <a:rPr lang="en-US" sz="2100" b="1" i="0" u="none" strike="noStrike" cap="none">
-                <a:solidFill>
-                  <a:srgbClr val="6B2D8B"/>
-                </a:solidFill>
-                <a:latin typeface="Syne"/>
-                <a:ea typeface="Syne"/>
-                <a:cs typeface="Syne"/>
-                <a:sym typeface="Syne"/>
-              </a:rPr>
-              <a:t>Scalability</a:t>
-            </a:r>
-            <a:endParaRPr/>
-          </a:p>
-        </p:txBody>
-      </p:sp>
-      <p:sp>
-        <p:nvSpPr>
-          <p:cNvPr id="104" name="Google Shape;104;p14"/>
-          <p:cNvSpPr txBox="1"/>
-          <p:nvPr/>
-        </p:nvSpPr>
-        <p:spPr>
-          <a:xfrm>
-            <a:off x="4692699" y="3810148"/>
-            <a:ext cx="2806749" cy="1447353"/>
-          </a:xfrm>
-          <a:prstGeom prst="rect">
-            <a:avLst/>
-          </a:prstGeom>
-          <a:noFill/>
-          <a:ln>
-            <a:noFill/>
-          </a:ln>
-        </p:spPr>
-        <p:txBody>
-          <a:bodyPr spcFirstLastPara="1" wrap="square" lIns="0" tIns="0" rIns="0" bIns="0" anchor="t" anchorCtr="0">
-            <a:spAutoFit/>
-          </a:bodyPr>
-          <a:lstStyle/>
-          <a:p>
-            <a:pPr marL="0" marR="0" lvl="0" indent="0" algn="l" rtl="0">
-              <a:lnSpc>
-                <a:spcPct val="159929"/>
-              </a:lnSpc>
-              <a:spcBef>
-                <a:spcPts val="0"/>
-              </a:spcBef>
-              <a:spcAft>
-                <a:spcPts val="0"/>
-              </a:spcAft>
-              <a:buNone/>
-            </a:pPr>
-            <a:r>
-              <a:rPr lang="en-US" sz="1425" b="0" i="0" u="none" strike="noStrike" cap="none">
-                <a:solidFill>
-                  <a:srgbClr val="2D1B3D"/>
-                </a:solidFill>
-                <a:latin typeface="DM Sans"/>
-                <a:ea typeface="DM Sans"/>
-                <a:cs typeface="DM Sans"/>
-                <a:sym typeface="DM Sans"/>
-              </a:rPr>
-              <a:t>Handles datasets from hundreds to tens of thousands of rows with consistent performance, leveraging Pandas vectorised operations.</a:t>
-            </a:r>
-            <a:endParaRPr/>
-          </a:p>
-        </p:txBody>
-      </p:sp>
-      <p:pic>
-        <p:nvPicPr>
-          <p:cNvPr id="105" name="Google Shape;105;p14" descr="image.png"/>
-          <p:cNvPicPr preferRelativeResize="0"/>
-          <p:nvPr/>
-        </p:nvPicPr>
-        <p:blipFill rotWithShape="1">
-          <a:blip r:embed="rId9">
-            <a:alphaModFix/>
-          </a:blip>
-          <a:srcRect/>
-          <a:stretch/>
-        </p:blipFill>
-        <p:spPr>
-          <a:xfrm>
-            <a:off x="8470999" y="2343298"/>
-            <a:ext cx="762000" cy="762000"/>
-          </a:xfrm>
-          <a:prstGeom prst="rect">
-            <a:avLst/>
-          </a:prstGeom>
-          <a:noFill/>
-          <a:ln>
-            <a:noFill/>
-          </a:ln>
-        </p:spPr>
-      </p:pic>
-      <p:sp>
-        <p:nvSpPr>
-          <p:cNvPr id="106" name="Google Shape;106;p14"/>
-          <p:cNvSpPr txBox="1"/>
-          <p:nvPr/>
-        </p:nvSpPr>
-        <p:spPr>
-          <a:xfrm>
-            <a:off x="8470999" y="3343423"/>
-            <a:ext cx="2340292" cy="323850"/>
-          </a:xfrm>
-          <a:prstGeom prst="rect">
-            <a:avLst/>
-          </a:prstGeom>
-          <a:noFill/>
-          <a:ln>
-            <a:noFill/>
-          </a:ln>
-        </p:spPr>
-        <p:txBody>
-          <a:bodyPr spcFirstLastPara="1" wrap="square" lIns="0" tIns="0" rIns="0" bIns="0" anchor="t" anchorCtr="0">
-            <a:spAutoFit/>
-          </a:bodyPr>
-          <a:lstStyle/>
-          <a:p>
-            <a:pPr marL="0" marR="0" lvl="0" indent="0" algn="l" rtl="0">
-              <a:spcBef>
-                <a:spcPts val="0"/>
-              </a:spcBef>
-              <a:spcAft>
-                <a:spcPts val="0"/>
-              </a:spcAft>
-              <a:buNone/>
-            </a:pPr>
-            <a:r>
-              <a:rPr lang="en-US" sz="2100" b="1" i="0" u="none" strike="noStrike" cap="none">
-                <a:solidFill>
-                  <a:srgbClr val="6B2D8B"/>
-                </a:solidFill>
-                <a:latin typeface="Syne"/>
-                <a:ea typeface="Syne"/>
-                <a:cs typeface="Syne"/>
-                <a:sym typeface="Syne"/>
-              </a:rPr>
-              <a:t>Insight Velocity</a:t>
-            </a:r>
-            <a:endParaRPr/>
-          </a:p>
-        </p:txBody>
-      </p:sp>
-      <p:sp>
-        <p:nvSpPr>
-          <p:cNvPr id="107" name="Google Shape;107;p14"/>
-          <p:cNvSpPr txBox="1"/>
-          <p:nvPr/>
-        </p:nvSpPr>
-        <p:spPr>
-          <a:xfrm>
-            <a:off x="8470999" y="3810148"/>
-            <a:ext cx="2806749" cy="1447353"/>
-          </a:xfrm>
-          <a:prstGeom prst="rect">
-            <a:avLst/>
-          </a:prstGeom>
-          <a:noFill/>
-          <a:ln>
-            <a:noFill/>
-          </a:ln>
-        </p:spPr>
-        <p:txBody>
-          <a:bodyPr spcFirstLastPara="1" wrap="square" lIns="0" tIns="0" rIns="0" bIns="0" anchor="t" anchorCtr="0">
-            <a:spAutoFit/>
-          </a:bodyPr>
-          <a:lstStyle/>
-          <a:p>
-            <a:pPr marL="0" marR="0" lvl="0" indent="0" algn="l" rtl="0">
-              <a:lnSpc>
-                <a:spcPct val="159929"/>
-              </a:lnSpc>
-              <a:spcBef>
-                <a:spcPts val="0"/>
-              </a:spcBef>
-              <a:spcAft>
-                <a:spcPts val="0"/>
-              </a:spcAft>
-              <a:buNone/>
-            </a:pPr>
-            <a:r>
-              <a:rPr lang="en-US" sz="1425" b="0" i="0" u="none" strike="noStrike" cap="none">
-                <a:solidFill>
-                  <a:srgbClr val="2D1B3D"/>
-                </a:solidFill>
-                <a:latin typeface="DM Sans"/>
-                <a:ea typeface="DM Sans"/>
-                <a:cs typeface="DM Sans"/>
-                <a:sym typeface="DM Sans"/>
-              </a:rPr>
-              <a:t>Full Exploratory Data Analysis (EDA)—including descriptive stats, correlations, and distributions—delivered in a single button click.</a:t>
-            </a:r>
-            <a:endParaRPr/>
-          </a:p>
-        </p:txBody>
-      </p:sp>
-      <p:pic>
-        <p:nvPicPr>
-          <p:cNvPr id="108" name="Google Shape;108;p14" descr="image.png"/>
-          <p:cNvPicPr preferRelativeResize="0"/>
-          <p:nvPr/>
-        </p:nvPicPr>
-        <p:blipFill rotWithShape="1">
-          <a:blip r:embed="rId10">
-            <a:alphaModFix/>
-          </a:blip>
-          <a:srcRect/>
-          <a:stretch/>
-        </p:blipFill>
-        <p:spPr>
-          <a:xfrm>
-            <a:off x="1071562" y="2524273"/>
-            <a:ext cx="447675" cy="400050"/>
-          </a:xfrm>
-          <a:prstGeom prst="rect">
-            <a:avLst/>
-          </a:prstGeom>
-          <a:noFill/>
-          <a:ln>
-            <a:noFill/>
-          </a:ln>
-        </p:spPr>
-      </p:pic>
-      <p:pic>
-        <p:nvPicPr>
-          <p:cNvPr id="109" name="Google Shape;109;p14" descr="image.png"/>
-          <p:cNvPicPr preferRelativeResize="0"/>
-          <p:nvPr/>
-        </p:nvPicPr>
-        <p:blipFill rotWithShape="1">
-          <a:blip r:embed="rId11">
-            <a:alphaModFix/>
-          </a:blip>
-          <a:srcRect/>
-          <a:stretch/>
-        </p:blipFill>
-        <p:spPr>
-          <a:xfrm>
-            <a:off x="4873674" y="2524273"/>
-            <a:ext cx="400050" cy="400050"/>
-          </a:xfrm>
-          <a:prstGeom prst="rect">
-            <a:avLst/>
-          </a:prstGeom>
-          <a:noFill/>
-          <a:ln>
-            <a:noFill/>
-          </a:ln>
-        </p:spPr>
-      </p:pic>
-      <p:pic>
-        <p:nvPicPr>
-          <p:cNvPr id="110" name="Google Shape;110;p14" descr="image.png"/>
-          <p:cNvPicPr preferRelativeResize="0"/>
-          <p:nvPr/>
-        </p:nvPicPr>
-        <p:blipFill rotWithShape="1">
-          <a:blip r:embed="rId12">
-            <a:alphaModFix/>
-          </a:blip>
-          <a:srcRect/>
-          <a:stretch/>
-        </p:blipFill>
-        <p:spPr>
-          <a:xfrm>
-            <a:off x="8651974" y="2524273"/>
-            <a:ext cx="400050" cy="400050"/>
-          </a:xfrm>
-          <a:prstGeom prst="rect">
-            <a:avLst/>
-          </a:prstGeom>
-          <a:noFill/>
-          <a:ln>
-            <a:noFill/>
-          </a:ln>
-        </p:spPr>
-      </p:pic>
-      <p:sp>
-        <p:nvSpPr>
-          <p:cNvPr id="111" name="Google Shape;111;p14"/>
-          <p:cNvSpPr txBox="1"/>
-          <p:nvPr/>
-        </p:nvSpPr>
-        <p:spPr>
-          <a:xfrm>
-            <a:off x="571500" y="571500"/>
-            <a:ext cx="11601450" cy="504825"/>
-          </a:xfrm>
-          <a:prstGeom prst="rect">
-            <a:avLst/>
-          </a:prstGeom>
-          <a:noFill/>
-          <a:ln>
-            <a:noFill/>
-          </a:ln>
-        </p:spPr>
-        <p:txBody>
-          <a:bodyPr spcFirstLastPara="1" wrap="square" lIns="0" tIns="0" rIns="0" bIns="0" anchor="t" anchorCtr="0">
-            <a:spAutoFit/>
-          </a:bodyPr>
-          <a:lstStyle/>
-          <a:p>
-            <a:pPr marL="0" marR="0" lvl="0" indent="0" algn="l" rtl="0">
-              <a:spcBef>
-                <a:spcPts val="0"/>
-              </a:spcBef>
-              <a:spcAft>
-                <a:spcPts val="0"/>
-              </a:spcAft>
-              <a:buNone/>
-            </a:pPr>
-            <a:r>
-              <a:rPr lang="en-US" sz="3300" b="1" i="0" u="none" strike="noStrike" cap="none">
-                <a:solidFill>
-                  <a:srgbClr val="6B2D8B"/>
-                </a:solidFill>
-                <a:latin typeface="Syne"/>
-                <a:ea typeface="Syne"/>
-                <a:cs typeface="Syne"/>
-                <a:sym typeface="Syne"/>
-              </a:rPr>
-              <a:t>Strategic Value Proposition</a:t>
-            </a:r>
-            <a:endParaRPr/>
-          </a:p>
-        </p:txBody>
-      </p:sp>
-    </p:spTree>
   </p:cSld>
   <p:clrMapOvr>
     <a:masterClrMapping/>
@@ -20702,7 +22565,7 @@
                         <a:buNone/>
                       </a:pPr>
                       <a:r>
-                        <a:rPr lang="en-US" sz="1500" b="1" i="0" u="none" strike="noStrike" cap="none">
+                        <a:rPr lang="en-US" sz="1500" b="1" i="0" u="none" strike="noStrike" cap="none" dirty="0">
                           <a:solidFill>
                             <a:srgbClr val="2D1B3D"/>
                           </a:solidFill>
@@ -20713,7 +22576,7 @@
                         </a:rPr>
                         <a:t>Business Value</a:t>
                       </a:r>
-                      <a:endParaRPr/>
+                      <a:endParaRPr dirty="0"/>
                     </a:p>
                   </a:txBody>
                   <a:tcPr marL="63500" marR="63500" marT="25400" marB="25400" anchor="ctr">
@@ -21023,7 +22886,7 @@
                         <a:buNone/>
                       </a:pPr>
                       <a:r>
-                        <a:rPr lang="en-US" sz="1425" b="1" i="0" u="none" strike="noStrike" cap="none">
+                        <a:rPr lang="en-US" sz="1425" b="1" i="0" u="none" strike="noStrike" cap="none" dirty="0">
                           <a:solidFill>
                             <a:srgbClr val="2D1B3D"/>
                           </a:solidFill>
@@ -21034,7 +22897,7 @@
                         </a:rPr>
                         <a:t>v1.2</a:t>
                       </a:r>
-                      <a:endParaRPr/>
+                      <a:endParaRPr dirty="0"/>
                     </a:p>
                   </a:txBody>
                   <a:tcPr marL="63500" marR="63500" marT="25400" marB="25400" anchor="ctr">
@@ -21898,7 +23761,7 @@
                         <a:buNone/>
                       </a:pPr>
                       <a:r>
-                        <a:rPr lang="en-US" sz="1425" b="0" i="0" u="none" strike="noStrike" cap="none">
+                        <a:rPr lang="en-US" sz="1425" b="0" i="0" u="none" strike="noStrike" cap="none" dirty="0">
                           <a:solidFill>
                             <a:srgbClr val="2D1B3D"/>
                           </a:solidFill>
@@ -21909,7 +23772,7 @@
                         </a:rPr>
                         <a:t>Isolation Forest-based anomaly flagging for proactive detection of unusual fitness metric patterns.</a:t>
                       </a:r>
-                      <a:endParaRPr/>
+                      <a:endParaRPr dirty="0"/>
                     </a:p>
                   </a:txBody>
                   <a:tcPr marL="63500" marR="63500" marT="25400" marB="25400" anchor="ctr">
